--- a/ExpensePilot_DevOps_Capstone.pptx
+++ b/ExpensePilot_DevOps_Capstone.pptx
@@ -119,30 +119,30 @@
   <p:extLst>
     <p:ext uri="{521415D9-36F7-43E2-AB2F-B90AF26B5E84}">
       <p14:sectionLst xmlns:p14="http://schemas.microsoft.com/office/powerpoint/2010/main">
-        <p14:section name="Intro" id="{51046970-ec43-4570-2187-05a8533a68ae}">
+        <p14:section name="Intro" id="{79c61ff4-c89a-a9ad-6e41-bf2d2ec19946}">
           <p14:sldIdLst>
             <p14:sldId id="256"/>
           </p14:sldIdLst>
         </p14:section>
-        <p14:section name="Architecture" id="{64b9d7e0-4de3-796c-78db-4d231025b780}">
+        <p14:section name="Architecture" id="{d24cee12-5d26-ee17-61c6-57e82e8cc580}">
           <p14:sldIdLst>
             <p14:sldId id="257"/>
           </p14:sldIdLst>
         </p14:section>
-        <p14:section name="Build" id="{b94dd731-7e07-8355-112a-da4327a8b038}">
+        <p14:section name="Build" id="{a6c1132c-a7d2-67b8-c47b-7dfd2feba772}">
           <p14:sldIdLst>
             <p14:sldId id="258"/>
             <p14:sldId id="259"/>
           </p14:sldIdLst>
         </p14:section>
-        <p14:section name="Ship" id="{c74c1211-d02e-01b1-89ac-1e480377397a}">
+        <p14:section name="Ship" id="{8360f964-ac5e-014a-a1a9-dfbd4c589e08}">
           <p14:sldIdLst>
             <p14:sldId id="260"/>
             <p14:sldId id="261"/>
             <p14:sldId id="262"/>
           </p14:sldIdLst>
         </p14:section>
-        <p14:section name="Run" id="{d3d178f6-faad-6afd-20cc-bd31c08e58c5}">
+        <p14:section name="Run" id="{b642f794-5980-18a0-bcce-0f6c9ca93f7d}">
           <p14:sldIdLst>
             <p14:sldId id="263"/>
             <p14:sldId id="264"/>
@@ -150,12 +150,12 @@
             <p14:sldId id="266"/>
           </p14:sldIdLst>
         </p14:section>
-        <p14:section name="Extras" id="{2affa29a-35be-a0da-133e-e32e05e493ad}">
+        <p14:section name="Extras" id="{f915dbd5-e8c4-1a68-550d-e220a7f5de40}">
           <p14:sldIdLst>
             <p14:sldId id="267"/>
           </p14:sldIdLst>
         </p14:section>
-        <p14:section name="Demo" id="{4286db3d-6a35-92dd-bc7d-b840587482c2}">
+        <p14:section name="Demo" id="{69d39b2d-a93f-9c9c-2d7b-d5be1fe4e5fc}">
           <p14:sldIdLst>
             <p14:sldId id="268"/>
           </p14:sldIdLst>
@@ -2535,18 +2535,488 @@
       </p:sp>
       <p:sp>
         <p:nvSpPr>
-          <p:cNvPr id="3" name="module chip"/>
+          <p:cNvPr id="3" name="node Ingress"/>
           <p:cNvSpPr/>
           <p:nvPr/>
         </p:nvSpPr>
         <p:spPr>
           <a:xfrm>
-            <a:off x="10012680" y="548640"/>
-            <a:ext cx="1627632" cy="411480"/>
+            <a:off x="548640" y="2331720"/>
+            <a:ext cx="1828800" cy="914400"/>
           </a:xfrm>
           <a:prstGeom prst="roundRect">
             <a:avLst>
-              <a:gd name="adj" fmla="val 17778"/>
+              <a:gd name="adj" fmla="val 10000"/>
+            </a:avLst>
+          </a:prstGeom>
+          <a:solidFill>
+            <a:schemeClr val="accent6"/>
+          </a:solidFill>
+          <a:ln w="12700">
+            <a:solidFill>
+              <a:schemeClr val="accent3"/>
+            </a:solidFill>
+            <a:prstDash val="solid"/>
+          </a:ln>
+        </p:spPr>
+      </p:sp>
+      <p:sp>
+        <p:nvSpPr>
+          <p:cNvPr id="4" name="Text 2"/>
+          <p:cNvSpPr txBox="1"/>
+          <p:nvPr/>
+        </p:nvSpPr>
+        <p:spPr>
+          <a:xfrm>
+            <a:off x="658368" y="2331720"/>
+            <a:ext cx="1609344" cy="914400"/>
+          </a:xfrm>
+          <a:prstGeom prst="rect">
+            <a:avLst/>
+          </a:prstGeom>
+          <a:noFill/>
+          <a:ln/>
+        </p:spPr>
+        <p:txBody>
+          <a:bodyPr wrap="square" lIns="0" tIns="0" rIns="0" bIns="0" rtlCol="0" anchor="ctr"/>
+          <a:lstStyle/>
+          <a:p>
+            <a:pPr indent="0" marL="0">
+              <a:buNone/>
+            </a:pPr>
+            <a:r>
+              <a:rPr lang="en-US" sz="1400" b="1" dirty="0">
+                <a:solidFill>
+                  <a:schemeClr val="tx1"/>
+                </a:solidFill>
+              </a:rPr>
+              <a:t>Ingress</a:t>
+            </a:r>
+            <a:endParaRPr lang="en-US" sz="1400" dirty="0"/>
+          </a:p>
+          <a:p>
+            <a:pPr indent="0" marL="0">
+              <a:buNone/>
+            </a:pPr>
+            <a:r>
+              <a:rPr lang="en-US" sz="1100" dirty="0">
+                <a:solidFill>
+                  <a:schemeClr val="tx2"/>
+                </a:solidFill>
+                <a:latin typeface="Courier New" pitchFamily="34" charset="0"/>
+                <a:ea typeface="Courier New" pitchFamily="34" charset="-122"/>
+                <a:cs typeface="Courier New" pitchFamily="34" charset="-120"/>
+              </a:rPr>
+              <a:t>expensepilot.local</a:t>
+            </a:r>
+            <a:endParaRPr lang="en-US" sz="1400" dirty="0"/>
+          </a:p>
+        </p:txBody>
+      </p:sp>
+      <p:sp>
+        <p:nvSpPr>
+          <p:cNvPr id="5" name="node frontend svc :80"/>
+          <p:cNvSpPr/>
+          <p:nvPr/>
+        </p:nvSpPr>
+        <p:spPr>
+          <a:xfrm>
+            <a:off x="3063240" y="1417320"/>
+            <a:ext cx="2606040" cy="777240"/>
+          </a:xfrm>
+          <a:prstGeom prst="roundRect">
+            <a:avLst>
+              <a:gd name="adj" fmla="val 11765"/>
+            </a:avLst>
+          </a:prstGeom>
+          <a:solidFill>
+            <a:schemeClr val="accent6"/>
+          </a:solidFill>
+          <a:ln w="12700">
+            <a:solidFill>
+              <a:schemeClr val="accent3"/>
+            </a:solidFill>
+            <a:prstDash val="solid"/>
+          </a:ln>
+        </p:spPr>
+      </p:sp>
+      <p:sp>
+        <p:nvSpPr>
+          <p:cNvPr id="6" name="Text 4"/>
+          <p:cNvSpPr txBox="1"/>
+          <p:nvPr/>
+        </p:nvSpPr>
+        <p:spPr>
+          <a:xfrm>
+            <a:off x="3172968" y="1417320"/>
+            <a:ext cx="2386584" cy="777240"/>
+          </a:xfrm>
+          <a:prstGeom prst="rect">
+            <a:avLst/>
+          </a:prstGeom>
+          <a:noFill/>
+          <a:ln/>
+        </p:spPr>
+        <p:txBody>
+          <a:bodyPr wrap="square" lIns="0" tIns="0" rIns="0" bIns="0" rtlCol="0" anchor="ctr"/>
+          <a:lstStyle/>
+          <a:p>
+            <a:pPr indent="0" marL="0">
+              <a:buNone/>
+            </a:pPr>
+            <a:r>
+              <a:rPr lang="en-US" sz="1400" b="1" dirty="0">
+                <a:solidFill>
+                  <a:schemeClr val="tx1"/>
+                </a:solidFill>
+              </a:rPr>
+              <a:t>frontend svc :80</a:t>
+            </a:r>
+            <a:endParaRPr lang="en-US" sz="1400" dirty="0"/>
+          </a:p>
+          <a:p>
+            <a:pPr indent="0" marL="0">
+              <a:buNone/>
+            </a:pPr>
+            <a:r>
+              <a:rPr lang="en-US" sz="1100" dirty="0">
+                <a:solidFill>
+                  <a:schemeClr val="tx2"/>
+                </a:solidFill>
+                <a:latin typeface="Courier New" pitchFamily="34" charset="0"/>
+                <a:ea typeface="Courier New" pitchFamily="34" charset="-122"/>
+                <a:cs typeface="Courier New" pitchFamily="34" charset="-120"/>
+              </a:rPr>
+              <a:t>ClusterIP, 2 pods</a:t>
+            </a:r>
+            <a:endParaRPr lang="en-US" sz="1400" dirty="0"/>
+          </a:p>
+        </p:txBody>
+      </p:sp>
+      <p:sp>
+        <p:nvSpPr>
+          <p:cNvPr id="7" name="node backend svc :8000"/>
+          <p:cNvSpPr/>
+          <p:nvPr/>
+        </p:nvSpPr>
+        <p:spPr>
+          <a:xfrm>
+            <a:off x="3063240" y="2423160"/>
+            <a:ext cx="2606040" cy="777240"/>
+          </a:xfrm>
+          <a:prstGeom prst="roundRect">
+            <a:avLst>
+              <a:gd name="adj" fmla="val 11765"/>
+            </a:avLst>
+          </a:prstGeom>
+          <a:solidFill>
+            <a:schemeClr val="accent6"/>
+          </a:solidFill>
+          <a:ln w="12700">
+            <a:solidFill>
+              <a:schemeClr val="accent3"/>
+            </a:solidFill>
+            <a:prstDash val="solid"/>
+          </a:ln>
+        </p:spPr>
+      </p:sp>
+      <p:sp>
+        <p:nvSpPr>
+          <p:cNvPr id="8" name="Text 6"/>
+          <p:cNvSpPr txBox="1"/>
+          <p:nvPr/>
+        </p:nvSpPr>
+        <p:spPr>
+          <a:xfrm>
+            <a:off x="3172968" y="2423160"/>
+            <a:ext cx="2386584" cy="777240"/>
+          </a:xfrm>
+          <a:prstGeom prst="rect">
+            <a:avLst/>
+          </a:prstGeom>
+          <a:noFill/>
+          <a:ln/>
+        </p:spPr>
+        <p:txBody>
+          <a:bodyPr wrap="square" lIns="0" tIns="0" rIns="0" bIns="0" rtlCol="0" anchor="ctr"/>
+          <a:lstStyle/>
+          <a:p>
+            <a:pPr indent="0" marL="0">
+              <a:buNone/>
+            </a:pPr>
+            <a:r>
+              <a:rPr lang="en-US" sz="1400" b="1" dirty="0">
+                <a:solidFill>
+                  <a:schemeClr val="tx1"/>
+                </a:solidFill>
+              </a:rPr>
+              <a:t>backend svc :8000</a:t>
+            </a:r>
+            <a:endParaRPr lang="en-US" sz="1400" dirty="0"/>
+          </a:p>
+          <a:p>
+            <a:pPr indent="0" marL="0">
+              <a:buNone/>
+            </a:pPr>
+            <a:r>
+              <a:rPr lang="en-US" sz="1100" dirty="0">
+                <a:solidFill>
+                  <a:schemeClr val="tx2"/>
+                </a:solidFill>
+                <a:latin typeface="Courier New" pitchFamily="34" charset="0"/>
+                <a:ea typeface="Courier New" pitchFamily="34" charset="-122"/>
+                <a:cs typeface="Courier New" pitchFamily="34" charset="-120"/>
+              </a:rPr>
+              <a:t>ClusterIP, 2 pods, HPA</a:t>
+            </a:r>
+            <a:endParaRPr lang="en-US" sz="1400" dirty="0"/>
+          </a:p>
+        </p:txBody>
+      </p:sp>
+      <p:sp>
+        <p:nvSpPr>
+          <p:cNvPr id="9" name="node postgres svc :5432"/>
+          <p:cNvSpPr/>
+          <p:nvPr/>
+        </p:nvSpPr>
+        <p:spPr>
+          <a:xfrm>
+            <a:off x="3063240" y="3429000"/>
+            <a:ext cx="2606040" cy="777240"/>
+          </a:xfrm>
+          <a:prstGeom prst="roundRect">
+            <a:avLst>
+              <a:gd name="adj" fmla="val 11765"/>
+            </a:avLst>
+          </a:prstGeom>
+          <a:solidFill>
+            <a:schemeClr val="accent6"/>
+          </a:solidFill>
+          <a:ln w="12700">
+            <a:solidFill>
+              <a:schemeClr val="accent3"/>
+            </a:solidFill>
+            <a:prstDash val="solid"/>
+          </a:ln>
+        </p:spPr>
+      </p:sp>
+      <p:sp>
+        <p:nvSpPr>
+          <p:cNvPr id="10" name="Text 8"/>
+          <p:cNvSpPr txBox="1"/>
+          <p:nvPr/>
+        </p:nvSpPr>
+        <p:spPr>
+          <a:xfrm>
+            <a:off x="3172968" y="3429000"/>
+            <a:ext cx="2386584" cy="777240"/>
+          </a:xfrm>
+          <a:prstGeom prst="rect">
+            <a:avLst/>
+          </a:prstGeom>
+          <a:noFill/>
+          <a:ln/>
+        </p:spPr>
+        <p:txBody>
+          <a:bodyPr wrap="square" lIns="0" tIns="0" rIns="0" bIns="0" rtlCol="0" anchor="ctr"/>
+          <a:lstStyle/>
+          <a:p>
+            <a:pPr indent="0" marL="0">
+              <a:buNone/>
+            </a:pPr>
+            <a:r>
+              <a:rPr lang="en-US" sz="1400" b="1" dirty="0">
+                <a:solidFill>
+                  <a:schemeClr val="tx1"/>
+                </a:solidFill>
+              </a:rPr>
+              <a:t>postgres svc :5432</a:t>
+            </a:r>
+            <a:endParaRPr lang="en-US" sz="1400" dirty="0"/>
+          </a:p>
+          <a:p>
+            <a:pPr indent="0" marL="0">
+              <a:buNone/>
+            </a:pPr>
+            <a:r>
+              <a:rPr lang="en-US" sz="1100" dirty="0">
+                <a:solidFill>
+                  <a:schemeClr val="tx2"/>
+                </a:solidFill>
+                <a:latin typeface="Courier New" pitchFamily="34" charset="0"/>
+                <a:ea typeface="Courier New" pitchFamily="34" charset="-122"/>
+                <a:cs typeface="Courier New" pitchFamily="34" charset="-120"/>
+              </a:rPr>
+              <a:t>ClusterIP, PVC 5Gi</a:t>
+            </a:r>
+            <a:endParaRPr lang="en-US" sz="1400" dirty="0"/>
+          </a:p>
+        </p:txBody>
+      </p:sp>
+      <p:sp>
+        <p:nvSpPr>
+          <p:cNvPr id="11" name="Shape 9"/>
+          <p:cNvSpPr/>
+          <p:nvPr/>
+        </p:nvSpPr>
+        <p:spPr>
+          <a:xfrm flipV="1">
+            <a:off x="2414016" y="1810512"/>
+            <a:ext cx="612648" cy="685800"/>
+          </a:xfrm>
+          <a:prstGeom prst="line">
+            <a:avLst/>
+          </a:prstGeom>
+          <a:noFill/>
+          <a:ln w="19050">
+            <a:solidFill>
+              <a:schemeClr val="accent1"/>
+            </a:solidFill>
+            <a:prstDash val="solid"/>
+            <a:tailEnd type="triangle"/>
+          </a:ln>
+        </p:spPr>
+      </p:sp>
+      <p:sp>
+        <p:nvSpPr>
+          <p:cNvPr id="12" name="Shape 10"/>
+          <p:cNvSpPr/>
+          <p:nvPr/>
+        </p:nvSpPr>
+        <p:spPr>
+          <a:xfrm>
+            <a:off x="2414016" y="2807208"/>
+            <a:ext cx="612648" cy="0"/>
+          </a:xfrm>
+          <a:prstGeom prst="line">
+            <a:avLst/>
+          </a:prstGeom>
+          <a:noFill/>
+          <a:ln w="19050">
+            <a:solidFill>
+              <a:schemeClr val="accent1"/>
+            </a:solidFill>
+            <a:prstDash val="solid"/>
+            <a:tailEnd type="triangle"/>
+          </a:ln>
+        </p:spPr>
+      </p:sp>
+      <p:sp>
+        <p:nvSpPr>
+          <p:cNvPr id="13" name="Shape 11"/>
+          <p:cNvSpPr/>
+          <p:nvPr/>
+        </p:nvSpPr>
+        <p:spPr>
+          <a:xfrm>
+            <a:off x="4370832" y="3218688"/>
+            <a:ext cx="0" cy="192024"/>
+          </a:xfrm>
+          <a:prstGeom prst="line">
+            <a:avLst/>
+          </a:prstGeom>
+          <a:noFill/>
+          <a:ln w="19050">
+            <a:solidFill>
+              <a:schemeClr val="accent1"/>
+            </a:solidFill>
+            <a:prstDash val="solid"/>
+            <a:tailEnd type="triangle"/>
+          </a:ln>
+        </p:spPr>
+      </p:sp>
+      <p:sp>
+        <p:nvSpPr>
+          <p:cNvPr id="14" name="Text 12"/>
+          <p:cNvSpPr txBox="1"/>
+          <p:nvPr/>
+        </p:nvSpPr>
+        <p:spPr>
+          <a:xfrm>
+            <a:off x="2487168" y="1874520"/>
+            <a:ext cx="274320" cy="256032"/>
+          </a:xfrm>
+          <a:prstGeom prst="rect">
+            <a:avLst/>
+          </a:prstGeom>
+          <a:noFill/>
+          <a:ln/>
+        </p:spPr>
+        <p:txBody>
+          <a:bodyPr wrap="square" lIns="0" tIns="0" rIns="0" bIns="0" rtlCol="0" anchor="ctr"/>
+          <a:lstStyle/>
+          <a:p>
+            <a:pPr indent="0" marL="0">
+              <a:buNone/>
+            </a:pPr>
+            <a:r>
+              <a:rPr lang="en-US" sz="1200" b="1" dirty="0">
+                <a:solidFill>
+                  <a:schemeClr val="accent1"/>
+                </a:solidFill>
+                <a:latin typeface="Courier New" pitchFamily="34" charset="0"/>
+                <a:ea typeface="Courier New" pitchFamily="34" charset="-122"/>
+                <a:cs typeface="Courier New" pitchFamily="34" charset="-120"/>
+              </a:rPr>
+              <a:t>/</a:t>
+            </a:r>
+            <a:endParaRPr lang="en-US" sz="1200" dirty="0"/>
+          </a:p>
+        </p:txBody>
+      </p:sp>
+      <p:sp>
+        <p:nvSpPr>
+          <p:cNvPr id="15" name="Text 13"/>
+          <p:cNvSpPr txBox="1"/>
+          <p:nvPr/>
+        </p:nvSpPr>
+        <p:spPr>
+          <a:xfrm>
+            <a:off x="2450592" y="2852928"/>
+            <a:ext cx="548640" cy="256032"/>
+          </a:xfrm>
+          <a:prstGeom prst="rect">
+            <a:avLst/>
+          </a:prstGeom>
+          <a:noFill/>
+          <a:ln/>
+        </p:spPr>
+        <p:txBody>
+          <a:bodyPr wrap="square" lIns="0" tIns="0" rIns="0" bIns="0" rtlCol="0" anchor="ctr"/>
+          <a:lstStyle/>
+          <a:p>
+            <a:pPr indent="0" marL="0">
+              <a:buNone/>
+            </a:pPr>
+            <a:r>
+              <a:rPr lang="en-US" sz="1200" b="1" dirty="0">
+                <a:solidFill>
+                  <a:schemeClr val="accent1"/>
+                </a:solidFill>
+                <a:latin typeface="Courier New" pitchFamily="34" charset="0"/>
+                <a:ea typeface="Courier New" pitchFamily="34" charset="-122"/>
+                <a:cs typeface="Courier New" pitchFamily="34" charset="-120"/>
+              </a:rPr>
+              <a:t>/api</a:t>
+            </a:r>
+            <a:endParaRPr lang="en-US" sz="1200" dirty="0"/>
+          </a:p>
+        </p:txBody>
+      </p:sp>
+      <p:sp>
+        <p:nvSpPr>
+          <p:cNvPr id="16" name="helm tree"/>
+          <p:cNvSpPr/>
+          <p:nvPr/>
+        </p:nvSpPr>
+        <p:spPr>
+          <a:xfrm>
+            <a:off x="6172200" y="1417320"/>
+            <a:ext cx="5468112" cy="2788920"/>
+          </a:xfrm>
+          <a:prstGeom prst="roundRect">
+            <a:avLst>
+              <a:gd name="adj" fmla="val 3279"/>
             </a:avLst>
           </a:prstGeom>
           <a:solidFill>
@@ -2562,14 +3032,14 @@
       </p:sp>
       <p:sp>
         <p:nvSpPr>
-          <p:cNvPr id="4" name="Text 2"/>
-          <p:cNvSpPr txBox="1"/>
-          <p:nvPr/>
-        </p:nvSpPr>
-        <p:spPr>
-          <a:xfrm>
-            <a:off x="10012680" y="548640"/>
-            <a:ext cx="1627632" cy="411480"/>
+          <p:cNvPr id="17" name="Text 15"/>
+          <p:cNvSpPr txBox="1"/>
+          <p:nvPr/>
+        </p:nvSpPr>
+        <p:spPr>
+          <a:xfrm>
+            <a:off x="6400800" y="1417320"/>
+            <a:ext cx="5120640" cy="2788920"/>
           </a:xfrm>
           <a:prstGeom prst="rect">
             <a:avLst/>
@@ -2581,7 +3051,7 @@
           <a:bodyPr wrap="square" lIns="0" tIns="0" rIns="0" bIns="0" rtlCol="0" anchor="ctr"/>
           <a:lstStyle/>
           <a:p>
-            <a:pPr algn="ctr" indent="0" marL="0">
+            <a:pPr indent="0" marL="0">
               <a:buNone/>
             </a:pPr>
             <a:r>
@@ -2593,543 +3063,126 @@
                 <a:ea typeface="Courier New" pitchFamily="34" charset="-122"/>
                 <a:cs typeface="Courier New" pitchFamily="34" charset="-120"/>
               </a:rPr>
-              <a:t>M8 · 15 pts</a:t>
+              <a:t>helm/expensepilot/</a:t>
             </a:r>
             <a:endParaRPr lang="en-US" sz="1200" dirty="0"/>
           </a:p>
-        </p:txBody>
-      </p:sp>
-      <p:sp>
-        <p:nvSpPr>
-          <p:cNvPr id="5" name="node Ingress"/>
-          <p:cNvSpPr/>
-          <p:nvPr/>
-        </p:nvSpPr>
-        <p:spPr>
-          <a:xfrm>
-            <a:off x="548640" y="2331720"/>
-            <a:ext cx="1828800" cy="914400"/>
-          </a:xfrm>
-          <a:prstGeom prst="roundRect">
-            <a:avLst>
-              <a:gd name="adj" fmla="val 10000"/>
-            </a:avLst>
-          </a:prstGeom>
-          <a:solidFill>
-            <a:schemeClr val="accent6"/>
-          </a:solidFill>
-          <a:ln w="12700">
-            <a:solidFill>
-              <a:schemeClr val="accent3"/>
-            </a:solidFill>
-            <a:prstDash val="solid"/>
-          </a:ln>
-        </p:spPr>
-      </p:sp>
-      <p:sp>
-        <p:nvSpPr>
-          <p:cNvPr id="6" name="Text 4"/>
-          <p:cNvSpPr txBox="1"/>
-          <p:nvPr/>
-        </p:nvSpPr>
-        <p:spPr>
-          <a:xfrm>
-            <a:off x="658368" y="2331720"/>
-            <a:ext cx="1609344" cy="914400"/>
-          </a:xfrm>
-          <a:prstGeom prst="rect">
-            <a:avLst/>
-          </a:prstGeom>
-          <a:noFill/>
-          <a:ln/>
-        </p:spPr>
-        <p:txBody>
-          <a:bodyPr wrap="square" lIns="0" tIns="0" rIns="0" bIns="0" rtlCol="0" anchor="ctr"/>
-          <a:lstStyle/>
-          <a:p>
-            <a:pPr indent="0" marL="0">
-              <a:buNone/>
-            </a:pPr>
-            <a:r>
-              <a:rPr lang="en-US" sz="1400" b="1" dirty="0">
+          <a:p>
+            <a:pPr indent="0" marL="0">
+              <a:buNone/>
+            </a:pPr>
+            <a:r>
+              <a:rPr lang="en-US" sz="1200" dirty="0">
                 <a:solidFill>
                   <a:schemeClr val="tx1"/>
-                </a:solidFill>
-              </a:rPr>
-              <a:t>Ingress</a:t>
-            </a:r>
-            <a:endParaRPr lang="en-US" sz="1400" dirty="0"/>
-          </a:p>
-          <a:p>
-            <a:pPr indent="0" marL="0">
-              <a:buNone/>
-            </a:pPr>
-            <a:r>
-              <a:rPr lang="en-US" sz="1100" dirty="0">
-                <a:solidFill>
-                  <a:schemeClr val="tx2"/>
                 </a:solidFill>
                 <a:latin typeface="Courier New" pitchFamily="34" charset="0"/>
                 <a:ea typeface="Courier New" pitchFamily="34" charset="-122"/>
                 <a:cs typeface="Courier New" pitchFamily="34" charset="-120"/>
               </a:rPr>
-              <a:t>expensepilot.local</a:t>
-            </a:r>
-            <a:endParaRPr lang="en-US" sz="1400" dirty="0"/>
-          </a:p>
-        </p:txBody>
-      </p:sp>
-      <p:sp>
-        <p:nvSpPr>
-          <p:cNvPr id="7" name="node frontend svc :80"/>
-          <p:cNvSpPr/>
-          <p:nvPr/>
-        </p:nvSpPr>
-        <p:spPr>
-          <a:xfrm>
-            <a:off x="3063240" y="1417320"/>
-            <a:ext cx="2606040" cy="777240"/>
-          </a:xfrm>
-          <a:prstGeom prst="roundRect">
-            <a:avLst>
-              <a:gd name="adj" fmla="val 11765"/>
-            </a:avLst>
-          </a:prstGeom>
-          <a:solidFill>
-            <a:schemeClr val="accent6"/>
-          </a:solidFill>
-          <a:ln w="12700">
-            <a:solidFill>
-              <a:schemeClr val="accent3"/>
-            </a:solidFill>
-            <a:prstDash val="solid"/>
-          </a:ln>
-        </p:spPr>
-      </p:sp>
-      <p:sp>
-        <p:nvSpPr>
-          <p:cNvPr id="8" name="Text 6"/>
-          <p:cNvSpPr txBox="1"/>
-          <p:nvPr/>
-        </p:nvSpPr>
-        <p:spPr>
-          <a:xfrm>
-            <a:off x="3172968" y="1417320"/>
-            <a:ext cx="2386584" cy="777240"/>
-          </a:xfrm>
-          <a:prstGeom prst="rect">
-            <a:avLst/>
-          </a:prstGeom>
-          <a:noFill/>
-          <a:ln/>
-        </p:spPr>
-        <p:txBody>
-          <a:bodyPr wrap="square" lIns="0" tIns="0" rIns="0" bIns="0" rtlCol="0" anchor="ctr"/>
-          <a:lstStyle/>
-          <a:p>
-            <a:pPr indent="0" marL="0">
-              <a:buNone/>
-            </a:pPr>
-            <a:r>
-              <a:rPr lang="en-US" sz="1400" b="1" dirty="0">
+              <a:t>├─ Chart.yaml</a:t>
+            </a:r>
+            <a:endParaRPr lang="en-US" sz="1200" dirty="0"/>
+          </a:p>
+          <a:p>
+            <a:pPr indent="0" marL="0">
+              <a:buNone/>
+            </a:pPr>
+            <a:r>
+              <a:rPr lang="en-US" sz="1200" dirty="0">
                 <a:solidFill>
                   <a:schemeClr val="tx1"/>
-                </a:solidFill>
-              </a:rPr>
-              <a:t>frontend svc :80</a:t>
-            </a:r>
-            <a:endParaRPr lang="en-US" sz="1400" dirty="0"/>
-          </a:p>
-          <a:p>
-            <a:pPr indent="0" marL="0">
-              <a:buNone/>
-            </a:pPr>
-            <a:r>
-              <a:rPr lang="en-US" sz="1100" dirty="0">
-                <a:solidFill>
-                  <a:schemeClr val="tx2"/>
                 </a:solidFill>
                 <a:latin typeface="Courier New" pitchFamily="34" charset="0"/>
                 <a:ea typeface="Courier New" pitchFamily="34" charset="-122"/>
                 <a:cs typeface="Courier New" pitchFamily="34" charset="-120"/>
               </a:rPr>
-              <a:t>ClusterIP, 2 pods</a:t>
-            </a:r>
-            <a:endParaRPr lang="en-US" sz="1400" dirty="0"/>
-          </a:p>
-        </p:txBody>
-      </p:sp>
-      <p:sp>
-        <p:nvSpPr>
-          <p:cNvPr id="9" name="node backend svc :8000"/>
-          <p:cNvSpPr/>
-          <p:nvPr/>
-        </p:nvSpPr>
-        <p:spPr>
-          <a:xfrm>
-            <a:off x="3063240" y="2423160"/>
-            <a:ext cx="2606040" cy="777240"/>
-          </a:xfrm>
-          <a:prstGeom prst="roundRect">
-            <a:avLst>
-              <a:gd name="adj" fmla="val 11765"/>
-            </a:avLst>
-          </a:prstGeom>
-          <a:solidFill>
-            <a:schemeClr val="accent6"/>
-          </a:solidFill>
-          <a:ln w="12700">
-            <a:solidFill>
-              <a:schemeClr val="accent3"/>
-            </a:solidFill>
-            <a:prstDash val="solid"/>
-          </a:ln>
-        </p:spPr>
-      </p:sp>
-      <p:sp>
-        <p:nvSpPr>
-          <p:cNvPr id="10" name="Text 8"/>
-          <p:cNvSpPr txBox="1"/>
-          <p:nvPr/>
-        </p:nvSpPr>
-        <p:spPr>
-          <a:xfrm>
-            <a:off x="3172968" y="2423160"/>
-            <a:ext cx="2386584" cy="777240"/>
-          </a:xfrm>
-          <a:prstGeom prst="rect">
-            <a:avLst/>
-          </a:prstGeom>
-          <a:noFill/>
-          <a:ln/>
-        </p:spPr>
-        <p:txBody>
-          <a:bodyPr wrap="square" lIns="0" tIns="0" rIns="0" bIns="0" rtlCol="0" anchor="ctr"/>
-          <a:lstStyle/>
-          <a:p>
-            <a:pPr indent="0" marL="0">
-              <a:buNone/>
-            </a:pPr>
-            <a:r>
-              <a:rPr lang="en-US" sz="1400" b="1" dirty="0">
+              <a:t>├─ values.yaml, values-dev.yaml, values-prod.yaml</a:t>
+            </a:r>
+            <a:endParaRPr lang="en-US" sz="1200" dirty="0"/>
+          </a:p>
+          <a:p>
+            <a:pPr indent="0" marL="0">
+              <a:buNone/>
+            </a:pPr>
+            <a:r>
+              <a:rPr lang="en-US" sz="1200" dirty="0">
                 <a:solidFill>
                   <a:schemeClr val="tx1"/>
-                </a:solidFill>
-              </a:rPr>
-              <a:t>backend svc :8000</a:t>
-            </a:r>
-            <a:endParaRPr lang="en-US" sz="1400" dirty="0"/>
-          </a:p>
-          <a:p>
-            <a:pPr indent="0" marL="0">
-              <a:buNone/>
-            </a:pPr>
-            <a:r>
-              <a:rPr lang="en-US" sz="1100" dirty="0">
-                <a:solidFill>
-                  <a:schemeClr val="tx2"/>
                 </a:solidFill>
                 <a:latin typeface="Courier New" pitchFamily="34" charset="0"/>
                 <a:ea typeface="Courier New" pitchFamily="34" charset="-122"/>
                 <a:cs typeface="Courier New" pitchFamily="34" charset="-120"/>
               </a:rPr>
-              <a:t>ClusterIP, 2 pods, HPA</a:t>
-            </a:r>
-            <a:endParaRPr lang="en-US" sz="1400" dirty="0"/>
-          </a:p>
-        </p:txBody>
-      </p:sp>
-      <p:sp>
-        <p:nvSpPr>
-          <p:cNvPr id="11" name="node postgres svc :5432"/>
-          <p:cNvSpPr/>
-          <p:nvPr/>
-        </p:nvSpPr>
-        <p:spPr>
-          <a:xfrm>
-            <a:off x="3063240" y="3429000"/>
-            <a:ext cx="2606040" cy="777240"/>
-          </a:xfrm>
-          <a:prstGeom prst="roundRect">
-            <a:avLst>
-              <a:gd name="adj" fmla="val 11765"/>
-            </a:avLst>
-          </a:prstGeom>
-          <a:solidFill>
-            <a:schemeClr val="accent6"/>
-          </a:solidFill>
-          <a:ln w="12700">
-            <a:solidFill>
-              <a:schemeClr val="accent3"/>
-            </a:solidFill>
-            <a:prstDash val="solid"/>
-          </a:ln>
-        </p:spPr>
-      </p:sp>
-      <p:sp>
-        <p:nvSpPr>
-          <p:cNvPr id="12" name="Text 10"/>
-          <p:cNvSpPr txBox="1"/>
-          <p:nvPr/>
-        </p:nvSpPr>
-        <p:spPr>
-          <a:xfrm>
-            <a:off x="3172968" y="3429000"/>
-            <a:ext cx="2386584" cy="777240"/>
-          </a:xfrm>
-          <a:prstGeom prst="rect">
-            <a:avLst/>
-          </a:prstGeom>
-          <a:noFill/>
-          <a:ln/>
-        </p:spPr>
-        <p:txBody>
-          <a:bodyPr wrap="square" lIns="0" tIns="0" rIns="0" bIns="0" rtlCol="0" anchor="ctr"/>
-          <a:lstStyle/>
-          <a:p>
-            <a:pPr indent="0" marL="0">
-              <a:buNone/>
-            </a:pPr>
-            <a:r>
-              <a:rPr lang="en-US" sz="1400" b="1" dirty="0">
+              <a:t>└─ templates/</a:t>
+            </a:r>
+            <a:endParaRPr lang="en-US" sz="1200" dirty="0"/>
+          </a:p>
+          <a:p>
+            <a:pPr indent="0" marL="0">
+              <a:buNone/>
+            </a:pPr>
+            <a:r>
+              <a:rPr lang="en-US" sz="1200" dirty="0">
                 <a:solidFill>
                   <a:schemeClr val="tx1"/>
-                </a:solidFill>
-              </a:rPr>
-              <a:t>postgres svc :5432</a:t>
-            </a:r>
-            <a:endParaRPr lang="en-US" sz="1400" dirty="0"/>
-          </a:p>
-          <a:p>
-            <a:pPr indent="0" marL="0">
-              <a:buNone/>
-            </a:pPr>
-            <a:r>
-              <a:rPr lang="en-US" sz="1100" dirty="0">
-                <a:solidFill>
-                  <a:schemeClr val="tx2"/>
                 </a:solidFill>
                 <a:latin typeface="Courier New" pitchFamily="34" charset="0"/>
                 <a:ea typeface="Courier New" pitchFamily="34" charset="-122"/>
                 <a:cs typeface="Courier New" pitchFamily="34" charset="-120"/>
               </a:rPr>
-              <a:t>ClusterIP, PVC 5Gi</a:t>
-            </a:r>
-            <a:endParaRPr lang="en-US" sz="1400" dirty="0"/>
-          </a:p>
-        </p:txBody>
-      </p:sp>
-      <p:sp>
-        <p:nvSpPr>
-          <p:cNvPr id="13" name="Shape 11"/>
-          <p:cNvSpPr/>
-          <p:nvPr/>
-        </p:nvSpPr>
-        <p:spPr>
-          <a:xfrm flipV="1">
-            <a:off x="2414016" y="1810512"/>
-            <a:ext cx="612648" cy="685800"/>
-          </a:xfrm>
-          <a:prstGeom prst="line">
-            <a:avLst/>
-          </a:prstGeom>
-          <a:noFill/>
-          <a:ln w="19050">
-            <a:solidFill>
-              <a:schemeClr val="accent1"/>
-            </a:solidFill>
-            <a:prstDash val="solid"/>
-            <a:tailEnd type="triangle"/>
-          </a:ln>
-        </p:spPr>
-      </p:sp>
-      <p:sp>
-        <p:nvSpPr>
-          <p:cNvPr id="14" name="Shape 12"/>
-          <p:cNvSpPr/>
-          <p:nvPr/>
-        </p:nvSpPr>
-        <p:spPr>
-          <a:xfrm>
-            <a:off x="2414016" y="2807208"/>
-            <a:ext cx="612648" cy="0"/>
-          </a:xfrm>
-          <a:prstGeom prst="line">
-            <a:avLst/>
-          </a:prstGeom>
-          <a:noFill/>
-          <a:ln w="19050">
-            <a:solidFill>
-              <a:schemeClr val="accent1"/>
-            </a:solidFill>
-            <a:prstDash val="solid"/>
-            <a:tailEnd type="triangle"/>
-          </a:ln>
-        </p:spPr>
-      </p:sp>
-      <p:sp>
-        <p:nvSpPr>
-          <p:cNvPr id="15" name="Shape 13"/>
-          <p:cNvSpPr/>
-          <p:nvPr/>
-        </p:nvSpPr>
-        <p:spPr>
-          <a:xfrm>
-            <a:off x="4370832" y="3218688"/>
-            <a:ext cx="0" cy="192024"/>
-          </a:xfrm>
-          <a:prstGeom prst="line">
-            <a:avLst/>
-          </a:prstGeom>
-          <a:noFill/>
-          <a:ln w="19050">
-            <a:solidFill>
-              <a:schemeClr val="accent1"/>
-            </a:solidFill>
-            <a:prstDash val="solid"/>
-            <a:tailEnd type="triangle"/>
-          </a:ln>
-        </p:spPr>
-      </p:sp>
-      <p:sp>
-        <p:nvSpPr>
-          <p:cNvPr id="16" name="Text 14"/>
-          <p:cNvSpPr txBox="1"/>
-          <p:nvPr/>
-        </p:nvSpPr>
-        <p:spPr>
-          <a:xfrm>
-            <a:off x="2487168" y="1874520"/>
-            <a:ext cx="274320" cy="256032"/>
-          </a:xfrm>
-          <a:prstGeom prst="rect">
-            <a:avLst/>
-          </a:prstGeom>
-          <a:noFill/>
-          <a:ln/>
-        </p:spPr>
-        <p:txBody>
-          <a:bodyPr wrap="square" lIns="0" tIns="0" rIns="0" bIns="0" rtlCol="0" anchor="ctr"/>
-          <a:lstStyle/>
-          <a:p>
-            <a:pPr indent="0" marL="0">
-              <a:buNone/>
-            </a:pPr>
-            <a:r>
-              <a:rPr lang="en-US" sz="1200" b="1" dirty="0">
-                <a:solidFill>
-                  <a:schemeClr val="accent1"/>
+              <a:t>   backend, frontend, postgres, ingress,</a:t>
+            </a:r>
+            <a:endParaRPr lang="en-US" sz="1200" dirty="0"/>
+          </a:p>
+          <a:p>
+            <a:pPr indent="0" marL="0">
+              <a:buNone/>
+            </a:pPr>
+            <a:r>
+              <a:rPr lang="en-US" sz="1200" dirty="0">
+                <a:solidFill>
+                  <a:schemeClr val="tx1"/>
                 </a:solidFill>
                 <a:latin typeface="Courier New" pitchFamily="34" charset="0"/>
                 <a:ea typeface="Courier New" pitchFamily="34" charset="-122"/>
                 <a:cs typeface="Courier New" pitchFamily="34" charset="-120"/>
               </a:rPr>
-              <a:t>/</a:t>
+              <a:t>   hpa, servicemonitor</a:t>
             </a:r>
             <a:endParaRPr lang="en-US" sz="1200" dirty="0"/>
           </a:p>
-        </p:txBody>
-      </p:sp>
-      <p:sp>
-        <p:nvSpPr>
-          <p:cNvPr id="17" name="Text 15"/>
-          <p:cNvSpPr txBox="1"/>
-          <p:nvPr/>
-        </p:nvSpPr>
-        <p:spPr>
-          <a:xfrm>
-            <a:off x="2450592" y="2852928"/>
-            <a:ext cx="548640" cy="256032"/>
-          </a:xfrm>
-          <a:prstGeom prst="rect">
-            <a:avLst/>
-          </a:prstGeom>
-          <a:noFill/>
-          <a:ln/>
-        </p:spPr>
-        <p:txBody>
-          <a:bodyPr wrap="square" lIns="0" tIns="0" rIns="0" bIns="0" rtlCol="0" anchor="ctr"/>
-          <a:lstStyle/>
-          <a:p>
-            <a:pPr indent="0" marL="0">
-              <a:buNone/>
-            </a:pPr>
-            <a:r>
-              <a:rPr lang="en-US" sz="1200" b="1" dirty="0">
-                <a:solidFill>
-                  <a:schemeClr val="accent1"/>
+          <a:p>
+            <a:pPr indent="0" marL="0">
+              <a:buNone/>
+            </a:pPr>
+            <a:r>
+              <a:rPr lang="en-US" sz="1200" dirty="0">
+                <a:solidFill>
+                  <a:schemeClr val="tx1"/>
                 </a:solidFill>
                 <a:latin typeface="Courier New" pitchFamily="34" charset="0"/>
                 <a:ea typeface="Courier New" pitchFamily="34" charset="-122"/>
                 <a:cs typeface="Courier New" pitchFamily="34" charset="-120"/>
               </a:rPr>
-              <a:t>/api</a:t>
+              <a:t> </a:t>
             </a:r>
             <a:endParaRPr lang="en-US" sz="1200" dirty="0"/>
           </a:p>
-        </p:txBody>
-      </p:sp>
-      <p:sp>
-        <p:nvSpPr>
-          <p:cNvPr id="18" name="helm tree"/>
-          <p:cNvSpPr/>
-          <p:nvPr/>
-        </p:nvSpPr>
-        <p:spPr>
-          <a:xfrm>
-            <a:off x="6172200" y="1417320"/>
-            <a:ext cx="5468112" cy="2788920"/>
-          </a:xfrm>
-          <a:prstGeom prst="roundRect">
-            <a:avLst>
-              <a:gd name="adj" fmla="val 3279"/>
-            </a:avLst>
-          </a:prstGeom>
-          <a:solidFill>
-            <a:schemeClr val="bg2"/>
-          </a:solidFill>
-          <a:ln w="12700">
-            <a:solidFill>
-              <a:schemeClr val="accent3"/>
-            </a:solidFill>
-            <a:prstDash val="solid"/>
-          </a:ln>
-        </p:spPr>
-      </p:sp>
-      <p:sp>
-        <p:nvSpPr>
-          <p:cNvPr id="19" name="Text 17"/>
-          <p:cNvSpPr txBox="1"/>
-          <p:nvPr/>
-        </p:nvSpPr>
-        <p:spPr>
-          <a:xfrm>
-            <a:off x="6400800" y="1417320"/>
-            <a:ext cx="5120640" cy="2788920"/>
-          </a:xfrm>
-          <a:prstGeom prst="rect">
-            <a:avLst/>
-          </a:prstGeom>
-          <a:noFill/>
-          <a:ln/>
-        </p:spPr>
-        <p:txBody>
-          <a:bodyPr wrap="square" lIns="0" tIns="0" rIns="0" bIns="0" rtlCol="0" anchor="ctr"/>
-          <a:lstStyle/>
-          <a:p>
-            <a:pPr indent="0" marL="0">
-              <a:buNone/>
-            </a:pPr>
-            <a:r>
-              <a:rPr lang="en-US" sz="1200" b="1" dirty="0">
-                <a:solidFill>
-                  <a:schemeClr val="accent1"/>
+          <a:p>
+            <a:pPr indent="0" marL="0">
+              <a:buNone/>
+            </a:pPr>
+            <a:r>
+              <a:rPr lang="en-US" sz="1200" dirty="0">
+                <a:solidFill>
+                  <a:schemeClr val="tx2"/>
                 </a:solidFill>
                 <a:latin typeface="Courier New" pitchFamily="34" charset="0"/>
                 <a:ea typeface="Courier New" pitchFamily="34" charset="-122"/>
                 <a:cs typeface="Courier New" pitchFamily="34" charset="-120"/>
               </a:rPr>
-              <a:t>helm/expensepilot/</a:t>
+              <a:t>$ helm upgrade --install expensepilot \</a:t>
             </a:r>
             <a:endParaRPr lang="en-US" sz="1200" dirty="0"/>
           </a:p>
@@ -3140,170 +3193,51 @@
             <a:r>
               <a:rPr lang="en-US" sz="1200" dirty="0">
                 <a:solidFill>
-                  <a:schemeClr val="tx1"/>
+                  <a:schemeClr val="tx2"/>
                 </a:solidFill>
                 <a:latin typeface="Courier New" pitchFamily="34" charset="0"/>
                 <a:ea typeface="Courier New" pitchFamily="34" charset="-122"/>
                 <a:cs typeface="Courier New" pitchFamily="34" charset="-120"/>
               </a:rPr>
-              <a:t>├─ Chart.yaml</a:t>
+              <a:t>    ./helm/expensepilot -n expensepilot</a:t>
             </a:r>
             <a:endParaRPr lang="en-US" sz="1200" dirty="0"/>
           </a:p>
-          <a:p>
-            <a:pPr indent="0" marL="0">
-              <a:buNone/>
-            </a:pPr>
-            <a:r>
-              <a:rPr lang="en-US" sz="1200" dirty="0">
-                <a:solidFill>
-                  <a:schemeClr val="tx1"/>
+        </p:txBody>
+      </p:sp>
+      <p:sp>
+        <p:nvSpPr>
+          <p:cNvPr id="18" name="Text 16"/>
+          <p:cNvSpPr txBox="1"/>
+          <p:nvPr/>
+        </p:nvSpPr>
+        <p:spPr>
+          <a:xfrm>
+            <a:off x="548640" y="4480560"/>
+            <a:ext cx="5394960" cy="256032"/>
+          </a:xfrm>
+          <a:prstGeom prst="rect">
+            <a:avLst/>
+          </a:prstGeom>
+          <a:noFill/>
+          <a:ln/>
+        </p:spPr>
+        <p:txBody>
+          <a:bodyPr wrap="square" lIns="0" tIns="0" rIns="0" bIns="0" rtlCol="0" anchor="ctr"/>
+          <a:lstStyle/>
+          <a:p>
+            <a:pPr indent="0" marL="0">
+              <a:buNone/>
+            </a:pPr>
+            <a:r>
+              <a:rPr lang="en-US" sz="1100" dirty="0">
+                <a:solidFill>
+                  <a:schemeClr val="tx2"/>
                 </a:solidFill>
                 <a:latin typeface="Courier New" pitchFamily="34" charset="0"/>
                 <a:ea typeface="Courier New" pitchFamily="34" charset="-122"/>
                 <a:cs typeface="Courier New" pitchFamily="34" charset="-120"/>
               </a:rPr>
-              <a:t>├─ values.yaml, values-dev.yaml, values-prod.yaml</a:t>
-            </a:r>
-            <a:endParaRPr lang="en-US" sz="1200" dirty="0"/>
-          </a:p>
-          <a:p>
-            <a:pPr indent="0" marL="0">
-              <a:buNone/>
-            </a:pPr>
-            <a:r>
-              <a:rPr lang="en-US" sz="1200" dirty="0">
-                <a:solidFill>
-                  <a:schemeClr val="tx1"/>
-                </a:solidFill>
-                <a:latin typeface="Courier New" pitchFamily="34" charset="0"/>
-                <a:ea typeface="Courier New" pitchFamily="34" charset="-122"/>
-                <a:cs typeface="Courier New" pitchFamily="34" charset="-120"/>
-              </a:rPr>
-              <a:t>└─ templates/</a:t>
-            </a:r>
-            <a:endParaRPr lang="en-US" sz="1200" dirty="0"/>
-          </a:p>
-          <a:p>
-            <a:pPr indent="0" marL="0">
-              <a:buNone/>
-            </a:pPr>
-            <a:r>
-              <a:rPr lang="en-US" sz="1200" dirty="0">
-                <a:solidFill>
-                  <a:schemeClr val="tx1"/>
-                </a:solidFill>
-                <a:latin typeface="Courier New" pitchFamily="34" charset="0"/>
-                <a:ea typeface="Courier New" pitchFamily="34" charset="-122"/>
-                <a:cs typeface="Courier New" pitchFamily="34" charset="-120"/>
-              </a:rPr>
-              <a:t>   backend, frontend, postgres, ingress,</a:t>
-            </a:r>
-            <a:endParaRPr lang="en-US" sz="1200" dirty="0"/>
-          </a:p>
-          <a:p>
-            <a:pPr indent="0" marL="0">
-              <a:buNone/>
-            </a:pPr>
-            <a:r>
-              <a:rPr lang="en-US" sz="1200" dirty="0">
-                <a:solidFill>
-                  <a:schemeClr val="tx1"/>
-                </a:solidFill>
-                <a:latin typeface="Courier New" pitchFamily="34" charset="0"/>
-                <a:ea typeface="Courier New" pitchFamily="34" charset="-122"/>
-                <a:cs typeface="Courier New" pitchFamily="34" charset="-120"/>
-              </a:rPr>
-              <a:t>   hpa, servicemonitor</a:t>
-            </a:r>
-            <a:endParaRPr lang="en-US" sz="1200" dirty="0"/>
-          </a:p>
-          <a:p>
-            <a:pPr indent="0" marL="0">
-              <a:buNone/>
-            </a:pPr>
-            <a:r>
-              <a:rPr lang="en-US" sz="1200" dirty="0">
-                <a:solidFill>
-                  <a:schemeClr val="tx1"/>
-                </a:solidFill>
-                <a:latin typeface="Courier New" pitchFamily="34" charset="0"/>
-                <a:ea typeface="Courier New" pitchFamily="34" charset="-122"/>
-                <a:cs typeface="Courier New" pitchFamily="34" charset="-120"/>
-              </a:rPr>
-              <a:t> </a:t>
-            </a:r>
-            <a:endParaRPr lang="en-US" sz="1200" dirty="0"/>
-          </a:p>
-          <a:p>
-            <a:pPr indent="0" marL="0">
-              <a:buNone/>
-            </a:pPr>
-            <a:r>
-              <a:rPr lang="en-US" sz="1200" dirty="0">
-                <a:solidFill>
-                  <a:schemeClr val="tx2"/>
-                </a:solidFill>
-                <a:latin typeface="Courier New" pitchFamily="34" charset="0"/>
-                <a:ea typeface="Courier New" pitchFamily="34" charset="-122"/>
-                <a:cs typeface="Courier New" pitchFamily="34" charset="-120"/>
-              </a:rPr>
-              <a:t>$ helm upgrade --install expensepilot \</a:t>
-            </a:r>
-            <a:endParaRPr lang="en-US" sz="1200" dirty="0"/>
-          </a:p>
-          <a:p>
-            <a:pPr indent="0" marL="0">
-              <a:buNone/>
-            </a:pPr>
-            <a:r>
-              <a:rPr lang="en-US" sz="1200" dirty="0">
-                <a:solidFill>
-                  <a:schemeClr val="tx2"/>
-                </a:solidFill>
-                <a:latin typeface="Courier New" pitchFamily="34" charset="0"/>
-                <a:ea typeface="Courier New" pitchFamily="34" charset="-122"/>
-                <a:cs typeface="Courier New" pitchFamily="34" charset="-120"/>
-              </a:rPr>
-              <a:t>    ./helm/expensepilot -n expensepilot</a:t>
-            </a:r>
-            <a:endParaRPr lang="en-US" sz="1200" dirty="0"/>
-          </a:p>
-        </p:txBody>
-      </p:sp>
-      <p:sp>
-        <p:nvSpPr>
-          <p:cNvPr id="20" name="Text 18"/>
-          <p:cNvSpPr txBox="1"/>
-          <p:nvPr/>
-        </p:nvSpPr>
-        <p:spPr>
-          <a:xfrm>
-            <a:off x="548640" y="4480560"/>
-            <a:ext cx="5394960" cy="256032"/>
-          </a:xfrm>
-          <a:prstGeom prst="rect">
-            <a:avLst/>
-          </a:prstGeom>
-          <a:noFill/>
-          <a:ln/>
-        </p:spPr>
-        <p:txBody>
-          <a:bodyPr wrap="square" lIns="0" tIns="0" rIns="0" bIns="0" rtlCol="0" anchor="ctr"/>
-          <a:lstStyle/>
-          <a:p>
-            <a:pPr indent="0" marL="0">
-              <a:buNone/>
-            </a:pPr>
-            <a:r>
-              <a:rPr lang="en-US" sz="1100" dirty="0">
-                <a:solidFill>
-                  <a:schemeClr val="tx2"/>
-                </a:solidFill>
-                <a:latin typeface="Courier New" pitchFamily="34" charset="0"/>
-                <a:ea typeface="Courier New" pitchFamily="34" charset="-122"/>
-                <a:cs typeface="Courier New" pitchFamily="34" charset="-120"/>
-              </a:rPr>
               <a:t>$ kubectl get pods -n expensepilot</a:t>
             </a:r>
             <a:endParaRPr lang="en-US" sz="1100" dirty="0"/>
@@ -3312,7 +3246,7 @@
       </p:sp>
       <p:sp>
         <p:nvSpPr>
-          <p:cNvPr id="21" name="frame pods.jpg"/>
+          <p:cNvPr id="19" name="frame pods.jpg"/>
           <p:cNvSpPr/>
           <p:nvPr/>
         </p:nvSpPr>
@@ -3337,7 +3271,7 @@
       </p:sp>
       <p:pic>
         <p:nvPicPr>
-          <p:cNvPr id="22" name="Image 0" descr="pods.jpg">    </p:cNvPr>
+          <p:cNvPr id="20" name="Image 0" descr="pods.jpg">    </p:cNvPr>
           <p:cNvPicPr>
             <a:picLocks noChangeAspect="1"/>
           </p:cNvPicPr>
@@ -3361,7 +3295,7 @@
       </p:pic>
       <p:sp>
         <p:nvSpPr>
-          <p:cNvPr id="23" name="Text 20"/>
+          <p:cNvPr id="21" name="Text 18"/>
           <p:cNvSpPr txBox="1"/>
           <p:nvPr/>
         </p:nvSpPr>
@@ -3400,7 +3334,7 @@
       </p:sp>
       <p:sp>
         <p:nvSpPr>
-          <p:cNvPr id="24" name="frame svc.jpg"/>
+          <p:cNvPr id="22" name="frame svc.jpg"/>
           <p:cNvSpPr/>
           <p:nvPr/>
         </p:nvSpPr>
@@ -3425,7 +3359,7 @@
       </p:sp>
       <p:pic>
         <p:nvPicPr>
-          <p:cNvPr id="25" name="Image 1" descr="svc.jpg">    </p:cNvPr>
+          <p:cNvPr id="23" name="Image 1" descr="svc.jpg">    </p:cNvPr>
           <p:cNvPicPr>
             <a:picLocks noChangeAspect="1"/>
           </p:cNvPicPr>
@@ -3449,7 +3383,7 @@
       </p:pic>
       <p:sp>
         <p:nvSpPr>
-          <p:cNvPr id="26" name="Text 22"/>
+          <p:cNvPr id="24" name="Text 20"/>
           <p:cNvSpPr txBox="1"/>
           <p:nvPr/>
         </p:nvSpPr>
@@ -3593,41 +3527,14 @@
       </p:sp>
       <p:sp>
         <p:nvSpPr>
-          <p:cNvPr id="3" name="module chip"/>
-          <p:cNvSpPr/>
-          <p:nvPr/>
-        </p:nvSpPr>
-        <p:spPr>
-          <a:xfrm>
-            <a:off x="10012680" y="548640"/>
-            <a:ext cx="1627632" cy="411480"/>
-          </a:xfrm>
-          <a:prstGeom prst="roundRect">
-            <a:avLst>
-              <a:gd name="adj" fmla="val 17778"/>
-            </a:avLst>
-          </a:prstGeom>
-          <a:solidFill>
-            <a:schemeClr val="bg2"/>
-          </a:solidFill>
-          <a:ln w="12700">
-            <a:solidFill>
-              <a:schemeClr val="accent3"/>
-            </a:solidFill>
-            <a:prstDash val="solid"/>
-          </a:ln>
-        </p:spPr>
-      </p:sp>
-      <p:sp>
-        <p:nvSpPr>
-          <p:cNvPr id="4" name="Text 2"/>
-          <p:cNvSpPr txBox="1"/>
-          <p:nvPr/>
-        </p:nvSpPr>
-        <p:spPr>
-          <a:xfrm>
-            <a:off x="10012680" y="548640"/>
-            <a:ext cx="1627632" cy="411480"/>
+          <p:cNvPr id="3" name="Text 1"/>
+          <p:cNvSpPr txBox="1"/>
+          <p:nvPr/>
+        </p:nvSpPr>
+        <p:spPr>
+          <a:xfrm>
+            <a:off x="548640" y="1234440"/>
+            <a:ext cx="5486400" cy="256032"/>
           </a:xfrm>
           <a:prstGeom prst="rect">
             <a:avLst/>
@@ -3639,57 +3546,18 @@
           <a:bodyPr wrap="square" lIns="0" tIns="0" rIns="0" bIns="0" rtlCol="0" anchor="ctr"/>
           <a:lstStyle/>
           <a:p>
-            <a:pPr algn="ctr" indent="0" marL="0">
-              <a:buNone/>
-            </a:pPr>
-            <a:r>
-              <a:rPr lang="en-US" sz="1200" b="1" dirty="0">
-                <a:solidFill>
-                  <a:schemeClr val="accent1"/>
+            <a:pPr indent="0" marL="0">
+              <a:buNone/>
+            </a:pPr>
+            <a:r>
+              <a:rPr lang="en-US" sz="1100" dirty="0">
+                <a:solidFill>
+                  <a:schemeClr val="tx2"/>
                 </a:solidFill>
                 <a:latin typeface="Courier New" pitchFamily="34" charset="0"/>
                 <a:ea typeface="Courier New" pitchFamily="34" charset="-122"/>
                 <a:cs typeface="Courier New" pitchFamily="34" charset="-120"/>
               </a:rPr>
-              <a:t>M9 · 10 pts</a:t>
-            </a:r>
-            <a:endParaRPr lang="en-US" sz="1200" dirty="0"/>
-          </a:p>
-        </p:txBody>
-      </p:sp>
-      <p:sp>
-        <p:nvSpPr>
-          <p:cNvPr id="5" name="Text 3"/>
-          <p:cNvSpPr txBox="1"/>
-          <p:nvPr/>
-        </p:nvSpPr>
-        <p:spPr>
-          <a:xfrm>
-            <a:off x="548640" y="1234440"/>
-            <a:ext cx="5486400" cy="256032"/>
-          </a:xfrm>
-          <a:prstGeom prst="rect">
-            <a:avLst/>
-          </a:prstGeom>
-          <a:noFill/>
-          <a:ln/>
-        </p:spPr>
-        <p:txBody>
-          <a:bodyPr wrap="square" lIns="0" tIns="0" rIns="0" bIns="0" rtlCol="0" anchor="ctr"/>
-          <a:lstStyle/>
-          <a:p>
-            <a:pPr indent="0" marL="0">
-              <a:buNone/>
-            </a:pPr>
-            <a:r>
-              <a:rPr lang="en-US" sz="1100" dirty="0">
-                <a:solidFill>
-                  <a:schemeClr val="tx2"/>
-                </a:solidFill>
-                <a:latin typeface="Courier New" pitchFamily="34" charset="0"/>
-                <a:ea typeface="Courier New" pitchFamily="34" charset="-122"/>
-                <a:cs typeface="Courier New" pitchFamily="34" charset="-120"/>
-              </a:rPr>
               <a:t>grafana: live panel on backend metrics</a:t>
             </a:r>
             <a:endParaRPr lang="en-US" sz="1100" dirty="0"/>
@@ -3698,7 +3566,7 @@
       </p:sp>
       <p:sp>
         <p:nvSpPr>
-          <p:cNvPr id="6" name="frame grafana.jpg"/>
+          <p:cNvPr id="4" name="frame grafana.jpg"/>
           <p:cNvSpPr/>
           <p:nvPr/>
         </p:nvSpPr>
@@ -3723,7 +3591,7 @@
       </p:sp>
       <p:pic>
         <p:nvPicPr>
-          <p:cNvPr id="7" name="Image 0" descr="grafana.jpg">    </p:cNvPr>
+          <p:cNvPr id="5" name="Image 0" descr="grafana.jpg">    </p:cNvPr>
           <p:cNvPicPr>
             <a:picLocks noChangeAspect="1"/>
           </p:cNvPicPr>
@@ -3747,7 +3615,7 @@
       </p:pic>
       <p:sp>
         <p:nvSpPr>
-          <p:cNvPr id="8" name="Text 5"/>
+          <p:cNvPr id="6" name="Text 3"/>
           <p:cNvSpPr txBox="1"/>
           <p:nvPr/>
         </p:nvSpPr>
@@ -3786,7 +3654,7 @@
       </p:sp>
       <p:sp>
         <p:nvSpPr>
-          <p:cNvPr id="9" name="Text 6"/>
+          <p:cNvPr id="7" name="Text 4"/>
           <p:cNvSpPr txBox="1"/>
           <p:nvPr/>
         </p:nvSpPr>
@@ -3822,7 +3690,7 @@
       </p:sp>
       <p:sp>
         <p:nvSpPr>
-          <p:cNvPr id="10" name="Text 7"/>
+          <p:cNvPr id="8" name="Text 5"/>
           <p:cNvSpPr txBox="1"/>
           <p:nvPr/>
         </p:nvSpPr>
@@ -3861,7 +3729,7 @@
       </p:sp>
       <p:sp>
         <p:nvSpPr>
-          <p:cNvPr id="11" name="Text 8"/>
+          <p:cNvPr id="9" name="Text 6"/>
           <p:cNvSpPr txBox="1"/>
           <p:nvPr/>
         </p:nvSpPr>
@@ -3897,7 +3765,7 @@
       </p:sp>
       <p:sp>
         <p:nvSpPr>
-          <p:cNvPr id="12" name="Text 9"/>
+          <p:cNvPr id="10" name="Text 7"/>
           <p:cNvSpPr txBox="1"/>
           <p:nvPr/>
         </p:nvSpPr>
@@ -3936,7 +3804,7 @@
       </p:sp>
       <p:sp>
         <p:nvSpPr>
-          <p:cNvPr id="13" name="Text 10"/>
+          <p:cNvPr id="11" name="Text 8"/>
           <p:cNvSpPr txBox="1"/>
           <p:nvPr/>
         </p:nvSpPr>
@@ -3972,7 +3840,7 @@
       </p:sp>
       <p:sp>
         <p:nvSpPr>
-          <p:cNvPr id="14" name="Text 11"/>
+          <p:cNvPr id="12" name="Text 9"/>
           <p:cNvSpPr txBox="1"/>
           <p:nvPr/>
         </p:nvSpPr>
@@ -4011,7 +3879,7 @@
       </p:sp>
       <p:sp>
         <p:nvSpPr>
-          <p:cNvPr id="15" name="frame metrics.jpg"/>
+          <p:cNvPr id="13" name="frame metrics.jpg"/>
           <p:cNvSpPr/>
           <p:nvPr/>
         </p:nvSpPr>
@@ -4036,7 +3904,7 @@
       </p:sp>
       <p:pic>
         <p:nvPicPr>
-          <p:cNvPr id="16" name="Image 1" descr="metrics.jpg">    </p:cNvPr>
+          <p:cNvPr id="14" name="Image 1" descr="metrics.jpg">    </p:cNvPr>
           <p:cNvPicPr>
             <a:picLocks noChangeAspect="1"/>
           </p:cNvPicPr>
@@ -4060,7 +3928,7 @@
       </p:pic>
       <p:sp>
         <p:nvSpPr>
-          <p:cNvPr id="17" name="Text 13"/>
+          <p:cNvPr id="15" name="Text 11"/>
           <p:cNvSpPr txBox="1"/>
           <p:nvPr/>
         </p:nvSpPr>
@@ -4099,7 +3967,7 @@
       </p:sp>
       <p:sp>
         <p:nvSpPr>
-          <p:cNvPr id="18" name="frame targets.jpg"/>
+          <p:cNvPr id="16" name="frame targets.jpg"/>
           <p:cNvSpPr/>
           <p:nvPr/>
         </p:nvSpPr>
@@ -4124,7 +3992,7 @@
       </p:sp>
       <p:pic>
         <p:nvPicPr>
-          <p:cNvPr id="19" name="Image 2" descr="targets.jpg">    </p:cNvPr>
+          <p:cNvPr id="17" name="Image 2" descr="targets.jpg">    </p:cNvPr>
           <p:cNvPicPr>
             <a:picLocks noChangeAspect="1"/>
           </p:cNvPicPr>
@@ -4256,18 +4124,181 @@
       </p:sp>
       <p:sp>
         <p:nvSpPr>
-          <p:cNvPr id="3" name="module chip"/>
+          <p:cNvPr id="3" name="Text 1"/>
+          <p:cNvSpPr txBox="1"/>
+          <p:nvPr/>
+        </p:nvSpPr>
+        <p:spPr>
+          <a:xfrm>
+            <a:off x="548640" y="1234440"/>
+            <a:ext cx="5943600" cy="256032"/>
+          </a:xfrm>
+          <a:prstGeom prst="rect">
+            <a:avLst/>
+          </a:prstGeom>
+          <a:noFill/>
+          <a:ln/>
+        </p:spPr>
+        <p:txBody>
+          <a:bodyPr wrap="square" lIns="0" tIns="0" rIns="0" bIns="0" rtlCol="0" anchor="ctr"/>
+          <a:lstStyle/>
+          <a:p>
+            <a:pPr indent="0" marL="0">
+              <a:buNone/>
+            </a:pPr>
+            <a:r>
+              <a:rPr lang="en-US" sz="1100" dirty="0">
+                <a:solidFill>
+                  <a:schemeClr val="tx2"/>
+                </a:solidFill>
+                <a:latin typeface="Courier New" pitchFamily="34" charset="0"/>
+                <a:ea typeface="Courier New" pitchFamily="34" charset="-122"/>
+                <a:cs typeface="Courier New" pitchFamily="34" charset="-120"/>
+              </a:rPr>
+              <a:t>argocd: expensepilot-capstone, Healthy + Synced</a:t>
+            </a:r>
+            <a:endParaRPr lang="en-US" sz="1100" dirty="0"/>
+          </a:p>
+        </p:txBody>
+      </p:sp>
+      <p:sp>
+        <p:nvSpPr>
+          <p:cNvPr id="4" name="frame argocd.jpg"/>
           <p:cNvSpPr/>
           <p:nvPr/>
         </p:nvSpPr>
         <p:spPr>
           <a:xfrm>
-            <a:off x="10012680" y="548640"/>
-            <a:ext cx="1627632" cy="411480"/>
+            <a:off x="521208" y="1527048"/>
+            <a:ext cx="5907024" cy="3858768"/>
+          </a:xfrm>
+          <a:prstGeom prst="rect">
+            <a:avLst/>
+          </a:prstGeom>
+          <a:solidFill>
+            <a:schemeClr val="accent3"/>
+          </a:solidFill>
+          <a:ln w="9525">
+            <a:solidFill>
+              <a:schemeClr val="accent3"/>
+            </a:solidFill>
+            <a:prstDash val="solid"/>
+          </a:ln>
+        </p:spPr>
+      </p:sp>
+      <p:pic>
+        <p:nvPicPr>
+          <p:cNvPr id="5" name="Image 0" descr="argocd.jpg">    </p:cNvPr>
+          <p:cNvPicPr>
+            <a:picLocks noChangeAspect="1"/>
+          </p:cNvPicPr>
+          <p:nvPr/>
+        </p:nvPicPr>
+        <p:blipFill>
+          <a:blip r:embed="rId1"/>
+          <a:stretch>
+            <a:fillRect/>
+          </a:stretch>
+        </p:blipFill>
+        <p:spPr>
+          <a:xfrm>
+            <a:off x="548640" y="1554480"/>
+            <a:ext cx="5852160" cy="3803904"/>
+          </a:xfrm>
+          <a:prstGeom prst="rect">
+            <a:avLst/>
+          </a:prstGeom>
+        </p:spPr>
+      </p:pic>
+      <p:sp>
+        <p:nvSpPr>
+          <p:cNvPr id="6" name="Text 3"/>
+          <p:cNvSpPr txBox="1"/>
+          <p:nvPr/>
+        </p:nvSpPr>
+        <p:spPr>
+          <a:xfrm>
+            <a:off x="548640" y="5486400"/>
+            <a:ext cx="5852160" cy="640080"/>
+          </a:xfrm>
+          <a:prstGeom prst="rect">
+            <a:avLst/>
+          </a:prstGeom>
+          <a:noFill/>
+          <a:ln/>
+        </p:spPr>
+        <p:txBody>
+          <a:bodyPr wrap="square" lIns="0" tIns="0" rIns="0" bIns="0" rtlCol="0" anchor="t"/>
+          <a:lstStyle/>
+          <a:p>
+            <a:pPr indent="0" marL="0">
+              <a:buNone/>
+            </a:pPr>
+            <a:r>
+              <a:rPr lang="en-US" sz="1400" dirty="0">
+                <a:solidFill>
+                  <a:schemeClr val="tx2"/>
+                </a:solidFill>
+              </a:rPr>
+              <a:t>ArgoCD watches helm/expensepilot in the repo and reverts any manual kubectl change.</a:t>
+            </a:r>
+            <a:endParaRPr lang="en-US" sz="1400" dirty="0"/>
+          </a:p>
+        </p:txBody>
+      </p:sp>
+      <p:sp>
+        <p:nvSpPr>
+          <p:cNvPr id="7" name="Text 4"/>
+          <p:cNvSpPr txBox="1"/>
+          <p:nvPr/>
+        </p:nvSpPr>
+        <p:spPr>
+          <a:xfrm>
+            <a:off x="6812280" y="1463040"/>
+            <a:ext cx="4846320" cy="411480"/>
+          </a:xfrm>
+          <a:prstGeom prst="rect">
+            <a:avLst/>
+          </a:prstGeom>
+          <a:noFill/>
+          <a:ln/>
+        </p:spPr>
+        <p:txBody>
+          <a:bodyPr wrap="square" lIns="0" tIns="0" rIns="0" bIns="0" rtlCol="0" anchor="ctr"/>
+          <a:lstStyle/>
+          <a:p>
+            <a:pPr indent="0" marL="0">
+              <a:buNone/>
+            </a:pPr>
+            <a:r>
+              <a:rPr lang="en-US" sz="1700" b="1" dirty="0">
+                <a:solidFill>
+                  <a:schemeClr val="tx1"/>
+                </a:solidFill>
+                <a:latin typeface="Arial" pitchFamily="34" charset="0"/>
+                <a:ea typeface="Arial" pitchFamily="34" charset="-122"/>
+                <a:cs typeface="Arial" pitchFamily="34" charset="-120"/>
+              </a:rPr>
+              <a:t>Five failures I broke on purpose, then fixed</a:t>
+            </a:r>
+            <a:endParaRPr lang="en-US" sz="1700" dirty="0"/>
+          </a:p>
+        </p:txBody>
+      </p:sp>
+      <p:sp>
+        <p:nvSpPr>
+          <p:cNvPr id="8" name="incident 1"/>
+          <p:cNvSpPr/>
+          <p:nvPr/>
+        </p:nvSpPr>
+        <p:spPr>
+          <a:xfrm>
+            <a:off x="6812280" y="2057400"/>
+            <a:ext cx="4828032" cy="621792"/>
           </a:xfrm>
           <a:prstGeom prst="roundRect">
             <a:avLst>
-              <a:gd name="adj" fmla="val 17778"/>
+              <a:gd name="adj" fmla="val 14706"/>
             </a:avLst>
           </a:prstGeom>
           <a:solidFill>
@@ -4283,14 +4314,14 @@
       </p:sp>
       <p:sp>
         <p:nvSpPr>
-          <p:cNvPr id="4" name="Text 2"/>
-          <p:cNvSpPr txBox="1"/>
-          <p:nvPr/>
-        </p:nvSpPr>
-        <p:spPr>
-          <a:xfrm>
-            <a:off x="10012680" y="548640"/>
-            <a:ext cx="1627632" cy="411480"/>
+          <p:cNvPr id="9" name="Text 6"/>
+          <p:cNvSpPr txBox="1"/>
+          <p:nvPr/>
+        </p:nvSpPr>
+        <p:spPr>
+          <a:xfrm>
+            <a:off x="6967728" y="2057400"/>
+            <a:ext cx="457200" cy="621792"/>
           </a:xfrm>
           <a:prstGeom prst="rect">
             <a:avLst/>
@@ -4302,34 +4333,34 @@
           <a:bodyPr wrap="square" lIns="0" tIns="0" rIns="0" bIns="0" rtlCol="0" anchor="ctr"/>
           <a:lstStyle/>
           <a:p>
-            <a:pPr algn="ctr" indent="0" marL="0">
-              <a:buNone/>
-            </a:pPr>
-            <a:r>
-              <a:rPr lang="en-US" sz="1200" b="1" dirty="0">
-                <a:solidFill>
-                  <a:schemeClr val="accent1"/>
+            <a:pPr indent="0" marL="0">
+              <a:buNone/>
+            </a:pPr>
+            <a:r>
+              <a:rPr lang="en-US" sz="1400" b="1" dirty="0">
+                <a:solidFill>
+                  <a:schemeClr val="accent5"/>
                 </a:solidFill>
                 <a:latin typeface="Courier New" pitchFamily="34" charset="0"/>
                 <a:ea typeface="Courier New" pitchFamily="34" charset="-122"/>
                 <a:cs typeface="Courier New" pitchFamily="34" charset="-120"/>
               </a:rPr>
-              <a:t>BONUS</a:t>
-            </a:r>
-            <a:endParaRPr lang="en-US" sz="1200" dirty="0"/>
-          </a:p>
-        </p:txBody>
-      </p:sp>
-      <p:sp>
-        <p:nvSpPr>
-          <p:cNvPr id="5" name="Text 3"/>
-          <p:cNvSpPr txBox="1"/>
-          <p:nvPr/>
-        </p:nvSpPr>
-        <p:spPr>
-          <a:xfrm>
-            <a:off x="548640" y="1234440"/>
-            <a:ext cx="5943600" cy="256032"/>
+              <a:t>01</a:t>
+            </a:r>
+            <a:endParaRPr lang="en-US" sz="1400" dirty="0"/>
+          </a:p>
+        </p:txBody>
+      </p:sp>
+      <p:sp>
+        <p:nvSpPr>
+          <p:cNvPr id="10" name="Text 7"/>
+          <p:cNvSpPr txBox="1"/>
+          <p:nvPr/>
+        </p:nvSpPr>
+        <p:spPr>
+          <a:xfrm>
+            <a:off x="7498080" y="2057400"/>
+            <a:ext cx="4023360" cy="621792"/>
           </a:xfrm>
           <a:prstGeom prst="rect">
             <a:avLst/>
@@ -4345,153 +4376,37 @@
               <a:buNone/>
             </a:pPr>
             <a:r>
-              <a:rPr lang="en-US" sz="1100" dirty="0">
+              <a:rPr lang="en-US" sz="1400" b="1" dirty="0">
+                <a:solidFill>
+                  <a:schemeClr val="tx1"/>
+                </a:solidFill>
+              </a:rPr>
+              <a:t>ImagePullBackOff</a:t>
+            </a:r>
+            <a:pPr indent="0" marL="0">
+              <a:buNone/>
+            </a:pPr>
+            <a:r>
+              <a:rPr lang="en-US" sz="1300" dirty="0">
                 <a:solidFill>
                   <a:schemeClr val="tx2"/>
                 </a:solidFill>
-                <a:latin typeface="Courier New" pitchFamily="34" charset="0"/>
-                <a:ea typeface="Courier New" pitchFamily="34" charset="-122"/>
-                <a:cs typeface="Courier New" pitchFamily="34" charset="-120"/>
-              </a:rPr>
-              <a:t>argocd: expensepilot-capstone, Healthy + Synced</a:t>
-            </a:r>
-            <a:endParaRPr lang="en-US" sz="1100" dirty="0"/>
-          </a:p>
-        </p:txBody>
-      </p:sp>
-      <p:sp>
-        <p:nvSpPr>
-          <p:cNvPr id="6" name="frame argocd.jpg"/>
+              </a:rPr>
+              <a:t>   image tag that does not exist</a:t>
+            </a:r>
+            <a:endParaRPr lang="en-US" sz="1400" dirty="0"/>
+          </a:p>
+        </p:txBody>
+      </p:sp>
+      <p:sp>
+        <p:nvSpPr>
+          <p:cNvPr id="11" name="incident 2"/>
           <p:cNvSpPr/>
           <p:nvPr/>
         </p:nvSpPr>
         <p:spPr>
           <a:xfrm>
-            <a:off x="521208" y="1527048"/>
-            <a:ext cx="5907024" cy="3858768"/>
-          </a:xfrm>
-          <a:prstGeom prst="rect">
-            <a:avLst/>
-          </a:prstGeom>
-          <a:solidFill>
-            <a:schemeClr val="accent3"/>
-          </a:solidFill>
-          <a:ln w="9525">
-            <a:solidFill>
-              <a:schemeClr val="accent3"/>
-            </a:solidFill>
-            <a:prstDash val="solid"/>
-          </a:ln>
-        </p:spPr>
-      </p:sp>
-      <p:pic>
-        <p:nvPicPr>
-          <p:cNvPr id="7" name="Image 0" descr="argocd.jpg">    </p:cNvPr>
-          <p:cNvPicPr>
-            <a:picLocks noChangeAspect="1"/>
-          </p:cNvPicPr>
-          <p:nvPr/>
-        </p:nvPicPr>
-        <p:blipFill>
-          <a:blip r:embed="rId1"/>
-          <a:stretch>
-            <a:fillRect/>
-          </a:stretch>
-        </p:blipFill>
-        <p:spPr>
-          <a:xfrm>
-            <a:off x="548640" y="1554480"/>
-            <a:ext cx="5852160" cy="3803904"/>
-          </a:xfrm>
-          <a:prstGeom prst="rect">
-            <a:avLst/>
-          </a:prstGeom>
-        </p:spPr>
-      </p:pic>
-      <p:sp>
-        <p:nvSpPr>
-          <p:cNvPr id="8" name="Text 5"/>
-          <p:cNvSpPr txBox="1"/>
-          <p:nvPr/>
-        </p:nvSpPr>
-        <p:spPr>
-          <a:xfrm>
-            <a:off x="548640" y="5486400"/>
-            <a:ext cx="5852160" cy="640080"/>
-          </a:xfrm>
-          <a:prstGeom prst="rect">
-            <a:avLst/>
-          </a:prstGeom>
-          <a:noFill/>
-          <a:ln/>
-        </p:spPr>
-        <p:txBody>
-          <a:bodyPr wrap="square" lIns="0" tIns="0" rIns="0" bIns="0" rtlCol="0" anchor="t"/>
-          <a:lstStyle/>
-          <a:p>
-            <a:pPr indent="0" marL="0">
-              <a:buNone/>
-            </a:pPr>
-            <a:r>
-              <a:rPr lang="en-US" sz="1400" dirty="0">
-                <a:solidFill>
-                  <a:schemeClr val="tx2"/>
-                </a:solidFill>
-              </a:rPr>
-              <a:t>ArgoCD watches helm/expensepilot in the repo and reverts any manual kubectl change.</a:t>
-            </a:r>
-            <a:endParaRPr lang="en-US" sz="1400" dirty="0"/>
-          </a:p>
-        </p:txBody>
-      </p:sp>
-      <p:sp>
-        <p:nvSpPr>
-          <p:cNvPr id="9" name="Text 6"/>
-          <p:cNvSpPr txBox="1"/>
-          <p:nvPr/>
-        </p:nvSpPr>
-        <p:spPr>
-          <a:xfrm>
-            <a:off x="6812280" y="1463040"/>
-            <a:ext cx="4846320" cy="411480"/>
-          </a:xfrm>
-          <a:prstGeom prst="rect">
-            <a:avLst/>
-          </a:prstGeom>
-          <a:noFill/>
-          <a:ln/>
-        </p:spPr>
-        <p:txBody>
-          <a:bodyPr wrap="square" lIns="0" tIns="0" rIns="0" bIns="0" rtlCol="0" anchor="ctr"/>
-          <a:lstStyle/>
-          <a:p>
-            <a:pPr indent="0" marL="0">
-              <a:buNone/>
-            </a:pPr>
-            <a:r>
-              <a:rPr lang="en-US" sz="1700" b="1" dirty="0">
-                <a:solidFill>
-                  <a:schemeClr val="tx1"/>
-                </a:solidFill>
-                <a:latin typeface="Arial" pitchFamily="34" charset="0"/>
-                <a:ea typeface="Arial" pitchFamily="34" charset="-122"/>
-                <a:cs typeface="Arial" pitchFamily="34" charset="-120"/>
-              </a:rPr>
-              <a:t>Five failures I broke on purpose, then fixed</a:t>
-            </a:r>
-            <a:endParaRPr lang="en-US" sz="1700" dirty="0"/>
-          </a:p>
-        </p:txBody>
-      </p:sp>
-      <p:sp>
-        <p:nvSpPr>
-          <p:cNvPr id="10" name="incident 1"/>
-          <p:cNvSpPr/>
-          <p:nvPr/>
-        </p:nvSpPr>
-        <p:spPr>
-          <a:xfrm>
-            <a:off x="6812280" y="2057400"/>
+            <a:off x="6812280" y="2807208"/>
             <a:ext cx="4828032" cy="621792"/>
           </a:xfrm>
           <a:prstGeom prst="roundRect">
@@ -4512,13 +4427,13 @@
       </p:sp>
       <p:sp>
         <p:nvSpPr>
-          <p:cNvPr id="11" name="Text 8"/>
-          <p:cNvSpPr txBox="1"/>
-          <p:nvPr/>
-        </p:nvSpPr>
-        <p:spPr>
-          <a:xfrm>
-            <a:off x="6967728" y="2057400"/>
+          <p:cNvPr id="12" name="Text 9"/>
+          <p:cNvSpPr txBox="1"/>
+          <p:nvPr/>
+        </p:nvSpPr>
+        <p:spPr>
+          <a:xfrm>
+            <a:off x="6967728" y="2807208"/>
             <a:ext cx="457200" cy="621792"/>
           </a:xfrm>
           <a:prstGeom prst="rect">
@@ -4543,7 +4458,7 @@
                 <a:ea typeface="Courier New" pitchFamily="34" charset="-122"/>
                 <a:cs typeface="Courier New" pitchFamily="34" charset="-120"/>
               </a:rPr>
-              <a:t>01</a:t>
+              <a:t>02</a:t>
             </a:r>
             <a:endParaRPr lang="en-US" sz="1400" dirty="0"/>
           </a:p>
@@ -4551,13 +4466,13 @@
       </p:sp>
       <p:sp>
         <p:nvSpPr>
-          <p:cNvPr id="12" name="Text 9"/>
-          <p:cNvSpPr txBox="1"/>
-          <p:nvPr/>
-        </p:nvSpPr>
-        <p:spPr>
-          <a:xfrm>
-            <a:off x="7498080" y="2057400"/>
+          <p:cNvPr id="13" name="Text 10"/>
+          <p:cNvSpPr txBox="1"/>
+          <p:nvPr/>
+        </p:nvSpPr>
+        <p:spPr>
+          <a:xfrm>
+            <a:off x="7498080" y="2807208"/>
             <a:ext cx="4023360" cy="621792"/>
           </a:xfrm>
           <a:prstGeom prst="rect">
@@ -4579,7 +4494,7 @@
                   <a:schemeClr val="tx1"/>
                 </a:solidFill>
               </a:rPr>
-              <a:t>ImagePullBackOff</a:t>
+              <a:t>CrashLoopBackOff</a:t>
             </a:r>
             <a:pPr indent="0" marL="0">
               <a:buNone/>
@@ -4590,7 +4505,7 @@
                   <a:schemeClr val="tx2"/>
                 </a:solidFill>
               </a:rPr>
-              <a:t>   image tag that does not exist</a:t>
+              <a:t>   database host unreachable</a:t>
             </a:r>
             <a:endParaRPr lang="en-US" sz="1400" dirty="0"/>
           </a:p>
@@ -4598,13 +4513,13 @@
       </p:sp>
       <p:sp>
         <p:nvSpPr>
-          <p:cNvPr id="13" name="incident 2"/>
+          <p:cNvPr id="14" name="incident 3"/>
           <p:cNvSpPr/>
           <p:nvPr/>
         </p:nvSpPr>
         <p:spPr>
           <a:xfrm>
-            <a:off x="6812280" y="2807208"/>
+            <a:off x="6812280" y="3557016"/>
             <a:ext cx="4828032" cy="621792"/>
           </a:xfrm>
           <a:prstGeom prst="roundRect">
@@ -4625,13 +4540,13 @@
       </p:sp>
       <p:sp>
         <p:nvSpPr>
-          <p:cNvPr id="14" name="Text 11"/>
-          <p:cNvSpPr txBox="1"/>
-          <p:nvPr/>
-        </p:nvSpPr>
-        <p:spPr>
-          <a:xfrm>
-            <a:off x="6967728" y="2807208"/>
+          <p:cNvPr id="15" name="Text 12"/>
+          <p:cNvSpPr txBox="1"/>
+          <p:nvPr/>
+        </p:nvSpPr>
+        <p:spPr>
+          <a:xfrm>
+            <a:off x="6967728" y="3557016"/>
             <a:ext cx="457200" cy="621792"/>
           </a:xfrm>
           <a:prstGeom prst="rect">
@@ -4656,7 +4571,7 @@
                 <a:ea typeface="Courier New" pitchFamily="34" charset="-122"/>
                 <a:cs typeface="Courier New" pitchFamily="34" charset="-120"/>
               </a:rPr>
-              <a:t>02</a:t>
+              <a:t>03</a:t>
             </a:r>
             <a:endParaRPr lang="en-US" sz="1400" dirty="0"/>
           </a:p>
@@ -4664,13 +4579,13 @@
       </p:sp>
       <p:sp>
         <p:nvSpPr>
-          <p:cNvPr id="15" name="Text 12"/>
-          <p:cNvSpPr txBox="1"/>
-          <p:nvPr/>
-        </p:nvSpPr>
-        <p:spPr>
-          <a:xfrm>
-            <a:off x="7498080" y="2807208"/>
+          <p:cNvPr id="16" name="Text 13"/>
+          <p:cNvSpPr txBox="1"/>
+          <p:nvPr/>
+        </p:nvSpPr>
+        <p:spPr>
+          <a:xfrm>
+            <a:off x="7498080" y="3557016"/>
             <a:ext cx="4023360" cy="621792"/>
           </a:xfrm>
           <a:prstGeom prst="rect">
@@ -4692,7 +4607,7 @@
                   <a:schemeClr val="tx1"/>
                 </a:solidFill>
               </a:rPr>
-              <a:t>CrashLoopBackOff</a:t>
+              <a:t>Service, no endpoints</a:t>
             </a:r>
             <a:pPr indent="0" marL="0">
               <a:buNone/>
@@ -4703,7 +4618,7 @@
                   <a:schemeClr val="tx2"/>
                 </a:solidFill>
               </a:rPr>
-              <a:t>   database host unreachable</a:t>
+              <a:t>   selector label mismatch</a:t>
             </a:r>
             <a:endParaRPr lang="en-US" sz="1400" dirty="0"/>
           </a:p>
@@ -4711,13 +4626,13 @@
       </p:sp>
       <p:sp>
         <p:nvSpPr>
-          <p:cNvPr id="16" name="incident 3"/>
+          <p:cNvPr id="17" name="incident 4"/>
           <p:cNvSpPr/>
           <p:nvPr/>
         </p:nvSpPr>
         <p:spPr>
           <a:xfrm>
-            <a:off x="6812280" y="3557016"/>
+            <a:off x="6812280" y="4306824"/>
             <a:ext cx="4828032" cy="621792"/>
           </a:xfrm>
           <a:prstGeom prst="roundRect">
@@ -4738,13 +4653,13 @@
       </p:sp>
       <p:sp>
         <p:nvSpPr>
-          <p:cNvPr id="17" name="Text 14"/>
-          <p:cNvSpPr txBox="1"/>
-          <p:nvPr/>
-        </p:nvSpPr>
-        <p:spPr>
-          <a:xfrm>
-            <a:off x="6967728" y="3557016"/>
+          <p:cNvPr id="18" name="Text 15"/>
+          <p:cNvSpPr txBox="1"/>
+          <p:nvPr/>
+        </p:nvSpPr>
+        <p:spPr>
+          <a:xfrm>
+            <a:off x="6967728" y="4306824"/>
             <a:ext cx="457200" cy="621792"/>
           </a:xfrm>
           <a:prstGeom prst="rect">
@@ -4769,7 +4684,7 @@
                 <a:ea typeface="Courier New" pitchFamily="34" charset="-122"/>
                 <a:cs typeface="Courier New" pitchFamily="34" charset="-120"/>
               </a:rPr>
-              <a:t>03</a:t>
+              <a:t>04</a:t>
             </a:r>
             <a:endParaRPr lang="en-US" sz="1400" dirty="0"/>
           </a:p>
@@ -4777,13 +4692,13 @@
       </p:sp>
       <p:sp>
         <p:nvSpPr>
-          <p:cNvPr id="18" name="Text 15"/>
-          <p:cNvSpPr txBox="1"/>
-          <p:nvPr/>
-        </p:nvSpPr>
-        <p:spPr>
-          <a:xfrm>
-            <a:off x="7498080" y="3557016"/>
+          <p:cNvPr id="19" name="Text 16"/>
+          <p:cNvSpPr txBox="1"/>
+          <p:nvPr/>
+        </p:nvSpPr>
+        <p:spPr>
+          <a:xfrm>
+            <a:off x="7498080" y="4306824"/>
             <a:ext cx="4023360" cy="621792"/>
           </a:xfrm>
           <a:prstGeom prst="rect">
@@ -4805,7 +4720,7 @@
                   <a:schemeClr val="tx1"/>
                 </a:solidFill>
               </a:rPr>
-              <a:t>Service, no endpoints</a:t>
+              <a:t>Pod stuck Pending</a:t>
             </a:r>
             <a:pPr indent="0" marL="0">
               <a:buNone/>
@@ -4816,7 +4731,7 @@
                   <a:schemeClr val="tx2"/>
                 </a:solidFill>
               </a:rPr>
-              <a:t>   selector label mismatch</a:t>
+              <a:t>   PVC never bound</a:t>
             </a:r>
             <a:endParaRPr lang="en-US" sz="1400" dirty="0"/>
           </a:p>
@@ -4824,13 +4739,13 @@
       </p:sp>
       <p:sp>
         <p:nvSpPr>
-          <p:cNvPr id="19" name="incident 4"/>
+          <p:cNvPr id="20" name="incident 5"/>
           <p:cNvSpPr/>
           <p:nvPr/>
         </p:nvSpPr>
         <p:spPr>
           <a:xfrm>
-            <a:off x="6812280" y="4306824"/>
+            <a:off x="6812280" y="5056632"/>
             <a:ext cx="4828032" cy="621792"/>
           </a:xfrm>
           <a:prstGeom prst="roundRect">
@@ -4851,13 +4766,13 @@
       </p:sp>
       <p:sp>
         <p:nvSpPr>
-          <p:cNvPr id="20" name="Text 17"/>
-          <p:cNvSpPr txBox="1"/>
-          <p:nvPr/>
-        </p:nvSpPr>
-        <p:spPr>
-          <a:xfrm>
-            <a:off x="6967728" y="4306824"/>
+          <p:cNvPr id="21" name="Text 18"/>
+          <p:cNvSpPr txBox="1"/>
+          <p:nvPr/>
+        </p:nvSpPr>
+        <p:spPr>
+          <a:xfrm>
+            <a:off x="6967728" y="5056632"/>
             <a:ext cx="457200" cy="621792"/>
           </a:xfrm>
           <a:prstGeom prst="rect">
@@ -4882,7 +4797,7 @@
                 <a:ea typeface="Courier New" pitchFamily="34" charset="-122"/>
                 <a:cs typeface="Courier New" pitchFamily="34" charset="-120"/>
               </a:rPr>
-              <a:t>04</a:t>
+              <a:t>05</a:t>
             </a:r>
             <a:endParaRPr lang="en-US" sz="1400" dirty="0"/>
           </a:p>
@@ -4890,120 +4805,7 @@
       </p:sp>
       <p:sp>
         <p:nvSpPr>
-          <p:cNvPr id="21" name="Text 18"/>
-          <p:cNvSpPr txBox="1"/>
-          <p:nvPr/>
-        </p:nvSpPr>
-        <p:spPr>
-          <a:xfrm>
-            <a:off x="7498080" y="4306824"/>
-            <a:ext cx="4023360" cy="621792"/>
-          </a:xfrm>
-          <a:prstGeom prst="rect">
-            <a:avLst/>
-          </a:prstGeom>
-          <a:noFill/>
-          <a:ln/>
-        </p:spPr>
-        <p:txBody>
-          <a:bodyPr wrap="square" lIns="0" tIns="0" rIns="0" bIns="0" rtlCol="0" anchor="ctr"/>
-          <a:lstStyle/>
-          <a:p>
-            <a:pPr indent="0" marL="0">
-              <a:buNone/>
-            </a:pPr>
-            <a:r>
-              <a:rPr lang="en-US" sz="1400" b="1" dirty="0">
-                <a:solidFill>
-                  <a:schemeClr val="tx1"/>
-                </a:solidFill>
-              </a:rPr>
-              <a:t>Pod stuck Pending</a:t>
-            </a:r>
-            <a:pPr indent="0" marL="0">
-              <a:buNone/>
-            </a:pPr>
-            <a:r>
-              <a:rPr lang="en-US" sz="1300" dirty="0">
-                <a:solidFill>
-                  <a:schemeClr val="tx2"/>
-                </a:solidFill>
-              </a:rPr>
-              <a:t>   PVC never bound</a:t>
-            </a:r>
-            <a:endParaRPr lang="en-US" sz="1400" dirty="0"/>
-          </a:p>
-        </p:txBody>
-      </p:sp>
-      <p:sp>
-        <p:nvSpPr>
-          <p:cNvPr id="22" name="incident 5"/>
-          <p:cNvSpPr/>
-          <p:nvPr/>
-        </p:nvSpPr>
-        <p:spPr>
-          <a:xfrm>
-            <a:off x="6812280" y="5056632"/>
-            <a:ext cx="4828032" cy="621792"/>
-          </a:xfrm>
-          <a:prstGeom prst="roundRect">
-            <a:avLst>
-              <a:gd name="adj" fmla="val 14706"/>
-            </a:avLst>
-          </a:prstGeom>
-          <a:solidFill>
-            <a:schemeClr val="bg2"/>
-          </a:solidFill>
-          <a:ln w="12700">
-            <a:solidFill>
-              <a:schemeClr val="accent3"/>
-            </a:solidFill>
-            <a:prstDash val="solid"/>
-          </a:ln>
-        </p:spPr>
-      </p:sp>
-      <p:sp>
-        <p:nvSpPr>
-          <p:cNvPr id="23" name="Text 20"/>
-          <p:cNvSpPr txBox="1"/>
-          <p:nvPr/>
-        </p:nvSpPr>
-        <p:spPr>
-          <a:xfrm>
-            <a:off x="6967728" y="5056632"/>
-            <a:ext cx="457200" cy="621792"/>
-          </a:xfrm>
-          <a:prstGeom prst="rect">
-            <a:avLst/>
-          </a:prstGeom>
-          <a:noFill/>
-          <a:ln/>
-        </p:spPr>
-        <p:txBody>
-          <a:bodyPr wrap="square" lIns="0" tIns="0" rIns="0" bIns="0" rtlCol="0" anchor="ctr"/>
-          <a:lstStyle/>
-          <a:p>
-            <a:pPr indent="0" marL="0">
-              <a:buNone/>
-            </a:pPr>
-            <a:r>
-              <a:rPr lang="en-US" sz="1400" b="1" dirty="0">
-                <a:solidFill>
-                  <a:schemeClr val="accent5"/>
-                </a:solidFill>
-                <a:latin typeface="Courier New" pitchFamily="34" charset="0"/>
-                <a:ea typeface="Courier New" pitchFamily="34" charset="-122"/>
-                <a:cs typeface="Courier New" pitchFamily="34" charset="-120"/>
-              </a:rPr>
-              <a:t>05</a:t>
-            </a:r>
-            <a:endParaRPr lang="en-US" sz="1400" dirty="0"/>
-          </a:p>
-        </p:txBody>
-      </p:sp>
-      <p:sp>
-        <p:nvSpPr>
-          <p:cNvPr id="24" name="Text 21"/>
+          <p:cNvPr id="22" name="Text 19"/>
           <p:cNvSpPr txBox="1"/>
           <p:nvPr/>
         </p:nvSpPr>
@@ -5050,7 +4852,7 @@
       </p:sp>
       <p:sp>
         <p:nvSpPr>
-          <p:cNvPr id="25" name="Text 22"/>
+          <p:cNvPr id="23" name="Text 20"/>
           <p:cNvSpPr txBox="1"/>
           <p:nvPr/>
         </p:nvSpPr>
@@ -5197,73 +4999,7 @@
       </p:sp>
       <p:sp>
         <p:nvSpPr>
-          <p:cNvPr id="3" name="module chip"/>
-          <p:cNvSpPr/>
-          <p:nvPr/>
-        </p:nvSpPr>
-        <p:spPr>
-          <a:xfrm>
-            <a:off x="10012680" y="548640"/>
-            <a:ext cx="1627632" cy="411480"/>
-          </a:xfrm>
-          <a:prstGeom prst="roundRect">
-            <a:avLst>
-              <a:gd name="adj" fmla="val 17778"/>
-            </a:avLst>
-          </a:prstGeom>
-          <a:solidFill>
-            <a:schemeClr val="bg2"/>
-          </a:solidFill>
-          <a:ln w="12700">
-            <a:solidFill>
-              <a:schemeClr val="accent3"/>
-            </a:solidFill>
-            <a:prstDash val="solid"/>
-          </a:ln>
-        </p:spPr>
-      </p:sp>
-      <p:sp>
-        <p:nvSpPr>
-          <p:cNvPr id="4" name="Text 2"/>
-          <p:cNvSpPr txBox="1"/>
-          <p:nvPr/>
-        </p:nvSpPr>
-        <p:spPr>
-          <a:xfrm>
-            <a:off x="10012680" y="548640"/>
-            <a:ext cx="1627632" cy="411480"/>
-          </a:xfrm>
-          <a:prstGeom prst="rect">
-            <a:avLst/>
-          </a:prstGeom>
-          <a:noFill/>
-          <a:ln/>
-        </p:spPr>
-        <p:txBody>
-          <a:bodyPr wrap="square" lIns="0" tIns="0" rIns="0" bIns="0" rtlCol="0" anchor="ctr"/>
-          <a:lstStyle/>
-          <a:p>
-            <a:pPr algn="ctr" indent="0" marL="0">
-              <a:buNone/>
-            </a:pPr>
-            <a:r>
-              <a:rPr lang="en-US" sz="1200" b="1" dirty="0">
-                <a:solidFill>
-                  <a:schemeClr val="accent1"/>
-                </a:solidFill>
-                <a:latin typeface="Courier New" pitchFamily="34" charset="0"/>
-                <a:ea typeface="Courier New" pitchFamily="34" charset="-122"/>
-                <a:cs typeface="Courier New" pitchFamily="34" charset="-120"/>
-              </a:rPr>
-              <a:t>M10 · 5 pts</a:t>
-            </a:r>
-            <a:endParaRPr lang="en-US" sz="1200" dirty="0"/>
-          </a:p>
-        </p:txBody>
-      </p:sp>
-      <p:sp>
-        <p:nvSpPr>
-          <p:cNvPr id="5" name="step 1"/>
+          <p:cNvPr id="3" name="step 1"/>
           <p:cNvSpPr/>
           <p:nvPr/>
         </p:nvSpPr>
@@ -5288,7 +5024,7 @@
       </p:sp>
       <p:sp>
         <p:nvSpPr>
-          <p:cNvPr id="6" name="Text 4"/>
+          <p:cNvPr id="4" name="Text 2"/>
           <p:cNvSpPr txBox="1"/>
           <p:nvPr/>
         </p:nvSpPr>
@@ -5327,7 +5063,7 @@
       </p:sp>
       <p:sp>
         <p:nvSpPr>
-          <p:cNvPr id="7" name="Text 5"/>
+          <p:cNvPr id="5" name="Text 3"/>
           <p:cNvSpPr txBox="1"/>
           <p:nvPr/>
         </p:nvSpPr>
@@ -5377,7 +5113,7 @@
       </p:sp>
       <p:sp>
         <p:nvSpPr>
-          <p:cNvPr id="8" name="step 2"/>
+          <p:cNvPr id="6" name="step 2"/>
           <p:cNvSpPr/>
           <p:nvPr/>
         </p:nvSpPr>
@@ -5402,7 +5138,7 @@
       </p:sp>
       <p:sp>
         <p:nvSpPr>
-          <p:cNvPr id="9" name="Text 7"/>
+          <p:cNvPr id="7" name="Text 5"/>
           <p:cNvSpPr txBox="1"/>
           <p:nvPr/>
         </p:nvSpPr>
@@ -5441,7 +5177,7 @@
       </p:sp>
       <p:sp>
         <p:nvSpPr>
-          <p:cNvPr id="10" name="Text 8"/>
+          <p:cNvPr id="8" name="Text 6"/>
           <p:cNvSpPr txBox="1"/>
           <p:nvPr/>
         </p:nvSpPr>
@@ -5491,7 +5227,7 @@
       </p:sp>
       <p:sp>
         <p:nvSpPr>
-          <p:cNvPr id="11" name="step 3"/>
+          <p:cNvPr id="9" name="step 3"/>
           <p:cNvSpPr/>
           <p:nvPr/>
         </p:nvSpPr>
@@ -5516,7 +5252,7 @@
       </p:sp>
       <p:sp>
         <p:nvSpPr>
-          <p:cNvPr id="12" name="Text 10"/>
+          <p:cNvPr id="10" name="Text 8"/>
           <p:cNvSpPr txBox="1"/>
           <p:nvPr/>
         </p:nvSpPr>
@@ -5555,7 +5291,7 @@
       </p:sp>
       <p:sp>
         <p:nvSpPr>
-          <p:cNvPr id="13" name="Text 11"/>
+          <p:cNvPr id="11" name="Text 9"/>
           <p:cNvSpPr txBox="1"/>
           <p:nvPr/>
         </p:nvSpPr>
@@ -5605,7 +5341,7 @@
       </p:sp>
       <p:sp>
         <p:nvSpPr>
-          <p:cNvPr id="14" name="step 4"/>
+          <p:cNvPr id="12" name="step 4"/>
           <p:cNvSpPr/>
           <p:nvPr/>
         </p:nvSpPr>
@@ -5630,7 +5366,7 @@
       </p:sp>
       <p:sp>
         <p:nvSpPr>
-          <p:cNvPr id="15" name="Text 13"/>
+          <p:cNvPr id="13" name="Text 11"/>
           <p:cNvSpPr txBox="1"/>
           <p:nvPr/>
         </p:nvSpPr>
@@ -5669,7 +5405,7 @@
       </p:sp>
       <p:sp>
         <p:nvSpPr>
-          <p:cNvPr id="16" name="Text 14"/>
+          <p:cNvPr id="14" name="Text 12"/>
           <p:cNvSpPr txBox="1"/>
           <p:nvPr/>
         </p:nvSpPr>
@@ -5719,7 +5455,7 @@
       </p:sp>
       <p:sp>
         <p:nvSpPr>
-          <p:cNvPr id="17" name="Text 15"/>
+          <p:cNvPr id="15" name="Text 13"/>
           <p:cNvSpPr txBox="1"/>
           <p:nvPr/>
         </p:nvSpPr>
@@ -5758,7 +5494,7 @@
       </p:sp>
       <p:sp>
         <p:nvSpPr>
-          <p:cNvPr id="18" name="frame ingress.jpg"/>
+          <p:cNvPr id="16" name="frame ingress.jpg"/>
           <p:cNvSpPr/>
           <p:nvPr/>
         </p:nvSpPr>
@@ -5783,7 +5519,7 @@
       </p:sp>
       <p:pic>
         <p:nvPicPr>
-          <p:cNvPr id="19" name="Image 0" descr="ingress.jpg">    </p:cNvPr>
+          <p:cNvPr id="17" name="Image 0" descr="ingress.jpg">    </p:cNvPr>
           <p:cNvPicPr>
             <a:picLocks noChangeAspect="1"/>
           </p:cNvPicPr>
@@ -5807,7 +5543,7 @@
       </p:pic>
       <p:sp>
         <p:nvSpPr>
-          <p:cNvPr id="20" name="Text 17"/>
+          <p:cNvPr id="18" name="Text 15"/>
           <p:cNvSpPr txBox="1"/>
           <p:nvPr/>
         </p:nvSpPr>
@@ -5975,18 +5711,226 @@
       </p:sp>
       <p:sp>
         <p:nvSpPr>
-          <p:cNvPr id="3" name="module chip"/>
+          <p:cNvPr id="3" name="node git push"/>
           <p:cNvSpPr/>
           <p:nvPr/>
         </p:nvSpPr>
         <p:spPr>
           <a:xfrm>
-            <a:off x="10012680" y="548640"/>
-            <a:ext cx="1627632" cy="411480"/>
+            <a:off x="548640" y="1463040"/>
+            <a:ext cx="1938528" cy="868680"/>
           </a:xfrm>
           <a:prstGeom prst="roundRect">
             <a:avLst>
-              <a:gd name="adj" fmla="val 17778"/>
+              <a:gd name="adj" fmla="val 10526"/>
+            </a:avLst>
+          </a:prstGeom>
+          <a:solidFill>
+            <a:schemeClr val="accent6"/>
+          </a:solidFill>
+          <a:ln w="12700">
+            <a:solidFill>
+              <a:schemeClr val="accent3"/>
+            </a:solidFill>
+            <a:prstDash val="solid"/>
+          </a:ln>
+        </p:spPr>
+      </p:sp>
+      <p:sp>
+        <p:nvSpPr>
+          <p:cNvPr id="4" name="Text 2"/>
+          <p:cNvSpPr txBox="1"/>
+          <p:nvPr/>
+        </p:nvSpPr>
+        <p:spPr>
+          <a:xfrm>
+            <a:off x="658368" y="1463040"/>
+            <a:ext cx="1719072" cy="868680"/>
+          </a:xfrm>
+          <a:prstGeom prst="rect">
+            <a:avLst/>
+          </a:prstGeom>
+          <a:noFill/>
+          <a:ln/>
+        </p:spPr>
+        <p:txBody>
+          <a:bodyPr wrap="square" lIns="0" tIns="0" rIns="0" bIns="0" rtlCol="0" anchor="ctr"/>
+          <a:lstStyle/>
+          <a:p>
+            <a:pPr indent="0" marL="0">
+              <a:buNone/>
+            </a:pPr>
+            <a:r>
+              <a:rPr lang="en-US" sz="1400" b="1" dirty="0">
+                <a:solidFill>
+                  <a:schemeClr val="tx1"/>
+                </a:solidFill>
+              </a:rPr>
+              <a:t>git push</a:t>
+            </a:r>
+            <a:endParaRPr lang="en-US" sz="1400" dirty="0"/>
+          </a:p>
+          <a:p>
+            <a:pPr indent="0" marL="0">
+              <a:buNone/>
+            </a:pPr>
+            <a:r>
+              <a:rPr lang="en-US" sz="1100" dirty="0">
+                <a:solidFill>
+                  <a:schemeClr val="tx2"/>
+                </a:solidFill>
+                <a:latin typeface="Courier New" pitchFamily="34" charset="0"/>
+                <a:ea typeface="Courier New" pitchFamily="34" charset="-122"/>
+                <a:cs typeface="Courier New" pitchFamily="34" charset="-120"/>
+              </a:rPr>
+              <a:t>branch: main</a:t>
+            </a:r>
+            <a:endParaRPr lang="en-US" sz="1400" dirty="0"/>
+          </a:p>
+        </p:txBody>
+      </p:sp>
+      <p:sp>
+        <p:nvSpPr>
+          <p:cNvPr id="5" name="Shape 3"/>
+          <p:cNvSpPr/>
+          <p:nvPr/>
+        </p:nvSpPr>
+        <p:spPr>
+          <a:xfrm>
+            <a:off x="2523744" y="1897380"/>
+            <a:ext cx="265176" cy="0"/>
+          </a:xfrm>
+          <a:prstGeom prst="line">
+            <a:avLst/>
+          </a:prstGeom>
+          <a:noFill/>
+          <a:ln w="19050">
+            <a:solidFill>
+              <a:schemeClr val="accent1"/>
+            </a:solidFill>
+            <a:prstDash val="solid"/>
+            <a:tailEnd type="triangle"/>
+          </a:ln>
+        </p:spPr>
+      </p:sp>
+      <p:sp>
+        <p:nvSpPr>
+          <p:cNvPr id="6" name="node GitHub Actions"/>
+          <p:cNvSpPr/>
+          <p:nvPr/>
+        </p:nvSpPr>
+        <p:spPr>
+          <a:xfrm>
+            <a:off x="2825496" y="1463040"/>
+            <a:ext cx="1938528" cy="868680"/>
+          </a:xfrm>
+          <a:prstGeom prst="roundRect">
+            <a:avLst>
+              <a:gd name="adj" fmla="val 10526"/>
+            </a:avLst>
+          </a:prstGeom>
+          <a:solidFill>
+            <a:schemeClr val="accent6"/>
+          </a:solidFill>
+          <a:ln w="12700">
+            <a:solidFill>
+              <a:schemeClr val="accent3"/>
+            </a:solidFill>
+            <a:prstDash val="solid"/>
+          </a:ln>
+        </p:spPr>
+      </p:sp>
+      <p:sp>
+        <p:nvSpPr>
+          <p:cNvPr id="7" name="Text 5"/>
+          <p:cNvSpPr txBox="1"/>
+          <p:nvPr/>
+        </p:nvSpPr>
+        <p:spPr>
+          <a:xfrm>
+            <a:off x="2935224" y="1463040"/>
+            <a:ext cx="1719072" cy="868680"/>
+          </a:xfrm>
+          <a:prstGeom prst="rect">
+            <a:avLst/>
+          </a:prstGeom>
+          <a:noFill/>
+          <a:ln/>
+        </p:spPr>
+        <p:txBody>
+          <a:bodyPr wrap="square" lIns="0" tIns="0" rIns="0" bIns="0" rtlCol="0" anchor="ctr"/>
+          <a:lstStyle/>
+          <a:p>
+            <a:pPr indent="0" marL="0">
+              <a:buNone/>
+            </a:pPr>
+            <a:r>
+              <a:rPr lang="en-US" sz="1400" b="1" dirty="0">
+                <a:solidFill>
+                  <a:schemeClr val="tx1"/>
+                </a:solidFill>
+              </a:rPr>
+              <a:t>GitHub Actions</a:t>
+            </a:r>
+            <a:endParaRPr lang="en-US" sz="1400" dirty="0"/>
+          </a:p>
+          <a:p>
+            <a:pPr indent="0" marL="0">
+              <a:buNone/>
+            </a:pPr>
+            <a:r>
+              <a:rPr lang="en-US" sz="1100" dirty="0">
+                <a:solidFill>
+                  <a:schemeClr val="tx2"/>
+                </a:solidFill>
+                <a:latin typeface="Courier New" pitchFamily="34" charset="0"/>
+                <a:ea typeface="Courier New" pitchFamily="34" charset="-122"/>
+                <a:cs typeface="Courier New" pitchFamily="34" charset="-120"/>
+              </a:rPr>
+              <a:t>test, scan, build</a:t>
+            </a:r>
+            <a:endParaRPr lang="en-US" sz="1400" dirty="0"/>
+          </a:p>
+        </p:txBody>
+      </p:sp>
+      <p:sp>
+        <p:nvSpPr>
+          <p:cNvPr id="8" name="Shape 6"/>
+          <p:cNvSpPr/>
+          <p:nvPr/>
+        </p:nvSpPr>
+        <p:spPr>
+          <a:xfrm>
+            <a:off x="4800600" y="1897380"/>
+            <a:ext cx="265176" cy="0"/>
+          </a:xfrm>
+          <a:prstGeom prst="line">
+            <a:avLst/>
+          </a:prstGeom>
+          <a:noFill/>
+          <a:ln w="19050">
+            <a:solidFill>
+              <a:schemeClr val="accent1"/>
+            </a:solidFill>
+            <a:prstDash val="solid"/>
+            <a:tailEnd type="triangle"/>
+          </a:ln>
+        </p:spPr>
+      </p:sp>
+      <p:sp>
+        <p:nvSpPr>
+          <p:cNvPr id="9" name="node Trivy gate"/>
+          <p:cNvSpPr/>
+          <p:nvPr/>
+        </p:nvSpPr>
+        <p:spPr>
+          <a:xfrm>
+            <a:off x="5102352" y="1463040"/>
+            <a:ext cx="1938528" cy="868680"/>
+          </a:xfrm>
+          <a:prstGeom prst="roundRect">
+            <a:avLst>
+              <a:gd name="adj" fmla="val 10526"/>
             </a:avLst>
           </a:prstGeom>
           <a:solidFill>
@@ -6002,14 +5946,14 @@
       </p:sp>
       <p:sp>
         <p:nvSpPr>
-          <p:cNvPr id="4" name="Text 2"/>
-          <p:cNvSpPr txBox="1"/>
-          <p:nvPr/>
-        </p:nvSpPr>
-        <p:spPr>
-          <a:xfrm>
-            <a:off x="10012680" y="548640"/>
-            <a:ext cx="1627632" cy="411480"/>
+          <p:cNvPr id="10" name="Text 8"/>
+          <p:cNvSpPr txBox="1"/>
+          <p:nvPr/>
+        </p:nvSpPr>
+        <p:spPr>
+          <a:xfrm>
+            <a:off x="5212080" y="1463040"/>
+            <a:ext cx="1719072" cy="868680"/>
           </a:xfrm>
           <a:prstGeom prst="rect">
             <a:avLst/>
@@ -6021,33 +5965,71 @@
           <a:bodyPr wrap="square" lIns="0" tIns="0" rIns="0" bIns="0" rtlCol="0" anchor="ctr"/>
           <a:lstStyle/>
           <a:p>
-            <a:pPr algn="ctr" indent="0" marL="0">
-              <a:buNone/>
-            </a:pPr>
-            <a:r>
-              <a:rPr lang="en-US" sz="1200" b="1" dirty="0">
-                <a:solidFill>
-                  <a:schemeClr val="accent1"/>
+            <a:pPr indent="0" marL="0">
+              <a:buNone/>
+            </a:pPr>
+            <a:r>
+              <a:rPr lang="en-US" sz="1400" b="1" dirty="0">
+                <a:solidFill>
+                  <a:schemeClr val="tx1"/>
+                </a:solidFill>
+              </a:rPr>
+              <a:t>Trivy gate</a:t>
+            </a:r>
+            <a:endParaRPr lang="en-US" sz="1400" dirty="0"/>
+          </a:p>
+          <a:p>
+            <a:pPr indent="0" marL="0">
+              <a:buNone/>
+            </a:pPr>
+            <a:r>
+              <a:rPr lang="en-US" sz="1100" dirty="0">
+                <a:solidFill>
+                  <a:schemeClr val="tx2"/>
                 </a:solidFill>
                 <a:latin typeface="Courier New" pitchFamily="34" charset="0"/>
                 <a:ea typeface="Courier New" pitchFamily="34" charset="-122"/>
                 <a:cs typeface="Courier New" pitchFamily="34" charset="-120"/>
               </a:rPr>
-              <a:t>OVERVIEW</a:t>
-            </a:r>
-            <a:endParaRPr lang="en-US" sz="1200" dirty="0"/>
-          </a:p>
-        </p:txBody>
-      </p:sp>
-      <p:sp>
-        <p:nvSpPr>
-          <p:cNvPr id="5" name="node git push"/>
+              <a:t>HIGH/CRITICAL fails</a:t>
+            </a:r>
+            <a:endParaRPr lang="en-US" sz="1400" dirty="0"/>
+          </a:p>
+        </p:txBody>
+      </p:sp>
+      <p:sp>
+        <p:nvSpPr>
+          <p:cNvPr id="11" name="Shape 9"/>
           <p:cNvSpPr/>
           <p:nvPr/>
         </p:nvSpPr>
         <p:spPr>
           <a:xfrm>
-            <a:off x="548640" y="1463040"/>
+            <a:off x="7077456" y="1897380"/>
+            <a:ext cx="265176" cy="0"/>
+          </a:xfrm>
+          <a:prstGeom prst="line">
+            <a:avLst/>
+          </a:prstGeom>
+          <a:noFill/>
+          <a:ln w="19050">
+            <a:solidFill>
+              <a:schemeClr val="accent1"/>
+            </a:solidFill>
+            <a:prstDash val="solid"/>
+            <a:tailEnd type="triangle"/>
+          </a:ln>
+        </p:spPr>
+      </p:sp>
+      <p:sp>
+        <p:nvSpPr>
+          <p:cNvPr id="12" name="node GHCR"/>
+          <p:cNvSpPr/>
+          <p:nvPr/>
+        </p:nvSpPr>
+        <p:spPr>
+          <a:xfrm>
+            <a:off x="7379208" y="1463040"/>
             <a:ext cx="1938528" cy="868680"/>
           </a:xfrm>
           <a:prstGeom prst="roundRect">
@@ -6068,13 +6050,13 @@
       </p:sp>
       <p:sp>
         <p:nvSpPr>
-          <p:cNvPr id="6" name="Text 4"/>
-          <p:cNvSpPr txBox="1"/>
-          <p:nvPr/>
-        </p:nvSpPr>
-        <p:spPr>
-          <a:xfrm>
-            <a:off x="658368" y="1463040"/>
+          <p:cNvPr id="13" name="Text 11"/>
+          <p:cNvSpPr txBox="1"/>
+          <p:nvPr/>
+        </p:nvSpPr>
+        <p:spPr>
+          <a:xfrm>
+            <a:off x="7488936" y="1463040"/>
             <a:ext cx="1719072" cy="868680"/>
           </a:xfrm>
           <a:prstGeom prst="rect">
@@ -6096,7 +6078,7 @@
                   <a:schemeClr val="tx1"/>
                 </a:solidFill>
               </a:rPr>
-              <a:t>git push</a:t>
+              <a:t>GHCR</a:t>
             </a:r>
             <a:endParaRPr lang="en-US" sz="1400" dirty="0"/>
           </a:p>
@@ -6113,7 +6095,7 @@
                 <a:ea typeface="Courier New" pitchFamily="34" charset="-122"/>
                 <a:cs typeface="Courier New" pitchFamily="34" charset="-120"/>
               </a:rPr>
-              <a:t>branch: main</a:t>
+              <a:t>image:&lt;commit sha&gt;</a:t>
             </a:r>
             <a:endParaRPr lang="en-US" sz="1400" dirty="0"/>
           </a:p>
@@ -6121,13 +6103,13 @@
       </p:sp>
       <p:sp>
         <p:nvSpPr>
-          <p:cNvPr id="7" name="Shape 5"/>
+          <p:cNvPr id="14" name="Shape 12"/>
           <p:cNvSpPr/>
           <p:nvPr/>
         </p:nvSpPr>
         <p:spPr>
           <a:xfrm>
-            <a:off x="2523744" y="1897380"/>
+            <a:off x="9354312" y="1897380"/>
             <a:ext cx="265176" cy="0"/>
           </a:xfrm>
           <a:prstGeom prst="line">
@@ -6145,13 +6127,13 @@
       </p:sp>
       <p:sp>
         <p:nvSpPr>
-          <p:cNvPr id="8" name="node GitHub Actions"/>
+          <p:cNvPr id="15" name="node Helm + ArgoCD"/>
           <p:cNvSpPr/>
           <p:nvPr/>
         </p:nvSpPr>
         <p:spPr>
           <a:xfrm>
-            <a:off x="2825496" y="1463040"/>
+            <a:off x="9656064" y="1463040"/>
             <a:ext cx="1938528" cy="868680"/>
           </a:xfrm>
           <a:prstGeom prst="roundRect">
@@ -6172,13 +6154,13 @@
       </p:sp>
       <p:sp>
         <p:nvSpPr>
-          <p:cNvPr id="9" name="Text 7"/>
-          <p:cNvSpPr txBox="1"/>
-          <p:nvPr/>
-        </p:nvSpPr>
-        <p:spPr>
-          <a:xfrm>
-            <a:off x="2935224" y="1463040"/>
+          <p:cNvPr id="16" name="Text 14"/>
+          <p:cNvSpPr txBox="1"/>
+          <p:nvPr/>
+        </p:nvSpPr>
+        <p:spPr>
+          <a:xfrm>
+            <a:off x="9765792" y="1463040"/>
             <a:ext cx="1719072" cy="868680"/>
           </a:xfrm>
           <a:prstGeom prst="rect">
@@ -6200,7 +6182,7 @@
                   <a:schemeClr val="tx1"/>
                 </a:solidFill>
               </a:rPr>
-              <a:t>GitHub Actions</a:t>
+              <a:t>Helm + ArgoCD</a:t>
             </a:r>
             <a:endParaRPr lang="en-US" sz="1400" dirty="0"/>
           </a:p>
@@ -6217,7 +6199,7 @@
                 <a:ea typeface="Courier New" pitchFamily="34" charset="-122"/>
                 <a:cs typeface="Courier New" pitchFamily="34" charset="-120"/>
               </a:rPr>
-              <a:t>test, scan, build</a:t>
+              <a:t>upgrade --install</a:t>
             </a:r>
             <a:endParaRPr lang="en-US" sz="1400" dirty="0"/>
           </a:p>
@@ -6225,42 +6207,18 @@
       </p:sp>
       <p:sp>
         <p:nvSpPr>
-          <p:cNvPr id="10" name="Shape 8"/>
+          <p:cNvPr id="17" name="cluster"/>
           <p:cNvSpPr/>
           <p:nvPr/>
         </p:nvSpPr>
         <p:spPr>
           <a:xfrm>
-            <a:off x="4800600" y="1897380"/>
-            <a:ext cx="265176" cy="0"/>
-          </a:xfrm>
-          <a:prstGeom prst="line">
-            <a:avLst/>
-          </a:prstGeom>
-          <a:noFill/>
-          <a:ln w="19050">
-            <a:solidFill>
-              <a:schemeClr val="accent1"/>
-            </a:solidFill>
-            <a:prstDash val="solid"/>
-            <a:tailEnd type="triangle"/>
-          </a:ln>
-        </p:spPr>
-      </p:sp>
-      <p:sp>
-        <p:nvSpPr>
-          <p:cNvPr id="11" name="node Trivy gate"/>
-          <p:cNvSpPr/>
-          <p:nvPr/>
-        </p:nvSpPr>
-        <p:spPr>
-          <a:xfrm>
-            <a:off x="5102352" y="1463040"/>
-            <a:ext cx="1938528" cy="868680"/>
+            <a:off x="548640" y="2788920"/>
+            <a:ext cx="7955280" cy="3429000"/>
           </a:xfrm>
           <a:prstGeom prst="roundRect">
             <a:avLst>
-              <a:gd name="adj" fmla="val 10526"/>
+              <a:gd name="adj" fmla="val 2667"/>
             </a:avLst>
           </a:prstGeom>
           <a:solidFill>
@@ -6276,14 +6234,14 @@
       </p:sp>
       <p:sp>
         <p:nvSpPr>
-          <p:cNvPr id="12" name="Text 10"/>
-          <p:cNvSpPr txBox="1"/>
-          <p:nvPr/>
-        </p:nvSpPr>
-        <p:spPr>
-          <a:xfrm>
-            <a:off x="5212080" y="1463040"/>
-            <a:ext cx="1719072" cy="868680"/>
+          <p:cNvPr id="18" name="Text 16"/>
+          <p:cNvSpPr txBox="1"/>
+          <p:nvPr/>
+        </p:nvSpPr>
+        <p:spPr>
+          <a:xfrm>
+            <a:off x="777240" y="2926080"/>
+            <a:ext cx="5486400" cy="256032"/>
           </a:xfrm>
           <a:prstGeom prst="rect">
             <a:avLst/>
@@ -6294,20 +6252,6 @@
         <p:txBody>
           <a:bodyPr wrap="square" lIns="0" tIns="0" rIns="0" bIns="0" rtlCol="0" anchor="ctr"/>
           <a:lstStyle/>
-          <a:p>
-            <a:pPr indent="0" marL="0">
-              <a:buNone/>
-            </a:pPr>
-            <a:r>
-              <a:rPr lang="en-US" sz="1400" b="1" dirty="0">
-                <a:solidFill>
-                  <a:schemeClr val="tx1"/>
-                </a:solidFill>
-              </a:rPr>
-              <a:t>Trivy gate</a:t>
-            </a:r>
-            <a:endParaRPr lang="en-US" sz="1400" dirty="0"/>
-          </a:p>
           <a:p>
             <a:pPr indent="0" marL="0">
               <a:buNone/>
@@ -6321,50 +6265,26 @@
                 <a:ea typeface="Courier New" pitchFamily="34" charset="-122"/>
                 <a:cs typeface="Courier New" pitchFamily="34" charset="-120"/>
               </a:rPr>
-              <a:t>HIGH/CRITICAL fails</a:t>
-            </a:r>
-            <a:endParaRPr lang="en-US" sz="1400" dirty="0"/>
-          </a:p>
-        </p:txBody>
-      </p:sp>
-      <p:sp>
-        <p:nvSpPr>
-          <p:cNvPr id="13" name="Shape 11"/>
+              <a:t>kubernetes  /  namespace: expensepilot</a:t>
+            </a:r>
+            <a:endParaRPr lang="en-US" sz="1100" dirty="0"/>
+          </a:p>
+        </p:txBody>
+      </p:sp>
+      <p:sp>
+        <p:nvSpPr>
+          <p:cNvPr id="19" name="node Ingress"/>
           <p:cNvSpPr/>
           <p:nvPr/>
         </p:nvSpPr>
         <p:spPr>
           <a:xfrm>
-            <a:off x="7077456" y="1897380"/>
-            <a:ext cx="265176" cy="0"/>
-          </a:xfrm>
-          <a:prstGeom prst="line">
-            <a:avLst/>
-          </a:prstGeom>
-          <a:noFill/>
-          <a:ln w="19050">
-            <a:solidFill>
-              <a:schemeClr val="accent1"/>
-            </a:solidFill>
-            <a:prstDash val="solid"/>
-            <a:tailEnd type="triangle"/>
-          </a:ln>
-        </p:spPr>
-      </p:sp>
-      <p:sp>
-        <p:nvSpPr>
-          <p:cNvPr id="14" name="node GHCR"/>
-          <p:cNvSpPr/>
-          <p:nvPr/>
-        </p:nvSpPr>
-        <p:spPr>
-          <a:xfrm>
-            <a:off x="7379208" y="1463040"/>
-            <a:ext cx="1938528" cy="868680"/>
+            <a:off x="777240" y="3794760"/>
+            <a:ext cx="1828800" cy="914400"/>
           </a:xfrm>
           <a:prstGeom prst="roundRect">
             <a:avLst>
-              <a:gd name="adj" fmla="val 10526"/>
+              <a:gd name="adj" fmla="val 10000"/>
             </a:avLst>
           </a:prstGeom>
           <a:solidFill>
@@ -6380,14 +6300,14 @@
       </p:sp>
       <p:sp>
         <p:nvSpPr>
-          <p:cNvPr id="15" name="Text 13"/>
-          <p:cNvSpPr txBox="1"/>
-          <p:nvPr/>
-        </p:nvSpPr>
-        <p:spPr>
-          <a:xfrm>
-            <a:off x="7488936" y="1463040"/>
-            <a:ext cx="1719072" cy="868680"/>
+          <p:cNvPr id="20" name="Text 18"/>
+          <p:cNvSpPr txBox="1"/>
+          <p:nvPr/>
+        </p:nvSpPr>
+        <p:spPr>
+          <a:xfrm>
+            <a:off x="886968" y="3794760"/>
+            <a:ext cx="1609344" cy="914400"/>
           </a:xfrm>
           <a:prstGeom prst="rect">
             <a:avLst/>
@@ -6408,7 +6328,7 @@
                   <a:schemeClr val="tx1"/>
                 </a:solidFill>
               </a:rPr>
-              <a:t>GHCR</a:t>
+              <a:t>Ingress</a:t>
             </a:r>
             <a:endParaRPr lang="en-US" sz="1400" dirty="0"/>
           </a:p>
@@ -6425,7 +6345,7 @@
                 <a:ea typeface="Courier New" pitchFamily="34" charset="-122"/>
                 <a:cs typeface="Courier New" pitchFamily="34" charset="-120"/>
               </a:rPr>
-              <a:t>image:&lt;commit sha&gt;</a:t>
+              <a:t>expensepilot.local</a:t>
             </a:r>
             <a:endParaRPr lang="en-US" sz="1400" dirty="0"/>
           </a:p>
@@ -6433,42 +6353,18 @@
       </p:sp>
       <p:sp>
         <p:nvSpPr>
-          <p:cNvPr id="16" name="Shape 14"/>
+          <p:cNvPr id="21" name="node frontend x2"/>
           <p:cNvSpPr/>
           <p:nvPr/>
         </p:nvSpPr>
         <p:spPr>
           <a:xfrm>
-            <a:off x="9354312" y="1897380"/>
-            <a:ext cx="265176" cy="0"/>
-          </a:xfrm>
-          <a:prstGeom prst="line">
-            <a:avLst/>
-          </a:prstGeom>
-          <a:noFill/>
-          <a:ln w="19050">
-            <a:solidFill>
-              <a:schemeClr val="accent1"/>
-            </a:solidFill>
-            <a:prstDash val="solid"/>
-            <a:tailEnd type="triangle"/>
-          </a:ln>
-        </p:spPr>
-      </p:sp>
-      <p:sp>
-        <p:nvSpPr>
-          <p:cNvPr id="17" name="node Helm + ArgoCD"/>
-          <p:cNvSpPr/>
-          <p:nvPr/>
-        </p:nvSpPr>
-        <p:spPr>
-          <a:xfrm>
-            <a:off x="9656064" y="1463040"/>
-            <a:ext cx="1938528" cy="868680"/>
+            <a:off x="3246120" y="3291840"/>
+            <a:ext cx="2240280" cy="777240"/>
           </a:xfrm>
           <a:prstGeom prst="roundRect">
             <a:avLst>
-              <a:gd name="adj" fmla="val 10526"/>
+              <a:gd name="adj" fmla="val 11765"/>
             </a:avLst>
           </a:prstGeom>
           <a:solidFill>
@@ -6484,14 +6380,14 @@
       </p:sp>
       <p:sp>
         <p:nvSpPr>
-          <p:cNvPr id="18" name="Text 16"/>
-          <p:cNvSpPr txBox="1"/>
-          <p:nvPr/>
-        </p:nvSpPr>
-        <p:spPr>
-          <a:xfrm>
-            <a:off x="9765792" y="1463040"/>
-            <a:ext cx="1719072" cy="868680"/>
+          <p:cNvPr id="22" name="Text 20"/>
+          <p:cNvSpPr txBox="1"/>
+          <p:nvPr/>
+        </p:nvSpPr>
+        <p:spPr>
+          <a:xfrm>
+            <a:off x="3355848" y="3291840"/>
+            <a:ext cx="2020824" cy="777240"/>
           </a:xfrm>
           <a:prstGeom prst="rect">
             <a:avLst/>
@@ -6512,7 +6408,7 @@
                   <a:schemeClr val="tx1"/>
                 </a:solidFill>
               </a:rPr>
-              <a:t>Helm + ArgoCD</a:t>
+              <a:t>frontend x2</a:t>
             </a:r>
             <a:endParaRPr lang="en-US" sz="1400" dirty="0"/>
           </a:p>
@@ -6529,7 +6425,7 @@
                 <a:ea typeface="Courier New" pitchFamily="34" charset="-122"/>
                 <a:cs typeface="Courier New" pitchFamily="34" charset="-120"/>
               </a:rPr>
-              <a:t>upgrade --install</a:t>
+              <a:t>nginx :8080</a:t>
             </a:r>
             <a:endParaRPr lang="en-US" sz="1400" dirty="0"/>
           </a:p>
@@ -6537,18 +6433,560 @@
       </p:sp>
       <p:sp>
         <p:nvSpPr>
-          <p:cNvPr id="19" name="cluster"/>
+          <p:cNvPr id="23" name="node backend x2"/>
           <p:cNvSpPr/>
           <p:nvPr/>
         </p:nvSpPr>
         <p:spPr>
           <a:xfrm>
-            <a:off x="548640" y="2788920"/>
-            <a:ext cx="7955280" cy="3429000"/>
+            <a:off x="3246120" y="4297680"/>
+            <a:ext cx="2240280" cy="777240"/>
           </a:xfrm>
           <a:prstGeom prst="roundRect">
             <a:avLst>
-              <a:gd name="adj" fmla="val 2667"/>
+              <a:gd name="adj" fmla="val 11765"/>
+            </a:avLst>
+          </a:prstGeom>
+          <a:solidFill>
+            <a:schemeClr val="accent6"/>
+          </a:solidFill>
+          <a:ln w="12700">
+            <a:solidFill>
+              <a:schemeClr val="accent3"/>
+            </a:solidFill>
+            <a:prstDash val="solid"/>
+          </a:ln>
+        </p:spPr>
+      </p:sp>
+      <p:sp>
+        <p:nvSpPr>
+          <p:cNvPr id="24" name="Text 22"/>
+          <p:cNvSpPr txBox="1"/>
+          <p:nvPr/>
+        </p:nvSpPr>
+        <p:spPr>
+          <a:xfrm>
+            <a:off x="3355848" y="4297680"/>
+            <a:ext cx="2020824" cy="777240"/>
+          </a:xfrm>
+          <a:prstGeom prst="rect">
+            <a:avLst/>
+          </a:prstGeom>
+          <a:noFill/>
+          <a:ln/>
+        </p:spPr>
+        <p:txBody>
+          <a:bodyPr wrap="square" lIns="0" tIns="0" rIns="0" bIns="0" rtlCol="0" anchor="ctr"/>
+          <a:lstStyle/>
+          <a:p>
+            <a:pPr indent="0" marL="0">
+              <a:buNone/>
+            </a:pPr>
+            <a:r>
+              <a:rPr lang="en-US" sz="1400" b="1" dirty="0">
+                <a:solidFill>
+                  <a:schemeClr val="tx1"/>
+                </a:solidFill>
+              </a:rPr>
+              <a:t>backend x2</a:t>
+            </a:r>
+            <a:endParaRPr lang="en-US" sz="1400" dirty="0"/>
+          </a:p>
+          <a:p>
+            <a:pPr indent="0" marL="0">
+              <a:buNone/>
+            </a:pPr>
+            <a:r>
+              <a:rPr lang="en-US" sz="1100" dirty="0">
+                <a:solidFill>
+                  <a:schemeClr val="tx2"/>
+                </a:solidFill>
+                <a:latin typeface="Courier New" pitchFamily="34" charset="0"/>
+                <a:ea typeface="Courier New" pitchFamily="34" charset="-122"/>
+                <a:cs typeface="Courier New" pitchFamily="34" charset="-120"/>
+              </a:rPr>
+              <a:t>fastapi, HPA 2-6</a:t>
+            </a:r>
+            <a:endParaRPr lang="en-US" sz="1400" dirty="0"/>
+          </a:p>
+        </p:txBody>
+      </p:sp>
+      <p:sp>
+        <p:nvSpPr>
+          <p:cNvPr id="25" name="node postgres"/>
+          <p:cNvSpPr/>
+          <p:nvPr/>
+        </p:nvSpPr>
+        <p:spPr>
+          <a:xfrm>
+            <a:off x="6035040" y="4297680"/>
+            <a:ext cx="2240280" cy="777240"/>
+          </a:xfrm>
+          <a:prstGeom prst="roundRect">
+            <a:avLst>
+              <a:gd name="adj" fmla="val 11765"/>
+            </a:avLst>
+          </a:prstGeom>
+          <a:solidFill>
+            <a:schemeClr val="accent6"/>
+          </a:solidFill>
+          <a:ln w="12700">
+            <a:solidFill>
+              <a:schemeClr val="accent3"/>
+            </a:solidFill>
+            <a:prstDash val="solid"/>
+          </a:ln>
+        </p:spPr>
+      </p:sp>
+      <p:sp>
+        <p:nvSpPr>
+          <p:cNvPr id="26" name="Text 24"/>
+          <p:cNvSpPr txBox="1"/>
+          <p:nvPr/>
+        </p:nvSpPr>
+        <p:spPr>
+          <a:xfrm>
+            <a:off x="6144768" y="4297680"/>
+            <a:ext cx="2020824" cy="777240"/>
+          </a:xfrm>
+          <a:prstGeom prst="rect">
+            <a:avLst/>
+          </a:prstGeom>
+          <a:noFill/>
+          <a:ln/>
+        </p:spPr>
+        <p:txBody>
+          <a:bodyPr wrap="square" lIns="0" tIns="0" rIns="0" bIns="0" rtlCol="0" anchor="ctr"/>
+          <a:lstStyle/>
+          <a:p>
+            <a:pPr indent="0" marL="0">
+              <a:buNone/>
+            </a:pPr>
+            <a:r>
+              <a:rPr lang="en-US" sz="1400" b="1" dirty="0">
+                <a:solidFill>
+                  <a:schemeClr val="tx1"/>
+                </a:solidFill>
+              </a:rPr>
+              <a:t>postgres</a:t>
+            </a:r>
+            <a:endParaRPr lang="en-US" sz="1400" dirty="0"/>
+          </a:p>
+          <a:p>
+            <a:pPr indent="0" marL="0">
+              <a:buNone/>
+            </a:pPr>
+            <a:r>
+              <a:rPr lang="en-US" sz="1100" dirty="0">
+                <a:solidFill>
+                  <a:schemeClr val="tx2"/>
+                </a:solidFill>
+                <a:latin typeface="Courier New" pitchFamily="34" charset="0"/>
+                <a:ea typeface="Courier New" pitchFamily="34" charset="-122"/>
+                <a:cs typeface="Courier New" pitchFamily="34" charset="-120"/>
+              </a:rPr>
+              <a:t>PVC 5Gi</a:t>
+            </a:r>
+            <a:endParaRPr lang="en-US" sz="1400" dirty="0"/>
+          </a:p>
+        </p:txBody>
+      </p:sp>
+      <p:sp>
+        <p:nvSpPr>
+          <p:cNvPr id="27" name="node Prometheus"/>
+          <p:cNvSpPr/>
+          <p:nvPr/>
+        </p:nvSpPr>
+        <p:spPr>
+          <a:xfrm>
+            <a:off x="3246120" y="5303520"/>
+            <a:ext cx="2240280" cy="777240"/>
+          </a:xfrm>
+          <a:prstGeom prst="roundRect">
+            <a:avLst>
+              <a:gd name="adj" fmla="val 11765"/>
+            </a:avLst>
+          </a:prstGeom>
+          <a:solidFill>
+            <a:schemeClr val="accent6"/>
+          </a:solidFill>
+          <a:ln w="12700">
+            <a:solidFill>
+              <a:schemeClr val="accent3"/>
+            </a:solidFill>
+            <a:prstDash val="solid"/>
+          </a:ln>
+        </p:spPr>
+      </p:sp>
+      <p:sp>
+        <p:nvSpPr>
+          <p:cNvPr id="28" name="Text 26"/>
+          <p:cNvSpPr txBox="1"/>
+          <p:nvPr/>
+        </p:nvSpPr>
+        <p:spPr>
+          <a:xfrm>
+            <a:off x="3355848" y="5303520"/>
+            <a:ext cx="2020824" cy="777240"/>
+          </a:xfrm>
+          <a:prstGeom prst="rect">
+            <a:avLst/>
+          </a:prstGeom>
+          <a:noFill/>
+          <a:ln/>
+        </p:spPr>
+        <p:txBody>
+          <a:bodyPr wrap="square" lIns="0" tIns="0" rIns="0" bIns="0" rtlCol="0" anchor="ctr"/>
+          <a:lstStyle/>
+          <a:p>
+            <a:pPr indent="0" marL="0">
+              <a:buNone/>
+            </a:pPr>
+            <a:r>
+              <a:rPr lang="en-US" sz="1400" b="1" dirty="0">
+                <a:solidFill>
+                  <a:schemeClr val="tx1"/>
+                </a:solidFill>
+              </a:rPr>
+              <a:t>Prometheus</a:t>
+            </a:r>
+            <a:endParaRPr lang="en-US" sz="1400" dirty="0"/>
+          </a:p>
+          <a:p>
+            <a:pPr indent="0" marL="0">
+              <a:buNone/>
+            </a:pPr>
+            <a:r>
+              <a:rPr lang="en-US" sz="1100" dirty="0">
+                <a:solidFill>
+                  <a:schemeClr val="tx2"/>
+                </a:solidFill>
+                <a:latin typeface="Courier New" pitchFamily="34" charset="0"/>
+                <a:ea typeface="Courier New" pitchFamily="34" charset="-122"/>
+                <a:cs typeface="Courier New" pitchFamily="34" charset="-120"/>
+              </a:rPr>
+              <a:t>scrapes /metrics</a:t>
+            </a:r>
+            <a:endParaRPr lang="en-US" sz="1400" dirty="0"/>
+          </a:p>
+        </p:txBody>
+      </p:sp>
+      <p:sp>
+        <p:nvSpPr>
+          <p:cNvPr id="29" name="node Grafana"/>
+          <p:cNvSpPr/>
+          <p:nvPr/>
+        </p:nvSpPr>
+        <p:spPr>
+          <a:xfrm>
+            <a:off x="6035040" y="5303520"/>
+            <a:ext cx="2240280" cy="777240"/>
+          </a:xfrm>
+          <a:prstGeom prst="roundRect">
+            <a:avLst>
+              <a:gd name="adj" fmla="val 11765"/>
+            </a:avLst>
+          </a:prstGeom>
+          <a:solidFill>
+            <a:schemeClr val="accent6"/>
+          </a:solidFill>
+          <a:ln w="12700">
+            <a:solidFill>
+              <a:schemeClr val="accent3"/>
+            </a:solidFill>
+            <a:prstDash val="solid"/>
+          </a:ln>
+        </p:spPr>
+      </p:sp>
+      <p:sp>
+        <p:nvSpPr>
+          <p:cNvPr id="30" name="Text 28"/>
+          <p:cNvSpPr txBox="1"/>
+          <p:nvPr/>
+        </p:nvSpPr>
+        <p:spPr>
+          <a:xfrm>
+            <a:off x="6144768" y="5303520"/>
+            <a:ext cx="2020824" cy="777240"/>
+          </a:xfrm>
+          <a:prstGeom prst="rect">
+            <a:avLst/>
+          </a:prstGeom>
+          <a:noFill/>
+          <a:ln/>
+        </p:spPr>
+        <p:txBody>
+          <a:bodyPr wrap="square" lIns="0" tIns="0" rIns="0" bIns="0" rtlCol="0" anchor="ctr"/>
+          <a:lstStyle/>
+          <a:p>
+            <a:pPr indent="0" marL="0">
+              <a:buNone/>
+            </a:pPr>
+            <a:r>
+              <a:rPr lang="en-US" sz="1400" b="1" dirty="0">
+                <a:solidFill>
+                  <a:schemeClr val="tx1"/>
+                </a:solidFill>
+              </a:rPr>
+              <a:t>Grafana</a:t>
+            </a:r>
+            <a:endParaRPr lang="en-US" sz="1400" dirty="0"/>
+          </a:p>
+          <a:p>
+            <a:pPr indent="0" marL="0">
+              <a:buNone/>
+            </a:pPr>
+            <a:r>
+              <a:rPr lang="en-US" sz="1100" dirty="0">
+                <a:solidFill>
+                  <a:schemeClr val="tx2"/>
+                </a:solidFill>
+                <a:latin typeface="Courier New" pitchFamily="34" charset="0"/>
+                <a:ea typeface="Courier New" pitchFamily="34" charset="-122"/>
+                <a:cs typeface="Courier New" pitchFamily="34" charset="-120"/>
+              </a:rPr>
+              <a:t>dashboard + alerts</a:t>
+            </a:r>
+            <a:endParaRPr lang="en-US" sz="1400" dirty="0"/>
+          </a:p>
+        </p:txBody>
+      </p:sp>
+      <p:sp>
+        <p:nvSpPr>
+          <p:cNvPr id="31" name="Shape 29"/>
+          <p:cNvSpPr/>
+          <p:nvPr/>
+        </p:nvSpPr>
+        <p:spPr>
+          <a:xfrm flipV="1">
+            <a:off x="2642616" y="3685032"/>
+            <a:ext cx="566928" cy="384048"/>
+          </a:xfrm>
+          <a:prstGeom prst="line">
+            <a:avLst/>
+          </a:prstGeom>
+          <a:noFill/>
+          <a:ln w="19050">
+            <a:solidFill>
+              <a:schemeClr val="accent1"/>
+            </a:solidFill>
+            <a:prstDash val="solid"/>
+            <a:tailEnd type="triangle"/>
+          </a:ln>
+        </p:spPr>
+      </p:sp>
+      <p:sp>
+        <p:nvSpPr>
+          <p:cNvPr id="32" name="Shape 30"/>
+          <p:cNvSpPr/>
+          <p:nvPr/>
+        </p:nvSpPr>
+        <p:spPr>
+          <a:xfrm>
+            <a:off x="2642616" y="4434840"/>
+            <a:ext cx="566928" cy="246888"/>
+          </a:xfrm>
+          <a:prstGeom prst="line">
+            <a:avLst/>
+          </a:prstGeom>
+          <a:noFill/>
+          <a:ln w="19050">
+            <a:solidFill>
+              <a:schemeClr val="accent1"/>
+            </a:solidFill>
+            <a:prstDash val="solid"/>
+            <a:tailEnd type="triangle"/>
+          </a:ln>
+        </p:spPr>
+      </p:sp>
+      <p:sp>
+        <p:nvSpPr>
+          <p:cNvPr id="33" name="Text 31"/>
+          <p:cNvSpPr txBox="1"/>
+          <p:nvPr/>
+        </p:nvSpPr>
+        <p:spPr>
+          <a:xfrm>
+            <a:off x="2697480" y="3364992"/>
+            <a:ext cx="365760" cy="256032"/>
+          </a:xfrm>
+          <a:prstGeom prst="rect">
+            <a:avLst/>
+          </a:prstGeom>
+          <a:noFill/>
+          <a:ln/>
+        </p:spPr>
+        <p:txBody>
+          <a:bodyPr wrap="square" lIns="0" tIns="0" rIns="0" bIns="0" rtlCol="0" anchor="ctr"/>
+          <a:lstStyle/>
+          <a:p>
+            <a:pPr indent="0" marL="0">
+              <a:buNone/>
+            </a:pPr>
+            <a:r>
+              <a:rPr lang="en-US" sz="1200" b="1" dirty="0">
+                <a:solidFill>
+                  <a:schemeClr val="accent1"/>
+                </a:solidFill>
+                <a:latin typeface="Courier New" pitchFamily="34" charset="0"/>
+                <a:ea typeface="Courier New" pitchFamily="34" charset="-122"/>
+                <a:cs typeface="Courier New" pitchFamily="34" charset="-120"/>
+              </a:rPr>
+              <a:t>/</a:t>
+            </a:r>
+            <a:endParaRPr lang="en-US" sz="1200" dirty="0"/>
+          </a:p>
+        </p:txBody>
+      </p:sp>
+      <p:sp>
+        <p:nvSpPr>
+          <p:cNvPr id="34" name="Text 32"/>
+          <p:cNvSpPr txBox="1"/>
+          <p:nvPr/>
+        </p:nvSpPr>
+        <p:spPr>
+          <a:xfrm>
+            <a:off x="2670048" y="4681728"/>
+            <a:ext cx="548640" cy="256032"/>
+          </a:xfrm>
+          <a:prstGeom prst="rect">
+            <a:avLst/>
+          </a:prstGeom>
+          <a:noFill/>
+          <a:ln/>
+        </p:spPr>
+        <p:txBody>
+          <a:bodyPr wrap="square" lIns="0" tIns="0" rIns="0" bIns="0" rtlCol="0" anchor="ctr"/>
+          <a:lstStyle/>
+          <a:p>
+            <a:pPr indent="0" marL="0">
+              <a:buNone/>
+            </a:pPr>
+            <a:r>
+              <a:rPr lang="en-US" sz="1200" b="1" dirty="0">
+                <a:solidFill>
+                  <a:schemeClr val="accent1"/>
+                </a:solidFill>
+                <a:latin typeface="Courier New" pitchFamily="34" charset="0"/>
+                <a:ea typeface="Courier New" pitchFamily="34" charset="-122"/>
+                <a:cs typeface="Courier New" pitchFamily="34" charset="-120"/>
+              </a:rPr>
+              <a:t>/api</a:t>
+            </a:r>
+            <a:endParaRPr lang="en-US" sz="1200" dirty="0"/>
+          </a:p>
+        </p:txBody>
+      </p:sp>
+      <p:sp>
+        <p:nvSpPr>
+          <p:cNvPr id="35" name="Shape 33"/>
+          <p:cNvSpPr/>
+          <p:nvPr/>
+        </p:nvSpPr>
+        <p:spPr>
+          <a:xfrm>
+            <a:off x="5522976" y="4681728"/>
+            <a:ext cx="475488" cy="0"/>
+          </a:xfrm>
+          <a:prstGeom prst="line">
+            <a:avLst/>
+          </a:prstGeom>
+          <a:noFill/>
+          <a:ln w="19050">
+            <a:solidFill>
+              <a:schemeClr val="accent1"/>
+            </a:solidFill>
+            <a:prstDash val="solid"/>
+            <a:tailEnd type="triangle"/>
+          </a:ln>
+        </p:spPr>
+      </p:sp>
+      <p:sp>
+        <p:nvSpPr>
+          <p:cNvPr id="36" name="Shape 34"/>
+          <p:cNvSpPr/>
+          <p:nvPr/>
+        </p:nvSpPr>
+        <p:spPr>
+          <a:xfrm flipV="1">
+            <a:off x="4366260" y="5102352"/>
+            <a:ext cx="0" cy="182880"/>
+          </a:xfrm>
+          <a:prstGeom prst="line">
+            <a:avLst/>
+          </a:prstGeom>
+          <a:noFill/>
+          <a:ln w="19050">
+            <a:solidFill>
+              <a:schemeClr val="accent1"/>
+            </a:solidFill>
+            <a:prstDash val="solid"/>
+            <a:tailEnd type="triangle"/>
+          </a:ln>
+        </p:spPr>
+      </p:sp>
+      <p:sp>
+        <p:nvSpPr>
+          <p:cNvPr id="37" name="Shape 35"/>
+          <p:cNvSpPr/>
+          <p:nvPr/>
+        </p:nvSpPr>
+        <p:spPr>
+          <a:xfrm>
+            <a:off x="5522976" y="5687568"/>
+            <a:ext cx="475488" cy="0"/>
+          </a:xfrm>
+          <a:prstGeom prst="line">
+            <a:avLst/>
+          </a:prstGeom>
+          <a:noFill/>
+          <a:ln w="19050">
+            <a:solidFill>
+              <a:schemeClr val="accent1"/>
+            </a:solidFill>
+            <a:prstDash val="solid"/>
+            <a:tailEnd type="triangle"/>
+          </a:ln>
+        </p:spPr>
+      </p:sp>
+      <p:sp>
+        <p:nvSpPr>
+          <p:cNvPr id="38" name="Shape 36"/>
+          <p:cNvSpPr/>
+          <p:nvPr/>
+        </p:nvSpPr>
+        <p:spPr>
+          <a:xfrm flipH="1">
+            <a:off x="8549640" y="2359152"/>
+            <a:ext cx="1417320" cy="411480"/>
+          </a:xfrm>
+          <a:prstGeom prst="line">
+            <a:avLst/>
+          </a:prstGeom>
+          <a:noFill/>
+          <a:ln w="19050">
+            <a:solidFill>
+              <a:schemeClr val="accent1"/>
+            </a:solidFill>
+            <a:prstDash val="solid"/>
+            <a:tailEnd type="triangle"/>
+          </a:ln>
+        </p:spPr>
+      </p:sp>
+      <p:sp>
+        <p:nvSpPr>
+          <p:cNvPr id="39" name="aws"/>
+          <p:cNvSpPr/>
+          <p:nvPr/>
+        </p:nvSpPr>
+        <p:spPr>
+          <a:xfrm>
+            <a:off x="8869680" y="2788920"/>
+            <a:ext cx="2770632" cy="3429000"/>
+          </a:xfrm>
+          <a:prstGeom prst="roundRect">
+            <a:avLst>
+              <a:gd name="adj" fmla="val 3300"/>
             </a:avLst>
           </a:prstGeom>
           <a:solidFill>
@@ -6564,14 +7002,14 @@
       </p:sp>
       <p:sp>
         <p:nvSpPr>
-          <p:cNvPr id="20" name="Text 18"/>
-          <p:cNvSpPr txBox="1"/>
-          <p:nvPr/>
-        </p:nvSpPr>
-        <p:spPr>
-          <a:xfrm>
-            <a:off x="777240" y="2926080"/>
-            <a:ext cx="5486400" cy="256032"/>
+          <p:cNvPr id="40" name="Text 38"/>
+          <p:cNvSpPr txBox="1"/>
+          <p:nvPr/>
+        </p:nvSpPr>
+        <p:spPr>
+          <a:xfrm>
+            <a:off x="9098280" y="2926080"/>
+            <a:ext cx="2377440" cy="256032"/>
           </a:xfrm>
           <a:prstGeom prst="rect">
             <a:avLst/>
@@ -6595,7 +7033,7 @@
                 <a:ea typeface="Courier New" pitchFamily="34" charset="-122"/>
                 <a:cs typeface="Courier New" pitchFamily="34" charset="-120"/>
               </a:rPr>
-              <a:t>kubernetes  /  namespace: expensepilot</a:t>
+              <a:t>aws  /  ap-south-1</a:t>
             </a:r>
             <a:endParaRPr lang="en-US" sz="1100" dirty="0"/>
           </a:p>
@@ -6603,775 +7041,7 @@
       </p:sp>
       <p:sp>
         <p:nvSpPr>
-          <p:cNvPr id="21" name="node Ingress"/>
-          <p:cNvSpPr/>
-          <p:nvPr/>
-        </p:nvSpPr>
-        <p:spPr>
-          <a:xfrm>
-            <a:off x="777240" y="3794760"/>
-            <a:ext cx="1828800" cy="914400"/>
-          </a:xfrm>
-          <a:prstGeom prst="roundRect">
-            <a:avLst>
-              <a:gd name="adj" fmla="val 10000"/>
-            </a:avLst>
-          </a:prstGeom>
-          <a:solidFill>
-            <a:schemeClr val="accent6"/>
-          </a:solidFill>
-          <a:ln w="12700">
-            <a:solidFill>
-              <a:schemeClr val="accent3"/>
-            </a:solidFill>
-            <a:prstDash val="solid"/>
-          </a:ln>
-        </p:spPr>
-      </p:sp>
-      <p:sp>
-        <p:nvSpPr>
-          <p:cNvPr id="22" name="Text 20"/>
-          <p:cNvSpPr txBox="1"/>
-          <p:nvPr/>
-        </p:nvSpPr>
-        <p:spPr>
-          <a:xfrm>
-            <a:off x="886968" y="3794760"/>
-            <a:ext cx="1609344" cy="914400"/>
-          </a:xfrm>
-          <a:prstGeom prst="rect">
-            <a:avLst/>
-          </a:prstGeom>
-          <a:noFill/>
-          <a:ln/>
-        </p:spPr>
-        <p:txBody>
-          <a:bodyPr wrap="square" lIns="0" tIns="0" rIns="0" bIns="0" rtlCol="0" anchor="ctr"/>
-          <a:lstStyle/>
-          <a:p>
-            <a:pPr indent="0" marL="0">
-              <a:buNone/>
-            </a:pPr>
-            <a:r>
-              <a:rPr lang="en-US" sz="1400" b="1" dirty="0">
-                <a:solidFill>
-                  <a:schemeClr val="tx1"/>
-                </a:solidFill>
-              </a:rPr>
-              <a:t>Ingress</a:t>
-            </a:r>
-            <a:endParaRPr lang="en-US" sz="1400" dirty="0"/>
-          </a:p>
-          <a:p>
-            <a:pPr indent="0" marL="0">
-              <a:buNone/>
-            </a:pPr>
-            <a:r>
-              <a:rPr lang="en-US" sz="1100" dirty="0">
-                <a:solidFill>
-                  <a:schemeClr val="tx2"/>
-                </a:solidFill>
-                <a:latin typeface="Courier New" pitchFamily="34" charset="0"/>
-                <a:ea typeface="Courier New" pitchFamily="34" charset="-122"/>
-                <a:cs typeface="Courier New" pitchFamily="34" charset="-120"/>
-              </a:rPr>
-              <a:t>expensepilot.local</a:t>
-            </a:r>
-            <a:endParaRPr lang="en-US" sz="1400" dirty="0"/>
-          </a:p>
-        </p:txBody>
-      </p:sp>
-      <p:sp>
-        <p:nvSpPr>
-          <p:cNvPr id="23" name="node frontend x2"/>
-          <p:cNvSpPr/>
-          <p:nvPr/>
-        </p:nvSpPr>
-        <p:spPr>
-          <a:xfrm>
-            <a:off x="3246120" y="3291840"/>
-            <a:ext cx="2240280" cy="777240"/>
-          </a:xfrm>
-          <a:prstGeom prst="roundRect">
-            <a:avLst>
-              <a:gd name="adj" fmla="val 11765"/>
-            </a:avLst>
-          </a:prstGeom>
-          <a:solidFill>
-            <a:schemeClr val="accent6"/>
-          </a:solidFill>
-          <a:ln w="12700">
-            <a:solidFill>
-              <a:schemeClr val="accent3"/>
-            </a:solidFill>
-            <a:prstDash val="solid"/>
-          </a:ln>
-        </p:spPr>
-      </p:sp>
-      <p:sp>
-        <p:nvSpPr>
-          <p:cNvPr id="24" name="Text 22"/>
-          <p:cNvSpPr txBox="1"/>
-          <p:nvPr/>
-        </p:nvSpPr>
-        <p:spPr>
-          <a:xfrm>
-            <a:off x="3355848" y="3291840"/>
-            <a:ext cx="2020824" cy="777240"/>
-          </a:xfrm>
-          <a:prstGeom prst="rect">
-            <a:avLst/>
-          </a:prstGeom>
-          <a:noFill/>
-          <a:ln/>
-        </p:spPr>
-        <p:txBody>
-          <a:bodyPr wrap="square" lIns="0" tIns="0" rIns="0" bIns="0" rtlCol="0" anchor="ctr"/>
-          <a:lstStyle/>
-          <a:p>
-            <a:pPr indent="0" marL="0">
-              <a:buNone/>
-            </a:pPr>
-            <a:r>
-              <a:rPr lang="en-US" sz="1400" b="1" dirty="0">
-                <a:solidFill>
-                  <a:schemeClr val="tx1"/>
-                </a:solidFill>
-              </a:rPr>
-              <a:t>frontend x2</a:t>
-            </a:r>
-            <a:endParaRPr lang="en-US" sz="1400" dirty="0"/>
-          </a:p>
-          <a:p>
-            <a:pPr indent="0" marL="0">
-              <a:buNone/>
-            </a:pPr>
-            <a:r>
-              <a:rPr lang="en-US" sz="1100" dirty="0">
-                <a:solidFill>
-                  <a:schemeClr val="tx2"/>
-                </a:solidFill>
-                <a:latin typeface="Courier New" pitchFamily="34" charset="0"/>
-                <a:ea typeface="Courier New" pitchFamily="34" charset="-122"/>
-                <a:cs typeface="Courier New" pitchFamily="34" charset="-120"/>
-              </a:rPr>
-              <a:t>nginx :8080</a:t>
-            </a:r>
-            <a:endParaRPr lang="en-US" sz="1400" dirty="0"/>
-          </a:p>
-        </p:txBody>
-      </p:sp>
-      <p:sp>
-        <p:nvSpPr>
-          <p:cNvPr id="25" name="node backend x2"/>
-          <p:cNvSpPr/>
-          <p:nvPr/>
-        </p:nvSpPr>
-        <p:spPr>
-          <a:xfrm>
-            <a:off x="3246120" y="4297680"/>
-            <a:ext cx="2240280" cy="777240"/>
-          </a:xfrm>
-          <a:prstGeom prst="roundRect">
-            <a:avLst>
-              <a:gd name="adj" fmla="val 11765"/>
-            </a:avLst>
-          </a:prstGeom>
-          <a:solidFill>
-            <a:schemeClr val="accent6"/>
-          </a:solidFill>
-          <a:ln w="12700">
-            <a:solidFill>
-              <a:schemeClr val="accent3"/>
-            </a:solidFill>
-            <a:prstDash val="solid"/>
-          </a:ln>
-        </p:spPr>
-      </p:sp>
-      <p:sp>
-        <p:nvSpPr>
-          <p:cNvPr id="26" name="Text 24"/>
-          <p:cNvSpPr txBox="1"/>
-          <p:nvPr/>
-        </p:nvSpPr>
-        <p:spPr>
-          <a:xfrm>
-            <a:off x="3355848" y="4297680"/>
-            <a:ext cx="2020824" cy="777240"/>
-          </a:xfrm>
-          <a:prstGeom prst="rect">
-            <a:avLst/>
-          </a:prstGeom>
-          <a:noFill/>
-          <a:ln/>
-        </p:spPr>
-        <p:txBody>
-          <a:bodyPr wrap="square" lIns="0" tIns="0" rIns="0" bIns="0" rtlCol="0" anchor="ctr"/>
-          <a:lstStyle/>
-          <a:p>
-            <a:pPr indent="0" marL="0">
-              <a:buNone/>
-            </a:pPr>
-            <a:r>
-              <a:rPr lang="en-US" sz="1400" b="1" dirty="0">
-                <a:solidFill>
-                  <a:schemeClr val="tx1"/>
-                </a:solidFill>
-              </a:rPr>
-              <a:t>backend x2</a:t>
-            </a:r>
-            <a:endParaRPr lang="en-US" sz="1400" dirty="0"/>
-          </a:p>
-          <a:p>
-            <a:pPr indent="0" marL="0">
-              <a:buNone/>
-            </a:pPr>
-            <a:r>
-              <a:rPr lang="en-US" sz="1100" dirty="0">
-                <a:solidFill>
-                  <a:schemeClr val="tx2"/>
-                </a:solidFill>
-                <a:latin typeface="Courier New" pitchFamily="34" charset="0"/>
-                <a:ea typeface="Courier New" pitchFamily="34" charset="-122"/>
-                <a:cs typeface="Courier New" pitchFamily="34" charset="-120"/>
-              </a:rPr>
-              <a:t>fastapi, HPA 2-6</a:t>
-            </a:r>
-            <a:endParaRPr lang="en-US" sz="1400" dirty="0"/>
-          </a:p>
-        </p:txBody>
-      </p:sp>
-      <p:sp>
-        <p:nvSpPr>
-          <p:cNvPr id="27" name="node postgres"/>
-          <p:cNvSpPr/>
-          <p:nvPr/>
-        </p:nvSpPr>
-        <p:spPr>
-          <a:xfrm>
-            <a:off x="6035040" y="4297680"/>
-            <a:ext cx="2240280" cy="777240"/>
-          </a:xfrm>
-          <a:prstGeom prst="roundRect">
-            <a:avLst>
-              <a:gd name="adj" fmla="val 11765"/>
-            </a:avLst>
-          </a:prstGeom>
-          <a:solidFill>
-            <a:schemeClr val="accent6"/>
-          </a:solidFill>
-          <a:ln w="12700">
-            <a:solidFill>
-              <a:schemeClr val="accent3"/>
-            </a:solidFill>
-            <a:prstDash val="solid"/>
-          </a:ln>
-        </p:spPr>
-      </p:sp>
-      <p:sp>
-        <p:nvSpPr>
-          <p:cNvPr id="28" name="Text 26"/>
-          <p:cNvSpPr txBox="1"/>
-          <p:nvPr/>
-        </p:nvSpPr>
-        <p:spPr>
-          <a:xfrm>
-            <a:off x="6144768" y="4297680"/>
-            <a:ext cx="2020824" cy="777240"/>
-          </a:xfrm>
-          <a:prstGeom prst="rect">
-            <a:avLst/>
-          </a:prstGeom>
-          <a:noFill/>
-          <a:ln/>
-        </p:spPr>
-        <p:txBody>
-          <a:bodyPr wrap="square" lIns="0" tIns="0" rIns="0" bIns="0" rtlCol="0" anchor="ctr"/>
-          <a:lstStyle/>
-          <a:p>
-            <a:pPr indent="0" marL="0">
-              <a:buNone/>
-            </a:pPr>
-            <a:r>
-              <a:rPr lang="en-US" sz="1400" b="1" dirty="0">
-                <a:solidFill>
-                  <a:schemeClr val="tx1"/>
-                </a:solidFill>
-              </a:rPr>
-              <a:t>postgres</a:t>
-            </a:r>
-            <a:endParaRPr lang="en-US" sz="1400" dirty="0"/>
-          </a:p>
-          <a:p>
-            <a:pPr indent="0" marL="0">
-              <a:buNone/>
-            </a:pPr>
-            <a:r>
-              <a:rPr lang="en-US" sz="1100" dirty="0">
-                <a:solidFill>
-                  <a:schemeClr val="tx2"/>
-                </a:solidFill>
-                <a:latin typeface="Courier New" pitchFamily="34" charset="0"/>
-                <a:ea typeface="Courier New" pitchFamily="34" charset="-122"/>
-                <a:cs typeface="Courier New" pitchFamily="34" charset="-120"/>
-              </a:rPr>
-              <a:t>PVC 5Gi</a:t>
-            </a:r>
-            <a:endParaRPr lang="en-US" sz="1400" dirty="0"/>
-          </a:p>
-        </p:txBody>
-      </p:sp>
-      <p:sp>
-        <p:nvSpPr>
-          <p:cNvPr id="29" name="node Prometheus"/>
-          <p:cNvSpPr/>
-          <p:nvPr/>
-        </p:nvSpPr>
-        <p:spPr>
-          <a:xfrm>
-            <a:off x="3246120" y="5303520"/>
-            <a:ext cx="2240280" cy="777240"/>
-          </a:xfrm>
-          <a:prstGeom prst="roundRect">
-            <a:avLst>
-              <a:gd name="adj" fmla="val 11765"/>
-            </a:avLst>
-          </a:prstGeom>
-          <a:solidFill>
-            <a:schemeClr val="accent6"/>
-          </a:solidFill>
-          <a:ln w="12700">
-            <a:solidFill>
-              <a:schemeClr val="accent3"/>
-            </a:solidFill>
-            <a:prstDash val="solid"/>
-          </a:ln>
-        </p:spPr>
-      </p:sp>
-      <p:sp>
-        <p:nvSpPr>
-          <p:cNvPr id="30" name="Text 28"/>
-          <p:cNvSpPr txBox="1"/>
-          <p:nvPr/>
-        </p:nvSpPr>
-        <p:spPr>
-          <a:xfrm>
-            <a:off x="3355848" y="5303520"/>
-            <a:ext cx="2020824" cy="777240"/>
-          </a:xfrm>
-          <a:prstGeom prst="rect">
-            <a:avLst/>
-          </a:prstGeom>
-          <a:noFill/>
-          <a:ln/>
-        </p:spPr>
-        <p:txBody>
-          <a:bodyPr wrap="square" lIns="0" tIns="0" rIns="0" bIns="0" rtlCol="0" anchor="ctr"/>
-          <a:lstStyle/>
-          <a:p>
-            <a:pPr indent="0" marL="0">
-              <a:buNone/>
-            </a:pPr>
-            <a:r>
-              <a:rPr lang="en-US" sz="1400" b="1" dirty="0">
-                <a:solidFill>
-                  <a:schemeClr val="tx1"/>
-                </a:solidFill>
-              </a:rPr>
-              <a:t>Prometheus</a:t>
-            </a:r>
-            <a:endParaRPr lang="en-US" sz="1400" dirty="0"/>
-          </a:p>
-          <a:p>
-            <a:pPr indent="0" marL="0">
-              <a:buNone/>
-            </a:pPr>
-            <a:r>
-              <a:rPr lang="en-US" sz="1100" dirty="0">
-                <a:solidFill>
-                  <a:schemeClr val="tx2"/>
-                </a:solidFill>
-                <a:latin typeface="Courier New" pitchFamily="34" charset="0"/>
-                <a:ea typeface="Courier New" pitchFamily="34" charset="-122"/>
-                <a:cs typeface="Courier New" pitchFamily="34" charset="-120"/>
-              </a:rPr>
-              <a:t>scrapes /metrics</a:t>
-            </a:r>
-            <a:endParaRPr lang="en-US" sz="1400" dirty="0"/>
-          </a:p>
-        </p:txBody>
-      </p:sp>
-      <p:sp>
-        <p:nvSpPr>
-          <p:cNvPr id="31" name="node Grafana"/>
-          <p:cNvSpPr/>
-          <p:nvPr/>
-        </p:nvSpPr>
-        <p:spPr>
-          <a:xfrm>
-            <a:off x="6035040" y="5303520"/>
-            <a:ext cx="2240280" cy="777240"/>
-          </a:xfrm>
-          <a:prstGeom prst="roundRect">
-            <a:avLst>
-              <a:gd name="adj" fmla="val 11765"/>
-            </a:avLst>
-          </a:prstGeom>
-          <a:solidFill>
-            <a:schemeClr val="accent6"/>
-          </a:solidFill>
-          <a:ln w="12700">
-            <a:solidFill>
-              <a:schemeClr val="accent3"/>
-            </a:solidFill>
-            <a:prstDash val="solid"/>
-          </a:ln>
-        </p:spPr>
-      </p:sp>
-      <p:sp>
-        <p:nvSpPr>
-          <p:cNvPr id="32" name="Text 30"/>
-          <p:cNvSpPr txBox="1"/>
-          <p:nvPr/>
-        </p:nvSpPr>
-        <p:spPr>
-          <a:xfrm>
-            <a:off x="6144768" y="5303520"/>
-            <a:ext cx="2020824" cy="777240"/>
-          </a:xfrm>
-          <a:prstGeom prst="rect">
-            <a:avLst/>
-          </a:prstGeom>
-          <a:noFill/>
-          <a:ln/>
-        </p:spPr>
-        <p:txBody>
-          <a:bodyPr wrap="square" lIns="0" tIns="0" rIns="0" bIns="0" rtlCol="0" anchor="ctr"/>
-          <a:lstStyle/>
-          <a:p>
-            <a:pPr indent="0" marL="0">
-              <a:buNone/>
-            </a:pPr>
-            <a:r>
-              <a:rPr lang="en-US" sz="1400" b="1" dirty="0">
-                <a:solidFill>
-                  <a:schemeClr val="tx1"/>
-                </a:solidFill>
-              </a:rPr>
-              <a:t>Grafana</a:t>
-            </a:r>
-            <a:endParaRPr lang="en-US" sz="1400" dirty="0"/>
-          </a:p>
-          <a:p>
-            <a:pPr indent="0" marL="0">
-              <a:buNone/>
-            </a:pPr>
-            <a:r>
-              <a:rPr lang="en-US" sz="1100" dirty="0">
-                <a:solidFill>
-                  <a:schemeClr val="tx2"/>
-                </a:solidFill>
-                <a:latin typeface="Courier New" pitchFamily="34" charset="0"/>
-                <a:ea typeface="Courier New" pitchFamily="34" charset="-122"/>
-                <a:cs typeface="Courier New" pitchFamily="34" charset="-120"/>
-              </a:rPr>
-              <a:t>dashboard + alerts</a:t>
-            </a:r>
-            <a:endParaRPr lang="en-US" sz="1400" dirty="0"/>
-          </a:p>
-        </p:txBody>
-      </p:sp>
-      <p:sp>
-        <p:nvSpPr>
-          <p:cNvPr id="33" name="Shape 31"/>
-          <p:cNvSpPr/>
-          <p:nvPr/>
-        </p:nvSpPr>
-        <p:spPr>
-          <a:xfrm flipV="1">
-            <a:off x="2642616" y="3685032"/>
-            <a:ext cx="566928" cy="384048"/>
-          </a:xfrm>
-          <a:prstGeom prst="line">
-            <a:avLst/>
-          </a:prstGeom>
-          <a:noFill/>
-          <a:ln w="19050">
-            <a:solidFill>
-              <a:schemeClr val="accent1"/>
-            </a:solidFill>
-            <a:prstDash val="solid"/>
-            <a:tailEnd type="triangle"/>
-          </a:ln>
-        </p:spPr>
-      </p:sp>
-      <p:sp>
-        <p:nvSpPr>
-          <p:cNvPr id="34" name="Shape 32"/>
-          <p:cNvSpPr/>
-          <p:nvPr/>
-        </p:nvSpPr>
-        <p:spPr>
-          <a:xfrm>
-            <a:off x="2642616" y="4434840"/>
-            <a:ext cx="566928" cy="246888"/>
-          </a:xfrm>
-          <a:prstGeom prst="line">
-            <a:avLst/>
-          </a:prstGeom>
-          <a:noFill/>
-          <a:ln w="19050">
-            <a:solidFill>
-              <a:schemeClr val="accent1"/>
-            </a:solidFill>
-            <a:prstDash val="solid"/>
-            <a:tailEnd type="triangle"/>
-          </a:ln>
-        </p:spPr>
-      </p:sp>
-      <p:sp>
-        <p:nvSpPr>
-          <p:cNvPr id="35" name="Text 33"/>
-          <p:cNvSpPr txBox="1"/>
-          <p:nvPr/>
-        </p:nvSpPr>
-        <p:spPr>
-          <a:xfrm>
-            <a:off x="2697480" y="3364992"/>
-            <a:ext cx="365760" cy="256032"/>
-          </a:xfrm>
-          <a:prstGeom prst="rect">
-            <a:avLst/>
-          </a:prstGeom>
-          <a:noFill/>
-          <a:ln/>
-        </p:spPr>
-        <p:txBody>
-          <a:bodyPr wrap="square" lIns="0" tIns="0" rIns="0" bIns="0" rtlCol="0" anchor="ctr"/>
-          <a:lstStyle/>
-          <a:p>
-            <a:pPr indent="0" marL="0">
-              <a:buNone/>
-            </a:pPr>
-            <a:r>
-              <a:rPr lang="en-US" sz="1200" b="1" dirty="0">
-                <a:solidFill>
-                  <a:schemeClr val="accent1"/>
-                </a:solidFill>
-                <a:latin typeface="Courier New" pitchFamily="34" charset="0"/>
-                <a:ea typeface="Courier New" pitchFamily="34" charset="-122"/>
-                <a:cs typeface="Courier New" pitchFamily="34" charset="-120"/>
-              </a:rPr>
-              <a:t>/</a:t>
-            </a:r>
-            <a:endParaRPr lang="en-US" sz="1200" dirty="0"/>
-          </a:p>
-        </p:txBody>
-      </p:sp>
-      <p:sp>
-        <p:nvSpPr>
-          <p:cNvPr id="36" name="Text 34"/>
-          <p:cNvSpPr txBox="1"/>
-          <p:nvPr/>
-        </p:nvSpPr>
-        <p:spPr>
-          <a:xfrm>
-            <a:off x="2670048" y="4681728"/>
-            <a:ext cx="548640" cy="256032"/>
-          </a:xfrm>
-          <a:prstGeom prst="rect">
-            <a:avLst/>
-          </a:prstGeom>
-          <a:noFill/>
-          <a:ln/>
-        </p:spPr>
-        <p:txBody>
-          <a:bodyPr wrap="square" lIns="0" tIns="0" rIns="0" bIns="0" rtlCol="0" anchor="ctr"/>
-          <a:lstStyle/>
-          <a:p>
-            <a:pPr indent="0" marL="0">
-              <a:buNone/>
-            </a:pPr>
-            <a:r>
-              <a:rPr lang="en-US" sz="1200" b="1" dirty="0">
-                <a:solidFill>
-                  <a:schemeClr val="accent1"/>
-                </a:solidFill>
-                <a:latin typeface="Courier New" pitchFamily="34" charset="0"/>
-                <a:ea typeface="Courier New" pitchFamily="34" charset="-122"/>
-                <a:cs typeface="Courier New" pitchFamily="34" charset="-120"/>
-              </a:rPr>
-              <a:t>/api</a:t>
-            </a:r>
-            <a:endParaRPr lang="en-US" sz="1200" dirty="0"/>
-          </a:p>
-        </p:txBody>
-      </p:sp>
-      <p:sp>
-        <p:nvSpPr>
-          <p:cNvPr id="37" name="Shape 35"/>
-          <p:cNvSpPr/>
-          <p:nvPr/>
-        </p:nvSpPr>
-        <p:spPr>
-          <a:xfrm>
-            <a:off x="5522976" y="4681728"/>
-            <a:ext cx="475488" cy="0"/>
-          </a:xfrm>
-          <a:prstGeom prst="line">
-            <a:avLst/>
-          </a:prstGeom>
-          <a:noFill/>
-          <a:ln w="19050">
-            <a:solidFill>
-              <a:schemeClr val="accent1"/>
-            </a:solidFill>
-            <a:prstDash val="solid"/>
-            <a:tailEnd type="triangle"/>
-          </a:ln>
-        </p:spPr>
-      </p:sp>
-      <p:sp>
-        <p:nvSpPr>
-          <p:cNvPr id="38" name="Shape 36"/>
-          <p:cNvSpPr/>
-          <p:nvPr/>
-        </p:nvSpPr>
-        <p:spPr>
-          <a:xfrm flipV="1">
-            <a:off x="4366260" y="5102352"/>
-            <a:ext cx="0" cy="182880"/>
-          </a:xfrm>
-          <a:prstGeom prst="line">
-            <a:avLst/>
-          </a:prstGeom>
-          <a:noFill/>
-          <a:ln w="19050">
-            <a:solidFill>
-              <a:schemeClr val="accent1"/>
-            </a:solidFill>
-            <a:prstDash val="solid"/>
-            <a:tailEnd type="triangle"/>
-          </a:ln>
-        </p:spPr>
-      </p:sp>
-      <p:sp>
-        <p:nvSpPr>
-          <p:cNvPr id="39" name="Shape 37"/>
-          <p:cNvSpPr/>
-          <p:nvPr/>
-        </p:nvSpPr>
-        <p:spPr>
-          <a:xfrm>
-            <a:off x="5522976" y="5687568"/>
-            <a:ext cx="475488" cy="0"/>
-          </a:xfrm>
-          <a:prstGeom prst="line">
-            <a:avLst/>
-          </a:prstGeom>
-          <a:noFill/>
-          <a:ln w="19050">
-            <a:solidFill>
-              <a:schemeClr val="accent1"/>
-            </a:solidFill>
-            <a:prstDash val="solid"/>
-            <a:tailEnd type="triangle"/>
-          </a:ln>
-        </p:spPr>
-      </p:sp>
-      <p:sp>
-        <p:nvSpPr>
-          <p:cNvPr id="40" name="Shape 38"/>
-          <p:cNvSpPr/>
-          <p:nvPr/>
-        </p:nvSpPr>
-        <p:spPr>
-          <a:xfrm flipH="1">
-            <a:off x="8549640" y="2359152"/>
-            <a:ext cx="1417320" cy="411480"/>
-          </a:xfrm>
-          <a:prstGeom prst="line">
-            <a:avLst/>
-          </a:prstGeom>
-          <a:noFill/>
-          <a:ln w="19050">
-            <a:solidFill>
-              <a:schemeClr val="accent1"/>
-            </a:solidFill>
-            <a:prstDash val="solid"/>
-            <a:tailEnd type="triangle"/>
-          </a:ln>
-        </p:spPr>
-      </p:sp>
-      <p:sp>
-        <p:nvSpPr>
-          <p:cNvPr id="41" name="aws"/>
-          <p:cNvSpPr/>
-          <p:nvPr/>
-        </p:nvSpPr>
-        <p:spPr>
-          <a:xfrm>
-            <a:off x="8869680" y="2788920"/>
-            <a:ext cx="2770632" cy="3429000"/>
-          </a:xfrm>
-          <a:prstGeom prst="roundRect">
-            <a:avLst>
-              <a:gd name="adj" fmla="val 3300"/>
-            </a:avLst>
-          </a:prstGeom>
-          <a:solidFill>
-            <a:schemeClr val="bg2"/>
-          </a:solidFill>
-          <a:ln w="12700">
-            <a:solidFill>
-              <a:schemeClr val="accent3"/>
-            </a:solidFill>
-            <a:prstDash val="solid"/>
-          </a:ln>
-        </p:spPr>
-      </p:sp>
-      <p:sp>
-        <p:nvSpPr>
-          <p:cNvPr id="42" name="Text 40"/>
-          <p:cNvSpPr txBox="1"/>
-          <p:nvPr/>
-        </p:nvSpPr>
-        <p:spPr>
-          <a:xfrm>
-            <a:off x="9098280" y="2926080"/>
-            <a:ext cx="2377440" cy="256032"/>
-          </a:xfrm>
-          <a:prstGeom prst="rect">
-            <a:avLst/>
-          </a:prstGeom>
-          <a:noFill/>
-          <a:ln/>
-        </p:spPr>
-        <p:txBody>
-          <a:bodyPr wrap="square" lIns="0" tIns="0" rIns="0" bIns="0" rtlCol="0" anchor="ctr"/>
-          <a:lstStyle/>
-          <a:p>
-            <a:pPr indent="0" marL="0">
-              <a:buNone/>
-            </a:pPr>
-            <a:r>
-              <a:rPr lang="en-US" sz="1100" dirty="0">
-                <a:solidFill>
-                  <a:schemeClr val="tx2"/>
-                </a:solidFill>
-                <a:latin typeface="Courier New" pitchFamily="34" charset="0"/>
-                <a:ea typeface="Courier New" pitchFamily="34" charset="-122"/>
-                <a:cs typeface="Courier New" pitchFamily="34" charset="-120"/>
-              </a:rPr>
-              <a:t>aws  /  ap-south-1</a:t>
-            </a:r>
-            <a:endParaRPr lang="en-US" sz="1100" dirty="0"/>
-          </a:p>
-        </p:txBody>
-      </p:sp>
-      <p:sp>
-        <p:nvSpPr>
-          <p:cNvPr id="43" name="Text 41"/>
+          <p:cNvPr id="41" name="Text 39"/>
           <p:cNvSpPr txBox="1"/>
           <p:nvPr/>
         </p:nvSpPr>
@@ -7407,7 +7077,7 @@
       </p:sp>
       <p:sp>
         <p:nvSpPr>
-          <p:cNvPr id="44" name="Text 42"/>
+          <p:cNvPr id="42" name="Text 40"/>
           <p:cNvSpPr txBox="1"/>
           <p:nvPr/>
         </p:nvSpPr>
@@ -7622,19 +7292,17 @@
       </p:sp>
       <p:sp>
         <p:nvSpPr>
-          <p:cNvPr id="3" name="module chip"/>
+          <p:cNvPr id="3" name="icon circle React 18 + Vite"/>
           <p:cNvSpPr/>
           <p:nvPr/>
         </p:nvSpPr>
         <p:spPr>
           <a:xfrm>
-            <a:off x="10012680" y="548640"/>
-            <a:ext cx="1627632" cy="411480"/>
-          </a:xfrm>
-          <a:prstGeom prst="roundRect">
-            <a:avLst>
-              <a:gd name="adj" fmla="val 17778"/>
-            </a:avLst>
+            <a:off x="548640" y="1554480"/>
+            <a:ext cx="603504" cy="603504"/>
+          </a:xfrm>
+          <a:prstGeom prst="ellipse">
+            <a:avLst/>
           </a:prstGeom>
           <a:solidFill>
             <a:schemeClr val="bg2"/>
@@ -7647,16 +7315,40 @@
           </a:ln>
         </p:spPr>
       </p:sp>
-      <p:sp>
-        <p:nvSpPr>
-          <p:cNvPr id="4" name="Text 2"/>
-          <p:cNvSpPr txBox="1"/>
-          <p:nvPr/>
-        </p:nvSpPr>
-        <p:spPr>
-          <a:xfrm>
-            <a:off x="10012680" y="548640"/>
-            <a:ext cx="1627632" cy="411480"/>
+      <p:pic>
+        <p:nvPicPr>
+          <p:cNvPr id="4" name="Image 0" descr="React 18 + Vite">    </p:cNvPr>
+          <p:cNvPicPr>
+            <a:picLocks noChangeAspect="1"/>
+          </p:cNvPicPr>
+          <p:nvPr/>
+        </p:nvPicPr>
+        <p:blipFill>
+          <a:blip r:embed="rId1"/>
+          <a:stretch>
+            <a:fillRect/>
+          </a:stretch>
+        </p:blipFill>
+        <p:spPr>
+          <a:xfrm>
+            <a:off x="685800" y="1691640"/>
+            <a:ext cx="329184" cy="329184"/>
+          </a:xfrm>
+          <a:prstGeom prst="rect">
+            <a:avLst/>
+          </a:prstGeom>
+        </p:spPr>
+      </p:pic>
+      <p:sp>
+        <p:nvSpPr>
+          <p:cNvPr id="5" name="Text 2"/>
+          <p:cNvSpPr txBox="1"/>
+          <p:nvPr/>
+        </p:nvSpPr>
+        <p:spPr>
+          <a:xfrm>
+            <a:off x="1325880" y="1508760"/>
+            <a:ext cx="4297680" cy="731520"/>
           </a:xfrm>
           <a:prstGeom prst="rect">
             <a:avLst/>
@@ -7668,33 +7360,44 @@
           <a:bodyPr wrap="square" lIns="0" tIns="0" rIns="0" bIns="0" rtlCol="0" anchor="ctr"/>
           <a:lstStyle/>
           <a:p>
-            <a:pPr algn="ctr" indent="0" marL="0">
-              <a:buNone/>
-            </a:pPr>
-            <a:r>
-              <a:rPr lang="en-US" sz="1200" b="1" dirty="0">
-                <a:solidFill>
-                  <a:schemeClr val="accent1"/>
-                </a:solidFill>
-                <a:latin typeface="Courier New" pitchFamily="34" charset="0"/>
-                <a:ea typeface="Courier New" pitchFamily="34" charset="-122"/>
-                <a:cs typeface="Courier New" pitchFamily="34" charset="-120"/>
-              </a:rPr>
-              <a:t>M1 · 10 pts</a:t>
-            </a:r>
-            <a:endParaRPr lang="en-US" sz="1200" dirty="0"/>
-          </a:p>
-        </p:txBody>
-      </p:sp>
-      <p:sp>
-        <p:nvSpPr>
-          <p:cNvPr id="5" name="icon circle React 18 + Vite"/>
+            <a:pPr indent="0" marL="0">
+              <a:buNone/>
+            </a:pPr>
+            <a:r>
+              <a:rPr lang="en-US" sz="1700" b="1" dirty="0">
+                <a:solidFill>
+                  <a:schemeClr val="tx1"/>
+                </a:solidFill>
+              </a:rPr>
+              <a:t>React 18 + Vite</a:t>
+            </a:r>
+            <a:endParaRPr lang="en-US" sz="1700" dirty="0"/>
+          </a:p>
+          <a:p>
+            <a:pPr indent="0" marL="0">
+              <a:buNone/>
+            </a:pPr>
+            <a:r>
+              <a:rPr lang="en-US" sz="1400" dirty="0">
+                <a:solidFill>
+                  <a:schemeClr val="tx2"/>
+                </a:solidFill>
+              </a:rPr>
+              <a:t>Dashboard with totals, filters, add / edit / delete</a:t>
+            </a:r>
+            <a:endParaRPr lang="en-US" sz="1700" dirty="0"/>
+          </a:p>
+        </p:txBody>
+      </p:sp>
+      <p:sp>
+        <p:nvSpPr>
+          <p:cNvPr id="6" name="icon circle FastAPI on Python 3.12"/>
           <p:cNvSpPr/>
           <p:nvPr/>
         </p:nvSpPr>
         <p:spPr>
           <a:xfrm>
-            <a:off x="548640" y="1554480"/>
+            <a:off x="548640" y="2468880"/>
             <a:ext cx="603504" cy="603504"/>
           </a:xfrm>
           <a:prstGeom prst="ellipse">
@@ -7713,21 +7416,21 @@
       </p:sp>
       <p:pic>
         <p:nvPicPr>
-          <p:cNvPr id="6" name="Image 0" descr="React 18 + Vite">    </p:cNvPr>
+          <p:cNvPr id="7" name="Image 1" descr="FastAPI on Python 3.12">    </p:cNvPr>
           <p:cNvPicPr>
             <a:picLocks noChangeAspect="1"/>
           </p:cNvPicPr>
           <p:nvPr/>
         </p:nvPicPr>
         <p:blipFill>
-          <a:blip r:embed="rId1"/>
+          <a:blip r:embed="rId2"/>
           <a:stretch>
             <a:fillRect/>
           </a:stretch>
         </p:blipFill>
         <p:spPr>
           <a:xfrm>
-            <a:off x="685800" y="1691640"/>
+            <a:off x="685800" y="2606040"/>
             <a:ext cx="329184" cy="329184"/>
           </a:xfrm>
           <a:prstGeom prst="rect">
@@ -7737,13 +7440,13 @@
       </p:pic>
       <p:sp>
         <p:nvSpPr>
-          <p:cNvPr id="7" name="Text 4"/>
-          <p:cNvSpPr txBox="1"/>
-          <p:nvPr/>
-        </p:nvSpPr>
-        <p:spPr>
-          <a:xfrm>
-            <a:off x="1325880" y="1508760"/>
+          <p:cNvPr id="8" name="Text 4"/>
+          <p:cNvSpPr txBox="1"/>
+          <p:nvPr/>
+        </p:nvSpPr>
+        <p:spPr>
+          <a:xfrm>
+            <a:off x="1325880" y="2423160"/>
             <a:ext cx="4297680" cy="731520"/>
           </a:xfrm>
           <a:prstGeom prst="rect">
@@ -7765,7 +7468,7 @@
                   <a:schemeClr val="tx1"/>
                 </a:solidFill>
               </a:rPr>
-              <a:t>React 18 + Vite</a:t>
+              <a:t>FastAPI on Python 3.12</a:t>
             </a:r>
             <a:endParaRPr lang="en-US" sz="1700" dirty="0"/>
           </a:p>
@@ -7779,7 +7482,7 @@
                   <a:schemeClr val="tx2"/>
                 </a:solidFill>
               </a:rPr>
-              <a:t>Dashboard with totals, filters, add / edit / delete</a:t>
+              <a:t>REST API with OpenAPI docs, /health and /ready probes</a:t>
             </a:r>
             <a:endParaRPr lang="en-US" sz="1700" dirty="0"/>
           </a:p>
@@ -7787,13 +7490,13 @@
       </p:sp>
       <p:sp>
         <p:nvSpPr>
-          <p:cNvPr id="8" name="icon circle FastAPI on Python 3.12"/>
+          <p:cNvPr id="9" name="icon circle PostgreSQL 16 + Alembic"/>
           <p:cNvSpPr/>
           <p:nvPr/>
         </p:nvSpPr>
         <p:spPr>
           <a:xfrm>
-            <a:off x="548640" y="2468880"/>
+            <a:off x="548640" y="3383280"/>
             <a:ext cx="603504" cy="603504"/>
           </a:xfrm>
           <a:prstGeom prst="ellipse">
@@ -7812,106 +7515,7 @@
       </p:sp>
       <p:pic>
         <p:nvPicPr>
-          <p:cNvPr id="9" name="Image 1" descr="FastAPI on Python 3.12">    </p:cNvPr>
-          <p:cNvPicPr>
-            <a:picLocks noChangeAspect="1"/>
-          </p:cNvPicPr>
-          <p:nvPr/>
-        </p:nvPicPr>
-        <p:blipFill>
-          <a:blip r:embed="rId2"/>
-          <a:stretch>
-            <a:fillRect/>
-          </a:stretch>
-        </p:blipFill>
-        <p:spPr>
-          <a:xfrm>
-            <a:off x="685800" y="2606040"/>
-            <a:ext cx="329184" cy="329184"/>
-          </a:xfrm>
-          <a:prstGeom prst="rect">
-            <a:avLst/>
-          </a:prstGeom>
-        </p:spPr>
-      </p:pic>
-      <p:sp>
-        <p:nvSpPr>
-          <p:cNvPr id="10" name="Text 6"/>
-          <p:cNvSpPr txBox="1"/>
-          <p:nvPr/>
-        </p:nvSpPr>
-        <p:spPr>
-          <a:xfrm>
-            <a:off x="1325880" y="2423160"/>
-            <a:ext cx="4297680" cy="731520"/>
-          </a:xfrm>
-          <a:prstGeom prst="rect">
-            <a:avLst/>
-          </a:prstGeom>
-          <a:noFill/>
-          <a:ln/>
-        </p:spPr>
-        <p:txBody>
-          <a:bodyPr wrap="square" lIns="0" tIns="0" rIns="0" bIns="0" rtlCol="0" anchor="ctr"/>
-          <a:lstStyle/>
-          <a:p>
-            <a:pPr indent="0" marL="0">
-              <a:buNone/>
-            </a:pPr>
-            <a:r>
-              <a:rPr lang="en-US" sz="1700" b="1" dirty="0">
-                <a:solidFill>
-                  <a:schemeClr val="tx1"/>
-                </a:solidFill>
-              </a:rPr>
-              <a:t>FastAPI on Python 3.12</a:t>
-            </a:r>
-            <a:endParaRPr lang="en-US" sz="1700" dirty="0"/>
-          </a:p>
-          <a:p>
-            <a:pPr indent="0" marL="0">
-              <a:buNone/>
-            </a:pPr>
-            <a:r>
-              <a:rPr lang="en-US" sz="1400" dirty="0">
-                <a:solidFill>
-                  <a:schemeClr val="tx2"/>
-                </a:solidFill>
-              </a:rPr>
-              <a:t>REST API with OpenAPI docs, /health and /ready probes</a:t>
-            </a:r>
-            <a:endParaRPr lang="en-US" sz="1700" dirty="0"/>
-          </a:p>
-        </p:txBody>
-      </p:sp>
-      <p:sp>
-        <p:nvSpPr>
-          <p:cNvPr id="11" name="icon circle PostgreSQL 16 + Alembic"/>
-          <p:cNvSpPr/>
-          <p:nvPr/>
-        </p:nvSpPr>
-        <p:spPr>
-          <a:xfrm>
-            <a:off x="548640" y="3383280"/>
-            <a:ext cx="603504" cy="603504"/>
-          </a:xfrm>
-          <a:prstGeom prst="ellipse">
-            <a:avLst/>
-          </a:prstGeom>
-          <a:solidFill>
-            <a:schemeClr val="bg2"/>
-          </a:solidFill>
-          <a:ln w="12700">
-            <a:solidFill>
-              <a:schemeClr val="accent3"/>
-            </a:solidFill>
-            <a:prstDash val="solid"/>
-          </a:ln>
-        </p:spPr>
-      </p:sp>
-      <p:pic>
-        <p:nvPicPr>
-          <p:cNvPr id="12" name="Image 2" descr="PostgreSQL 16 + Alembic">    </p:cNvPr>
+          <p:cNvPr id="10" name="Image 2" descr="PostgreSQL 16 + Alembic">    </p:cNvPr>
           <p:cNvPicPr>
             <a:picLocks noChangeAspect="1"/>
           </p:cNvPicPr>
@@ -7935,7 +7539,7 @@
       </p:pic>
       <p:sp>
         <p:nvSpPr>
-          <p:cNvPr id="13" name="Text 8"/>
+          <p:cNvPr id="11" name="Text 6"/>
           <p:cNvSpPr txBox="1"/>
           <p:nvPr/>
         </p:nvSpPr>
@@ -7985,7 +7589,7 @@
       </p:sp>
       <p:sp>
         <p:nvSpPr>
-          <p:cNvPr id="14" name="Text 9"/>
+          <p:cNvPr id="12" name="Text 7"/>
           <p:cNvSpPr txBox="1"/>
           <p:nvPr/>
         </p:nvSpPr>
@@ -8024,7 +7628,7 @@
       </p:sp>
       <p:sp>
         <p:nvSpPr>
-          <p:cNvPr id="15" name="Text 10"/>
+          <p:cNvPr id="13" name="Text 8"/>
           <p:cNvSpPr txBox="1"/>
           <p:nvPr/>
         </p:nvSpPr>
@@ -8060,7 +7664,7 @@
       </p:sp>
       <p:sp>
         <p:nvSpPr>
-          <p:cNvPr id="16" name="Text 11"/>
+          <p:cNvPr id="14" name="Text 9"/>
           <p:cNvSpPr txBox="1"/>
           <p:nvPr/>
         </p:nvSpPr>
@@ -8099,7 +7703,7 @@
       </p:sp>
       <p:sp>
         <p:nvSpPr>
-          <p:cNvPr id="17" name="Text 12"/>
+          <p:cNvPr id="15" name="Text 10"/>
           <p:cNvSpPr txBox="1"/>
           <p:nvPr/>
         </p:nvSpPr>
@@ -8135,7 +7739,7 @@
       </p:sp>
       <p:sp>
         <p:nvSpPr>
-          <p:cNvPr id="18" name="Text 13"/>
+          <p:cNvPr id="16" name="Text 11"/>
           <p:cNvSpPr txBox="1"/>
           <p:nvPr/>
         </p:nvSpPr>
@@ -8174,7 +7778,7 @@
       </p:sp>
       <p:sp>
         <p:nvSpPr>
-          <p:cNvPr id="19" name="Text 14"/>
+          <p:cNvPr id="17" name="Text 12"/>
           <p:cNvSpPr txBox="1"/>
           <p:nvPr/>
         </p:nvSpPr>
@@ -8210,7 +7814,7 @@
       </p:sp>
       <p:sp>
         <p:nvSpPr>
-          <p:cNvPr id="20" name="Text 15"/>
+          <p:cNvPr id="18" name="Text 13"/>
           <p:cNvSpPr txBox="1"/>
           <p:nvPr/>
         </p:nvSpPr>
@@ -8249,7 +7853,7 @@
       </p:sp>
       <p:sp>
         <p:nvSpPr>
-          <p:cNvPr id="21" name="frame swagger.jpg"/>
+          <p:cNvPr id="19" name="frame swagger.jpg"/>
           <p:cNvSpPr/>
           <p:nvPr/>
         </p:nvSpPr>
@@ -8274,7 +7878,7 @@
       </p:sp>
       <p:pic>
         <p:nvPicPr>
-          <p:cNvPr id="22" name="Image 3" descr="swagger.jpg">    </p:cNvPr>
+          <p:cNvPr id="20" name="Image 3" descr="swagger.jpg">    </p:cNvPr>
           <p:cNvPicPr>
             <a:picLocks noChangeAspect="1"/>
           </p:cNvPicPr>
@@ -8406,73 +8010,7 @@
       </p:sp>
       <p:sp>
         <p:nvSpPr>
-          <p:cNvPr id="3" name="module chip"/>
-          <p:cNvSpPr/>
-          <p:nvPr/>
-        </p:nvSpPr>
-        <p:spPr>
-          <a:xfrm>
-            <a:off x="10012680" y="548640"/>
-            <a:ext cx="1627632" cy="411480"/>
-          </a:xfrm>
-          <a:prstGeom prst="roundRect">
-            <a:avLst>
-              <a:gd name="adj" fmla="val 17778"/>
-            </a:avLst>
-          </a:prstGeom>
-          <a:solidFill>
-            <a:schemeClr val="bg2"/>
-          </a:solidFill>
-          <a:ln w="12700">
-            <a:solidFill>
-              <a:schemeClr val="accent3"/>
-            </a:solidFill>
-            <a:prstDash val="solid"/>
-          </a:ln>
-        </p:spPr>
-      </p:sp>
-      <p:sp>
-        <p:nvSpPr>
-          <p:cNvPr id="4" name="Text 2"/>
-          <p:cNvSpPr txBox="1"/>
-          <p:nvPr/>
-        </p:nvSpPr>
-        <p:spPr>
-          <a:xfrm>
-            <a:off x="10012680" y="548640"/>
-            <a:ext cx="1627632" cy="411480"/>
-          </a:xfrm>
-          <a:prstGeom prst="rect">
-            <a:avLst/>
-          </a:prstGeom>
-          <a:noFill/>
-          <a:ln/>
-        </p:spPr>
-        <p:txBody>
-          <a:bodyPr wrap="square" lIns="0" tIns="0" rIns="0" bIns="0" rtlCol="0" anchor="ctr"/>
-          <a:lstStyle/>
-          <a:p>
-            <a:pPr algn="ctr" indent="0" marL="0">
-              <a:buNone/>
-            </a:pPr>
-            <a:r>
-              <a:rPr lang="en-US" sz="1200" b="1" dirty="0">
-                <a:solidFill>
-                  <a:schemeClr val="accent1"/>
-                </a:solidFill>
-                <a:latin typeface="Courier New" pitchFamily="34" charset="0"/>
-                <a:ea typeface="Courier New" pitchFamily="34" charset="-122"/>
-                <a:cs typeface="Courier New" pitchFamily="34" charset="-120"/>
-              </a:rPr>
-              <a:t>M2+M3 · 15 pts</a:t>
-            </a:r>
-            <a:endParaRPr lang="en-US" sz="1200" dirty="0"/>
-          </a:p>
-        </p:txBody>
-      </p:sp>
-      <p:sp>
-        <p:nvSpPr>
-          <p:cNvPr id="5" name="Text 3"/>
+          <p:cNvPr id="3" name="Text 1"/>
           <p:cNvSpPr txBox="1"/>
           <p:nvPr/>
         </p:nvSpPr>
@@ -8511,7 +8049,7 @@
       </p:sp>
       <p:sp>
         <p:nvSpPr>
-          <p:cNvPr id="6" name="Text 4"/>
+          <p:cNvPr id="4" name="Text 2"/>
           <p:cNvSpPr txBox="1"/>
           <p:nvPr/>
         </p:nvSpPr>
@@ -8547,7 +8085,7 @@
       </p:sp>
       <p:sp>
         <p:nvSpPr>
-          <p:cNvPr id="7" name="Text 5"/>
+          <p:cNvPr id="5" name="Text 3"/>
           <p:cNvSpPr txBox="1"/>
           <p:nvPr/>
         </p:nvSpPr>
@@ -8659,7 +8197,7 @@
       </p:sp>
       <p:sp>
         <p:nvSpPr>
-          <p:cNvPr id="8" name="Text 6"/>
+          <p:cNvPr id="6" name="Text 4"/>
           <p:cNvSpPr txBox="1"/>
           <p:nvPr/>
         </p:nvSpPr>
@@ -8698,7 +8236,7 @@
       </p:sp>
       <p:sp>
         <p:nvSpPr>
-          <p:cNvPr id="9" name="frame pytest.jpg"/>
+          <p:cNvPr id="7" name="frame pytest.jpg"/>
           <p:cNvSpPr/>
           <p:nvPr/>
         </p:nvSpPr>
@@ -8723,7 +8261,7 @@
       </p:sp>
       <p:pic>
         <p:nvPicPr>
-          <p:cNvPr id="10" name="Image 0" descr="pytest.jpg">    </p:cNvPr>
+          <p:cNvPr id="8" name="Image 0" descr="pytest.jpg">    </p:cNvPr>
           <p:cNvPicPr>
             <a:picLocks noChangeAspect="1"/>
           </p:cNvPicPr>
@@ -8747,7 +8285,7 @@
       </p:pic>
       <p:sp>
         <p:nvSpPr>
-          <p:cNvPr id="11" name="Text 8"/>
+          <p:cNvPr id="9" name="Text 6"/>
           <p:cNvSpPr txBox="1"/>
           <p:nvPr/>
         </p:nvSpPr>
@@ -8786,7 +8324,7 @@
       </p:sp>
       <p:sp>
         <p:nvSpPr>
-          <p:cNvPr id="12" name="frame gitlog.jpg"/>
+          <p:cNvPr id="10" name="frame gitlog.jpg"/>
           <p:cNvSpPr/>
           <p:nvPr/>
         </p:nvSpPr>
@@ -8811,7 +8349,7 @@
       </p:sp>
       <p:pic>
         <p:nvPicPr>
-          <p:cNvPr id="13" name="Image 1" descr="gitlog.jpg">    </p:cNvPr>
+          <p:cNvPr id="11" name="Image 1" descr="gitlog.jpg">    </p:cNvPr>
           <p:cNvPicPr>
             <a:picLocks noChangeAspect="1"/>
           </p:cNvPicPr>
@@ -8943,18 +8481,18 @@
       </p:sp>
       <p:sp>
         <p:nvSpPr>
-          <p:cNvPr id="3" name="module chip"/>
+          <p:cNvPr id="3" name="docker card backend/Dockerfile"/>
           <p:cNvSpPr/>
           <p:nvPr/>
         </p:nvSpPr>
         <p:spPr>
           <a:xfrm>
-            <a:off x="10012680" y="548640"/>
-            <a:ext cx="1627632" cy="411480"/>
+            <a:off x="548640" y="1463040"/>
+            <a:ext cx="3511296" cy="2743200"/>
           </a:xfrm>
           <a:prstGeom prst="roundRect">
             <a:avLst>
-              <a:gd name="adj" fmla="val 17778"/>
+              <a:gd name="adj" fmla="val 3333"/>
             </a:avLst>
           </a:prstGeom>
           <a:solidFill>
@@ -8976,8 +8514,8 @@
         </p:nvSpPr>
         <p:spPr>
           <a:xfrm>
-            <a:off x="10012680" y="548640"/>
-            <a:ext cx="1627632" cy="411480"/>
+            <a:off x="777240" y="1645920"/>
+            <a:ext cx="3054096" cy="274320"/>
           </a:xfrm>
           <a:prstGeom prst="rect">
             <a:avLst/>
@@ -8989,7 +8527,7 @@
           <a:bodyPr wrap="square" lIns="0" tIns="0" rIns="0" bIns="0" rtlCol="0" anchor="ctr"/>
           <a:lstStyle/>
           <a:p>
-            <a:pPr algn="ctr" indent="0" marL="0">
+            <a:pPr indent="0" marL="0">
               <a:buNone/>
             </a:pPr>
             <a:r>
@@ -9001,7 +8539,7 @@
                 <a:ea typeface="Courier New" pitchFamily="34" charset="-122"/>
                 <a:cs typeface="Courier New" pitchFamily="34" charset="-120"/>
               </a:rPr>
-              <a:t>M4 · 10 pts</a:t>
+              <a:t>backend/Dockerfile</a:t>
             </a:r>
             <a:endParaRPr lang="en-US" sz="1200" dirty="0"/>
           </a:p>
@@ -9009,13 +8547,128 @@
       </p:sp>
       <p:sp>
         <p:nvSpPr>
-          <p:cNvPr id="5" name="docker card backend/Dockerfile"/>
+          <p:cNvPr id="5" name="Text 3"/>
+          <p:cNvSpPr txBox="1"/>
+          <p:nvPr/>
+        </p:nvSpPr>
+        <p:spPr>
+          <a:xfrm>
+            <a:off x="777240" y="1965960"/>
+            <a:ext cx="3054096" cy="411480"/>
+          </a:xfrm>
+          <a:prstGeom prst="rect">
+            <a:avLst/>
+          </a:prstGeom>
+          <a:noFill/>
+          <a:ln/>
+        </p:spPr>
+        <p:txBody>
+          <a:bodyPr wrap="square" lIns="0" tIns="0" rIns="0" bIns="0" rtlCol="0" anchor="ctr"/>
+          <a:lstStyle/>
+          <a:p>
+            <a:pPr indent="0" marL="0">
+              <a:buNone/>
+            </a:pPr>
+            <a:r>
+              <a:rPr lang="en-US" sz="1900" b="1" dirty="0">
+                <a:solidFill>
+                  <a:schemeClr val="tx1"/>
+                </a:solidFill>
+                <a:latin typeface="Arial" pitchFamily="34" charset="0"/>
+                <a:ea typeface="Arial" pitchFamily="34" charset="-122"/>
+                <a:cs typeface="Arial" pitchFamily="34" charset="-120"/>
+              </a:rPr>
+              <a:t>python:3.12-slim</a:t>
+            </a:r>
+            <a:endParaRPr lang="en-US" sz="1900" dirty="0"/>
+          </a:p>
+        </p:txBody>
+      </p:sp>
+      <p:sp>
+        <p:nvSpPr>
+          <p:cNvPr id="6" name="Text 4"/>
+          <p:cNvSpPr txBox="1"/>
+          <p:nvPr/>
+        </p:nvSpPr>
+        <p:spPr>
+          <a:xfrm>
+            <a:off x="777240" y="2560320"/>
+            <a:ext cx="3054096" cy="1554480"/>
+          </a:xfrm>
+          <a:prstGeom prst="rect">
+            <a:avLst/>
+          </a:prstGeom>
+          <a:noFill/>
+          <a:ln/>
+        </p:spPr>
+        <p:txBody>
+          <a:bodyPr wrap="square" lIns="0" tIns="0" rIns="0" bIns="0" rtlCol="0" anchor="t"/>
+          <a:lstStyle/>
+          <a:p>
+            <a:pPr marL="203200" indent="-203200">
+              <a:spcAft>
+                <a:spcPts val="800"/>
+              </a:spcAft>
+              <a:buSzPct val="100000"/>
+              <a:buChar char="•"/>
+            </a:pPr>
+            <a:r>
+              <a:rPr lang="en-US" sz="1400" dirty="0">
+                <a:solidFill>
+                  <a:schemeClr val="tx1"/>
+                </a:solidFill>
+              </a:rPr>
+              <a:t>Runs as non-root UID 10001</a:t>
+            </a:r>
+            <a:endParaRPr lang="en-US" sz="1400" dirty="0"/>
+          </a:p>
+          <a:p>
+            <a:pPr marL="203200" indent="-203200">
+              <a:spcAft>
+                <a:spcPts val="800"/>
+              </a:spcAft>
+              <a:buSzPct val="100000"/>
+              <a:buChar char="•"/>
+            </a:pPr>
+            <a:r>
+              <a:rPr lang="en-US" sz="1400" dirty="0">
+                <a:solidFill>
+                  <a:schemeClr val="tx1"/>
+                </a:solidFill>
+              </a:rPr>
+              <a:t>OS packages patched at build</a:t>
+            </a:r>
+            <a:endParaRPr lang="en-US" sz="1400" dirty="0"/>
+          </a:p>
+          <a:p>
+            <a:pPr marL="203200" indent="-203200">
+              <a:spcAft>
+                <a:spcPts val="800"/>
+              </a:spcAft>
+              <a:buSzPct val="100000"/>
+              <a:buChar char="•"/>
+            </a:pPr>
+            <a:r>
+              <a:rPr lang="en-US" sz="1400" dirty="0">
+                <a:solidFill>
+                  <a:schemeClr val="tx1"/>
+                </a:solidFill>
+              </a:rPr>
+              <a:t>alembic upgrade head, then uvicorn</a:t>
+            </a:r>
+            <a:endParaRPr lang="en-US" sz="1400" dirty="0"/>
+          </a:p>
+        </p:txBody>
+      </p:sp>
+      <p:sp>
+        <p:nvSpPr>
+          <p:cNvPr id="7" name="docker card frontend/Dockerfile"/>
           <p:cNvSpPr/>
           <p:nvPr/>
         </p:nvSpPr>
         <p:spPr>
           <a:xfrm>
-            <a:off x="548640" y="1463040"/>
+            <a:off x="4334256" y="1463040"/>
             <a:ext cx="3511296" cy="2743200"/>
           </a:xfrm>
           <a:prstGeom prst="roundRect">
@@ -9036,13 +8689,13 @@
       </p:sp>
       <p:sp>
         <p:nvSpPr>
-          <p:cNvPr id="6" name="Text 4"/>
-          <p:cNvSpPr txBox="1"/>
-          <p:nvPr/>
-        </p:nvSpPr>
-        <p:spPr>
-          <a:xfrm>
-            <a:off x="777240" y="1645920"/>
+          <p:cNvPr id="8" name="Text 6"/>
+          <p:cNvSpPr txBox="1"/>
+          <p:nvPr/>
+        </p:nvSpPr>
+        <p:spPr>
+          <a:xfrm>
+            <a:off x="4562856" y="1645920"/>
             <a:ext cx="3054096" cy="274320"/>
           </a:xfrm>
           <a:prstGeom prst="rect">
@@ -9067,7 +8720,7 @@
                 <a:ea typeface="Courier New" pitchFamily="34" charset="-122"/>
                 <a:cs typeface="Courier New" pitchFamily="34" charset="-120"/>
               </a:rPr>
-              <a:t>backend/Dockerfile</a:t>
+              <a:t>frontend/Dockerfile</a:t>
             </a:r>
             <a:endParaRPr lang="en-US" sz="1200" dirty="0"/>
           </a:p>
@@ -9075,13 +8728,13 @@
       </p:sp>
       <p:sp>
         <p:nvSpPr>
-          <p:cNvPr id="7" name="Text 5"/>
-          <p:cNvSpPr txBox="1"/>
-          <p:nvPr/>
-        </p:nvSpPr>
-        <p:spPr>
-          <a:xfrm>
-            <a:off x="777240" y="1965960"/>
+          <p:cNvPr id="9" name="Text 7"/>
+          <p:cNvSpPr txBox="1"/>
+          <p:nvPr/>
+        </p:nvSpPr>
+        <p:spPr>
+          <a:xfrm>
+            <a:off x="4562856" y="1965960"/>
             <a:ext cx="3054096" cy="411480"/>
           </a:xfrm>
           <a:prstGeom prst="rect">
@@ -9106,7 +8759,7 @@
                 <a:ea typeface="Arial" pitchFamily="34" charset="-122"/>
                 <a:cs typeface="Arial" pitchFamily="34" charset="-120"/>
               </a:rPr>
-              <a:t>python:3.12-slim</a:t>
+              <a:t>node:22 → nginx:1.27</a:t>
             </a:r>
             <a:endParaRPr lang="en-US" sz="1900" dirty="0"/>
           </a:p>
@@ -9114,13 +8767,13 @@
       </p:sp>
       <p:sp>
         <p:nvSpPr>
-          <p:cNvPr id="8" name="Text 6"/>
-          <p:cNvSpPr txBox="1"/>
-          <p:nvPr/>
-        </p:nvSpPr>
-        <p:spPr>
-          <a:xfrm>
-            <a:off x="777240" y="2560320"/>
+          <p:cNvPr id="10" name="Text 8"/>
+          <p:cNvSpPr txBox="1"/>
+          <p:nvPr/>
+        </p:nvSpPr>
+        <p:spPr>
+          <a:xfrm>
+            <a:off x="4562856" y="2560320"/>
             <a:ext cx="3054096" cy="1554480"/>
           </a:xfrm>
           <a:prstGeom prst="rect">
@@ -9146,7 +8799,7 @@
                   <a:schemeClr val="tx1"/>
                 </a:solidFill>
               </a:rPr>
-              <a:t>Runs as non-root UID 10001</a:t>
+              <a:t>Stage 1 builds the Vite bundle</a:t>
             </a:r>
             <a:endParaRPr lang="en-US" sz="1400" dirty="0"/>
           </a:p>
@@ -9164,7 +8817,7 @@
                   <a:schemeClr val="tx1"/>
                 </a:solidFill>
               </a:rPr>
-              <a:t>OS packages patched at build</a:t>
+              <a:t>Stage 2 ships only dist/</a:t>
             </a:r>
             <a:endParaRPr lang="en-US" sz="1400" dirty="0"/>
           </a:p>
@@ -9182,7 +8835,7 @@
                   <a:schemeClr val="tx1"/>
                 </a:solidFill>
               </a:rPr>
-              <a:t>alembic upgrade head, then uvicorn</a:t>
+              <a:t>Non-root appuser on port 8080</a:t>
             </a:r>
             <a:endParaRPr lang="en-US" sz="1400" dirty="0"/>
           </a:p>
@@ -9190,13 +8843,13 @@
       </p:sp>
       <p:sp>
         <p:nvSpPr>
-          <p:cNvPr id="9" name="docker card frontend/Dockerfile"/>
+          <p:cNvPr id="11" name="docker card docker-compose.yml"/>
           <p:cNvSpPr/>
           <p:nvPr/>
         </p:nvSpPr>
         <p:spPr>
           <a:xfrm>
-            <a:off x="4334256" y="1463040"/>
+            <a:off x="8119872" y="1463040"/>
             <a:ext cx="3511296" cy="2743200"/>
           </a:xfrm>
           <a:prstGeom prst="roundRect">
@@ -9217,13 +8870,13 @@
       </p:sp>
       <p:sp>
         <p:nvSpPr>
-          <p:cNvPr id="10" name="Text 8"/>
-          <p:cNvSpPr txBox="1"/>
-          <p:nvPr/>
-        </p:nvSpPr>
-        <p:spPr>
-          <a:xfrm>
-            <a:off x="4562856" y="1645920"/>
+          <p:cNvPr id="12" name="Text 10"/>
+          <p:cNvSpPr txBox="1"/>
+          <p:nvPr/>
+        </p:nvSpPr>
+        <p:spPr>
+          <a:xfrm>
+            <a:off x="8348472" y="1645920"/>
             <a:ext cx="3054096" cy="274320"/>
           </a:xfrm>
           <a:prstGeom prst="rect">
@@ -9248,7 +8901,7 @@
                 <a:ea typeface="Courier New" pitchFamily="34" charset="-122"/>
                 <a:cs typeface="Courier New" pitchFamily="34" charset="-120"/>
               </a:rPr>
-              <a:t>frontend/Dockerfile</a:t>
+              <a:t>docker-compose.yml</a:t>
             </a:r>
             <a:endParaRPr lang="en-US" sz="1200" dirty="0"/>
           </a:p>
@@ -9256,13 +8909,13 @@
       </p:sp>
       <p:sp>
         <p:nvSpPr>
-          <p:cNvPr id="11" name="Text 9"/>
-          <p:cNvSpPr txBox="1"/>
-          <p:nvPr/>
-        </p:nvSpPr>
-        <p:spPr>
-          <a:xfrm>
-            <a:off x="4562856" y="1965960"/>
+          <p:cNvPr id="13" name="Text 11"/>
+          <p:cNvSpPr txBox="1"/>
+          <p:nvPr/>
+        </p:nvSpPr>
+        <p:spPr>
+          <a:xfrm>
+            <a:off x="8348472" y="1965960"/>
             <a:ext cx="3054096" cy="411480"/>
           </a:xfrm>
           <a:prstGeom prst="rect">
@@ -9287,7 +8940,7 @@
                 <a:ea typeface="Arial" pitchFamily="34" charset="-122"/>
                 <a:cs typeface="Arial" pitchFamily="34" charset="-120"/>
               </a:rPr>
-              <a:t>node:22 → nginx:1.27</a:t>
+              <a:t>postgres + api + ui</a:t>
             </a:r>
             <a:endParaRPr lang="en-US" sz="1900" dirty="0"/>
           </a:p>
@@ -9295,13 +8948,13 @@
       </p:sp>
       <p:sp>
         <p:nvSpPr>
-          <p:cNvPr id="12" name="Text 10"/>
-          <p:cNvSpPr txBox="1"/>
-          <p:nvPr/>
-        </p:nvSpPr>
-        <p:spPr>
-          <a:xfrm>
-            <a:off x="4562856" y="2560320"/>
+          <p:cNvPr id="14" name="Text 12"/>
+          <p:cNvSpPr txBox="1"/>
+          <p:nvPr/>
+        </p:nvSpPr>
+        <p:spPr>
+          <a:xfrm>
+            <a:off x="8348472" y="2560320"/>
             <a:ext cx="3054096" cy="1554480"/>
           </a:xfrm>
           <a:prstGeom prst="rect">
@@ -9327,7 +8980,7 @@
                   <a:schemeClr val="tx1"/>
                 </a:solidFill>
               </a:rPr>
-              <a:t>Stage 1 builds the Vite bundle</a:t>
+              <a:t>Backend waits for postgres healthcheck</a:t>
             </a:r>
             <a:endParaRPr lang="en-US" sz="1400" dirty="0"/>
           </a:p>
@@ -9345,7 +8998,7 @@
                   <a:schemeClr val="tx1"/>
                 </a:solidFill>
               </a:rPr>
-              <a:t>Stage 2 ships only dist/</a:t>
+              <a:t>Named volume keeps the data</a:t>
             </a:r>
             <a:endParaRPr lang="en-US" sz="1400" dirty="0"/>
           </a:p>
@@ -9363,7 +9016,7 @@
                   <a:schemeClr val="tx1"/>
                 </a:solidFill>
               </a:rPr>
-              <a:t>Non-root appuser on port 8080</a:t>
+              <a:t>UI on localhost:3000</a:t>
             </a:r>
             <a:endParaRPr lang="en-US" sz="1400" dirty="0"/>
           </a:p>
@@ -9371,41 +9024,14 @@
       </p:sp>
       <p:sp>
         <p:nvSpPr>
-          <p:cNvPr id="13" name="docker card docker-compose.yml"/>
-          <p:cNvSpPr/>
-          <p:nvPr/>
-        </p:nvSpPr>
-        <p:spPr>
-          <a:xfrm>
-            <a:off x="8119872" y="1463040"/>
-            <a:ext cx="3511296" cy="2743200"/>
-          </a:xfrm>
-          <a:prstGeom prst="roundRect">
-            <a:avLst>
-              <a:gd name="adj" fmla="val 3333"/>
-            </a:avLst>
-          </a:prstGeom>
-          <a:solidFill>
-            <a:schemeClr val="bg2"/>
-          </a:solidFill>
-          <a:ln w="12700">
-            <a:solidFill>
-              <a:schemeClr val="accent3"/>
-            </a:solidFill>
-            <a:prstDash val="solid"/>
-          </a:ln>
-        </p:spPr>
-      </p:sp>
-      <p:sp>
-        <p:nvSpPr>
-          <p:cNvPr id="14" name="Text 12"/>
-          <p:cNvSpPr txBox="1"/>
-          <p:nvPr/>
-        </p:nvSpPr>
-        <p:spPr>
-          <a:xfrm>
-            <a:off x="8348472" y="1645920"/>
-            <a:ext cx="3054096" cy="274320"/>
+          <p:cNvPr id="15" name="Text 13"/>
+          <p:cNvSpPr txBox="1"/>
+          <p:nvPr/>
+        </p:nvSpPr>
+        <p:spPr>
+          <a:xfrm>
+            <a:off x="548640" y="4526280"/>
+            <a:ext cx="4572000" cy="256032"/>
           </a:xfrm>
           <a:prstGeom prst="rect">
             <a:avLst/>
@@ -9421,168 +9047,14 @@
               <a:buNone/>
             </a:pPr>
             <a:r>
-              <a:rPr lang="en-US" sz="1200" b="1" dirty="0">
-                <a:solidFill>
-                  <a:schemeClr val="accent1"/>
+              <a:rPr lang="en-US" sz="1100" dirty="0">
+                <a:solidFill>
+                  <a:schemeClr val="tx2"/>
                 </a:solidFill>
                 <a:latin typeface="Courier New" pitchFamily="34" charset="0"/>
                 <a:ea typeface="Courier New" pitchFamily="34" charset="-122"/>
                 <a:cs typeface="Courier New" pitchFamily="34" charset="-120"/>
               </a:rPr>
-              <a:t>docker-compose.yml</a:t>
-            </a:r>
-            <a:endParaRPr lang="en-US" sz="1200" dirty="0"/>
-          </a:p>
-        </p:txBody>
-      </p:sp>
-      <p:sp>
-        <p:nvSpPr>
-          <p:cNvPr id="15" name="Text 13"/>
-          <p:cNvSpPr txBox="1"/>
-          <p:nvPr/>
-        </p:nvSpPr>
-        <p:spPr>
-          <a:xfrm>
-            <a:off x="8348472" y="1965960"/>
-            <a:ext cx="3054096" cy="411480"/>
-          </a:xfrm>
-          <a:prstGeom prst="rect">
-            <a:avLst/>
-          </a:prstGeom>
-          <a:noFill/>
-          <a:ln/>
-        </p:spPr>
-        <p:txBody>
-          <a:bodyPr wrap="square" lIns="0" tIns="0" rIns="0" bIns="0" rtlCol="0" anchor="ctr"/>
-          <a:lstStyle/>
-          <a:p>
-            <a:pPr indent="0" marL="0">
-              <a:buNone/>
-            </a:pPr>
-            <a:r>
-              <a:rPr lang="en-US" sz="1900" b="1" dirty="0">
-                <a:solidFill>
-                  <a:schemeClr val="tx1"/>
-                </a:solidFill>
-                <a:latin typeface="Arial" pitchFamily="34" charset="0"/>
-                <a:ea typeface="Arial" pitchFamily="34" charset="-122"/>
-                <a:cs typeface="Arial" pitchFamily="34" charset="-120"/>
-              </a:rPr>
-              <a:t>postgres + api + ui</a:t>
-            </a:r>
-            <a:endParaRPr lang="en-US" sz="1900" dirty="0"/>
-          </a:p>
-        </p:txBody>
-      </p:sp>
-      <p:sp>
-        <p:nvSpPr>
-          <p:cNvPr id="16" name="Text 14"/>
-          <p:cNvSpPr txBox="1"/>
-          <p:nvPr/>
-        </p:nvSpPr>
-        <p:spPr>
-          <a:xfrm>
-            <a:off x="8348472" y="2560320"/>
-            <a:ext cx="3054096" cy="1554480"/>
-          </a:xfrm>
-          <a:prstGeom prst="rect">
-            <a:avLst/>
-          </a:prstGeom>
-          <a:noFill/>
-          <a:ln/>
-        </p:spPr>
-        <p:txBody>
-          <a:bodyPr wrap="square" lIns="0" tIns="0" rIns="0" bIns="0" rtlCol="0" anchor="t"/>
-          <a:lstStyle/>
-          <a:p>
-            <a:pPr marL="203200" indent="-203200">
-              <a:spcAft>
-                <a:spcPts val="800"/>
-              </a:spcAft>
-              <a:buSzPct val="100000"/>
-              <a:buChar char="•"/>
-            </a:pPr>
-            <a:r>
-              <a:rPr lang="en-US" sz="1400" dirty="0">
-                <a:solidFill>
-                  <a:schemeClr val="tx1"/>
-                </a:solidFill>
-              </a:rPr>
-              <a:t>Backend waits for postgres healthcheck</a:t>
-            </a:r>
-            <a:endParaRPr lang="en-US" sz="1400" dirty="0"/>
-          </a:p>
-          <a:p>
-            <a:pPr marL="203200" indent="-203200">
-              <a:spcAft>
-                <a:spcPts val="800"/>
-              </a:spcAft>
-              <a:buSzPct val="100000"/>
-              <a:buChar char="•"/>
-            </a:pPr>
-            <a:r>
-              <a:rPr lang="en-US" sz="1400" dirty="0">
-                <a:solidFill>
-                  <a:schemeClr val="tx1"/>
-                </a:solidFill>
-              </a:rPr>
-              <a:t>Named volume keeps the data</a:t>
-            </a:r>
-            <a:endParaRPr lang="en-US" sz="1400" dirty="0"/>
-          </a:p>
-          <a:p>
-            <a:pPr marL="203200" indent="-203200">
-              <a:spcAft>
-                <a:spcPts val="800"/>
-              </a:spcAft>
-              <a:buSzPct val="100000"/>
-              <a:buChar char="•"/>
-            </a:pPr>
-            <a:r>
-              <a:rPr lang="en-US" sz="1400" dirty="0">
-                <a:solidFill>
-                  <a:schemeClr val="tx1"/>
-                </a:solidFill>
-              </a:rPr>
-              <a:t>UI on localhost:3000</a:t>
-            </a:r>
-            <a:endParaRPr lang="en-US" sz="1400" dirty="0"/>
-          </a:p>
-        </p:txBody>
-      </p:sp>
-      <p:sp>
-        <p:nvSpPr>
-          <p:cNvPr id="17" name="Text 15"/>
-          <p:cNvSpPr txBox="1"/>
-          <p:nvPr/>
-        </p:nvSpPr>
-        <p:spPr>
-          <a:xfrm>
-            <a:off x="548640" y="4526280"/>
-            <a:ext cx="4572000" cy="256032"/>
-          </a:xfrm>
-          <a:prstGeom prst="rect">
-            <a:avLst/>
-          </a:prstGeom>
-          <a:noFill/>
-          <a:ln/>
-        </p:spPr>
-        <p:txBody>
-          <a:bodyPr wrap="square" lIns="0" tIns="0" rIns="0" bIns="0" rtlCol="0" anchor="ctr"/>
-          <a:lstStyle/>
-          <a:p>
-            <a:pPr indent="0" marL="0">
-              <a:buNone/>
-            </a:pPr>
-            <a:r>
-              <a:rPr lang="en-US" sz="1100" dirty="0">
-                <a:solidFill>
-                  <a:schemeClr val="tx2"/>
-                </a:solidFill>
-                <a:latin typeface="Courier New" pitchFamily="34" charset="0"/>
-                <a:ea typeface="Courier New" pitchFamily="34" charset="-122"/>
-                <a:cs typeface="Courier New" pitchFamily="34" charset="-120"/>
-              </a:rPr>
               <a:t>$ docker compose up --build</a:t>
             </a:r>
             <a:endParaRPr lang="en-US" sz="1100" dirty="0"/>
@@ -9591,7 +9063,7 @@
       </p:sp>
       <p:sp>
         <p:nvSpPr>
-          <p:cNvPr id="18" name="frame compose.jpg"/>
+          <p:cNvPr id="16" name="frame compose.jpg"/>
           <p:cNvSpPr/>
           <p:nvPr/>
         </p:nvSpPr>
@@ -9616,7 +9088,7 @@
       </p:sp>
       <p:pic>
         <p:nvPicPr>
-          <p:cNvPr id="19" name="Image 0" descr="compose.jpg">    </p:cNvPr>
+          <p:cNvPr id="17" name="Image 0" descr="compose.jpg">    </p:cNvPr>
           <p:cNvPicPr>
             <a:picLocks noChangeAspect="1"/>
           </p:cNvPicPr>
@@ -9640,7 +9112,7 @@
       </p:pic>
       <p:sp>
         <p:nvSpPr>
-          <p:cNvPr id="20" name="Text 17"/>
+          <p:cNvPr id="18" name="Text 15"/>
           <p:cNvSpPr txBox="1"/>
           <p:nvPr/>
         </p:nvSpPr>
@@ -9784,18 +9256,18 @@
       </p:sp>
       <p:sp>
         <p:nvSpPr>
-          <p:cNvPr id="3" name="module chip"/>
+          <p:cNvPr id="3" name="job 01"/>
           <p:cNvSpPr/>
           <p:nvPr/>
         </p:nvSpPr>
         <p:spPr>
           <a:xfrm>
-            <a:off x="10012680" y="548640"/>
-            <a:ext cx="1627632" cy="411480"/>
+            <a:off x="548640" y="1417320"/>
+            <a:ext cx="2011680" cy="1051560"/>
           </a:xfrm>
           <a:prstGeom prst="roundRect">
             <a:avLst>
-              <a:gd name="adj" fmla="val 17778"/>
+              <a:gd name="adj" fmla="val 8696"/>
             </a:avLst>
           </a:prstGeom>
           <a:solidFill>
@@ -9817,8 +9289,8 @@
         </p:nvSpPr>
         <p:spPr>
           <a:xfrm>
-            <a:off x="10012680" y="548640"/>
-            <a:ext cx="1627632" cy="411480"/>
+            <a:off x="685800" y="1417320"/>
+            <a:ext cx="1737360" cy="1051560"/>
           </a:xfrm>
           <a:prstGeom prst="rect">
             <a:avLst/>
@@ -9830,11 +9302,11 @@
           <a:bodyPr wrap="square" lIns="0" tIns="0" rIns="0" bIns="0" rtlCol="0" anchor="ctr"/>
           <a:lstStyle/>
           <a:p>
-            <a:pPr algn="ctr" indent="0" marL="0">
-              <a:buNone/>
-            </a:pPr>
-            <a:r>
-              <a:rPr lang="en-US" sz="1200" b="1" dirty="0">
+            <a:pPr indent="0" marL="0">
+              <a:buNone/>
+            </a:pPr>
+            <a:r>
+              <a:rPr lang="en-US" sz="1300" b="1" dirty="0">
                 <a:solidFill>
                   <a:schemeClr val="accent1"/>
                 </a:solidFill>
@@ -9842,21 +9314,73 @@
                 <a:ea typeface="Courier New" pitchFamily="34" charset="-122"/>
                 <a:cs typeface="Courier New" pitchFamily="34" charset="-120"/>
               </a:rPr>
-              <a:t>M5 · 15 pts</a:t>
-            </a:r>
-            <a:endParaRPr lang="en-US" sz="1200" dirty="0"/>
-          </a:p>
-        </p:txBody>
-      </p:sp>
-      <p:sp>
-        <p:nvSpPr>
-          <p:cNvPr id="5" name="job 01"/>
+              <a:t>01  </a:t>
+            </a:r>
+            <a:pPr indent="0" marL="0">
+              <a:buNone/>
+            </a:pPr>
+            <a:r>
+              <a:rPr lang="en-US" sz="1500" b="1" dirty="0">
+                <a:solidFill>
+                  <a:schemeClr val="tx1"/>
+                </a:solidFill>
+              </a:rPr>
+              <a:t>Build &amp; test</a:t>
+            </a:r>
+            <a:endParaRPr lang="en-US" sz="1300" dirty="0"/>
+          </a:p>
+          <a:p>
+            <a:pPr indent="0" marL="0">
+              <a:buNone/>
+            </a:pPr>
+            <a:r>
+              <a:rPr lang="en-US" sz="1100" dirty="0">
+                <a:solidFill>
+                  <a:schemeClr val="tx2"/>
+                </a:solidFill>
+                <a:latin typeface="Courier New" pitchFamily="34" charset="0"/>
+                <a:ea typeface="Courier New" pitchFamily="34" charset="-122"/>
+                <a:cs typeface="Courier New" pitchFamily="34" charset="-120"/>
+              </a:rPr>
+              <a:t>pytest, npm run build</a:t>
+            </a:r>
+            <a:endParaRPr lang="en-US" sz="1300" dirty="0"/>
+          </a:p>
+        </p:txBody>
+      </p:sp>
+      <p:sp>
+        <p:nvSpPr>
+          <p:cNvPr id="5" name="Shape 3"/>
           <p:cNvSpPr/>
           <p:nvPr/>
         </p:nvSpPr>
         <p:spPr>
           <a:xfrm>
-            <a:off x="548640" y="1417320"/>
+            <a:off x="2587752" y="1943100"/>
+            <a:ext cx="192024" cy="0"/>
+          </a:xfrm>
+          <a:prstGeom prst="line">
+            <a:avLst/>
+          </a:prstGeom>
+          <a:noFill/>
+          <a:ln w="19050">
+            <a:solidFill>
+              <a:schemeClr val="accent1"/>
+            </a:solidFill>
+            <a:prstDash val="solid"/>
+            <a:tailEnd type="triangle"/>
+          </a:ln>
+        </p:spPr>
+      </p:sp>
+      <p:sp>
+        <p:nvSpPr>
+          <p:cNvPr id="6" name="job 02"/>
+          <p:cNvSpPr/>
+          <p:nvPr/>
+        </p:nvSpPr>
+        <p:spPr>
+          <a:xfrm>
+            <a:off x="2807208" y="1417320"/>
             <a:ext cx="2011680" cy="1051560"/>
           </a:xfrm>
           <a:prstGeom prst="roundRect">
@@ -9877,13 +9401,13 @@
       </p:sp>
       <p:sp>
         <p:nvSpPr>
-          <p:cNvPr id="6" name="Text 4"/>
-          <p:cNvSpPr txBox="1"/>
-          <p:nvPr/>
-        </p:nvSpPr>
-        <p:spPr>
-          <a:xfrm>
-            <a:off x="685800" y="1417320"/>
+          <p:cNvPr id="7" name="Text 5"/>
+          <p:cNvSpPr txBox="1"/>
+          <p:nvPr/>
+        </p:nvSpPr>
+        <p:spPr>
+          <a:xfrm>
+            <a:off x="2944368" y="1417320"/>
             <a:ext cx="1737360" cy="1051560"/>
           </a:xfrm>
           <a:prstGeom prst="rect">
@@ -9908,7 +9432,7 @@
                 <a:ea typeface="Courier New" pitchFamily="34" charset="-122"/>
                 <a:cs typeface="Courier New" pitchFamily="34" charset="-120"/>
               </a:rPr>
-              <a:t>01  </a:t>
+              <a:t>02  </a:t>
             </a:r>
             <a:pPr indent="0" marL="0">
               <a:buNone/>
@@ -9919,7 +9443,7 @@
                   <a:schemeClr val="tx1"/>
                 </a:solidFill>
               </a:rPr>
-              <a:t>Build &amp; test</a:t>
+              <a:t>Security checks</a:t>
             </a:r>
             <a:endParaRPr lang="en-US" sz="1300" dirty="0"/>
           </a:p>
@@ -9936,7 +9460,7 @@
                 <a:ea typeface="Courier New" pitchFamily="34" charset="-122"/>
                 <a:cs typeface="Courier New" pitchFamily="34" charset="-120"/>
               </a:rPr>
-              <a:t>pytest, npm run build</a:t>
+              <a:t>gitleaks, bandit, pip-audit</a:t>
             </a:r>
             <a:endParaRPr lang="en-US" sz="1300" dirty="0"/>
           </a:p>
@@ -9944,13 +9468,13 @@
       </p:sp>
       <p:sp>
         <p:nvSpPr>
-          <p:cNvPr id="7" name="Shape 5"/>
+          <p:cNvPr id="8" name="Shape 6"/>
           <p:cNvSpPr/>
           <p:nvPr/>
         </p:nvSpPr>
         <p:spPr>
           <a:xfrm>
-            <a:off x="2587752" y="1943100"/>
+            <a:off x="4846320" y="1943100"/>
             <a:ext cx="192024" cy="0"/>
           </a:xfrm>
           <a:prstGeom prst="line">
@@ -9968,13 +9492,13 @@
       </p:sp>
       <p:sp>
         <p:nvSpPr>
-          <p:cNvPr id="8" name="job 02"/>
+          <p:cNvPr id="9" name="job 03"/>
           <p:cNvSpPr/>
           <p:nvPr/>
         </p:nvSpPr>
         <p:spPr>
           <a:xfrm>
-            <a:off x="2807208" y="1417320"/>
+            <a:off x="5065776" y="1417320"/>
             <a:ext cx="2011680" cy="1051560"/>
           </a:xfrm>
           <a:prstGeom prst="roundRect">
@@ -9995,13 +9519,13 @@
       </p:sp>
       <p:sp>
         <p:nvSpPr>
-          <p:cNvPr id="9" name="Text 7"/>
-          <p:cNvSpPr txBox="1"/>
-          <p:nvPr/>
-        </p:nvSpPr>
-        <p:spPr>
-          <a:xfrm>
-            <a:off x="2944368" y="1417320"/>
+          <p:cNvPr id="10" name="Text 8"/>
+          <p:cNvSpPr txBox="1"/>
+          <p:nvPr/>
+        </p:nvSpPr>
+        <p:spPr>
+          <a:xfrm>
+            <a:off x="5202936" y="1417320"/>
             <a:ext cx="1737360" cy="1051560"/>
           </a:xfrm>
           <a:prstGeom prst="rect">
@@ -10026,7 +9550,7 @@
                 <a:ea typeface="Courier New" pitchFamily="34" charset="-122"/>
                 <a:cs typeface="Courier New" pitchFamily="34" charset="-120"/>
               </a:rPr>
-              <a:t>02  </a:t>
+              <a:t>03  </a:t>
             </a:r>
             <a:pPr indent="0" marL="0">
               <a:buNone/>
@@ -10037,7 +9561,7 @@
                   <a:schemeClr val="tx1"/>
                 </a:solidFill>
               </a:rPr>
-              <a:t>Security checks</a:t>
+              <a:t>Image gate</a:t>
             </a:r>
             <a:endParaRPr lang="en-US" sz="1300" dirty="0"/>
           </a:p>
@@ -10054,7 +9578,7 @@
                 <a:ea typeface="Courier New" pitchFamily="34" charset="-122"/>
                 <a:cs typeface="Courier New" pitchFamily="34" charset="-120"/>
               </a:rPr>
-              <a:t>gitleaks, bandit, pip-audit</a:t>
+              <a:t>docker build + trivy</a:t>
             </a:r>
             <a:endParaRPr lang="en-US" sz="1300" dirty="0"/>
           </a:p>
@@ -10062,13 +9586,13 @@
       </p:sp>
       <p:sp>
         <p:nvSpPr>
-          <p:cNvPr id="10" name="Shape 8"/>
+          <p:cNvPr id="11" name="Shape 9"/>
           <p:cNvSpPr/>
           <p:nvPr/>
         </p:nvSpPr>
         <p:spPr>
           <a:xfrm>
-            <a:off x="4846320" y="1943100"/>
+            <a:off x="7104888" y="1943100"/>
             <a:ext cx="192024" cy="0"/>
           </a:xfrm>
           <a:prstGeom prst="line">
@@ -10086,13 +9610,13 @@
       </p:sp>
       <p:sp>
         <p:nvSpPr>
-          <p:cNvPr id="11" name="job 03"/>
+          <p:cNvPr id="12" name="job 04"/>
           <p:cNvSpPr/>
           <p:nvPr/>
         </p:nvSpPr>
         <p:spPr>
           <a:xfrm>
-            <a:off x="5065776" y="1417320"/>
+            <a:off x="7324344" y="1417320"/>
             <a:ext cx="2011680" cy="1051560"/>
           </a:xfrm>
           <a:prstGeom prst="roundRect">
@@ -10113,13 +9637,13 @@
       </p:sp>
       <p:sp>
         <p:nvSpPr>
-          <p:cNvPr id="12" name="Text 10"/>
-          <p:cNvSpPr txBox="1"/>
-          <p:nvPr/>
-        </p:nvSpPr>
-        <p:spPr>
-          <a:xfrm>
-            <a:off x="5202936" y="1417320"/>
+          <p:cNvPr id="13" name="Text 11"/>
+          <p:cNvSpPr txBox="1"/>
+          <p:nvPr/>
+        </p:nvSpPr>
+        <p:spPr>
+          <a:xfrm>
+            <a:off x="7461504" y="1417320"/>
             <a:ext cx="1737360" cy="1051560"/>
           </a:xfrm>
           <a:prstGeom prst="rect">
@@ -10144,7 +9668,7 @@
                 <a:ea typeface="Courier New" pitchFamily="34" charset="-122"/>
                 <a:cs typeface="Courier New" pitchFamily="34" charset="-120"/>
               </a:rPr>
-              <a:t>03  </a:t>
+              <a:t>04  </a:t>
             </a:r>
             <a:pPr indent="0" marL="0">
               <a:buNone/>
@@ -10155,7 +9679,7 @@
                   <a:schemeClr val="tx1"/>
                 </a:solidFill>
               </a:rPr>
-              <a:t>Image gate</a:t>
+              <a:t>Publish</a:t>
             </a:r>
             <a:endParaRPr lang="en-US" sz="1300" dirty="0"/>
           </a:p>
@@ -10172,7 +9696,7 @@
                 <a:ea typeface="Courier New" pitchFamily="34" charset="-122"/>
                 <a:cs typeface="Courier New" pitchFamily="34" charset="-120"/>
               </a:rPr>
-              <a:t>docker build + trivy</a:t>
+              <a:t>push to GHCR as :sha</a:t>
             </a:r>
             <a:endParaRPr lang="en-US" sz="1300" dirty="0"/>
           </a:p>
@@ -10180,13 +9704,13 @@
       </p:sp>
       <p:sp>
         <p:nvSpPr>
-          <p:cNvPr id="13" name="Shape 11"/>
+          <p:cNvPr id="14" name="Shape 12"/>
           <p:cNvSpPr/>
           <p:nvPr/>
         </p:nvSpPr>
         <p:spPr>
           <a:xfrm>
-            <a:off x="7104888" y="1943100"/>
+            <a:off x="9363456" y="1943100"/>
             <a:ext cx="192024" cy="0"/>
           </a:xfrm>
           <a:prstGeom prst="line">
@@ -10204,13 +9728,13 @@
       </p:sp>
       <p:sp>
         <p:nvSpPr>
-          <p:cNvPr id="14" name="job 04"/>
+          <p:cNvPr id="15" name="job 05"/>
           <p:cNvSpPr/>
           <p:nvPr/>
         </p:nvSpPr>
         <p:spPr>
           <a:xfrm>
-            <a:off x="7324344" y="1417320"/>
+            <a:off x="9582912" y="1417320"/>
             <a:ext cx="2011680" cy="1051560"/>
           </a:xfrm>
           <a:prstGeom prst="roundRect">
@@ -10231,13 +9755,13 @@
       </p:sp>
       <p:sp>
         <p:nvSpPr>
-          <p:cNvPr id="15" name="Text 13"/>
-          <p:cNvSpPr txBox="1"/>
-          <p:nvPr/>
-        </p:nvSpPr>
-        <p:spPr>
-          <a:xfrm>
-            <a:off x="7461504" y="1417320"/>
+          <p:cNvPr id="16" name="Text 14"/>
+          <p:cNvSpPr txBox="1"/>
+          <p:nvPr/>
+        </p:nvSpPr>
+        <p:spPr>
+          <a:xfrm>
+            <a:off x="9720072" y="1417320"/>
             <a:ext cx="1737360" cy="1051560"/>
           </a:xfrm>
           <a:prstGeom prst="rect">
@@ -10262,7 +9786,7 @@
                 <a:ea typeface="Courier New" pitchFamily="34" charset="-122"/>
                 <a:cs typeface="Courier New" pitchFamily="34" charset="-120"/>
               </a:rPr>
-              <a:t>04  </a:t>
+              <a:t>05  </a:t>
             </a:r>
             <a:pPr indent="0" marL="0">
               <a:buNone/>
@@ -10273,7 +9797,7 @@
                   <a:schemeClr val="tx1"/>
                 </a:solidFill>
               </a:rPr>
-              <a:t>Publish</a:t>
+              <a:t>Deploy</a:t>
             </a:r>
             <a:endParaRPr lang="en-US" sz="1300" dirty="0"/>
           </a:p>
@@ -10290,7 +9814,7 @@
                 <a:ea typeface="Courier New" pitchFamily="34" charset="-122"/>
                 <a:cs typeface="Courier New" pitchFamily="34" charset="-120"/>
               </a:rPr>
-              <a:t>push to GHCR as :sha</a:t>
+              <a:t>helm upgrade, rollout</a:t>
             </a:r>
             <a:endParaRPr lang="en-US" sz="1300" dirty="0"/>
           </a:p>
@@ -10298,65 +9822,14 @@
       </p:sp>
       <p:sp>
         <p:nvSpPr>
-          <p:cNvPr id="16" name="Shape 14"/>
-          <p:cNvSpPr/>
-          <p:nvPr/>
-        </p:nvSpPr>
-        <p:spPr>
-          <a:xfrm>
-            <a:off x="9363456" y="1943100"/>
-            <a:ext cx="192024" cy="0"/>
-          </a:xfrm>
-          <a:prstGeom prst="line">
-            <a:avLst/>
-          </a:prstGeom>
-          <a:noFill/>
-          <a:ln w="19050">
-            <a:solidFill>
-              <a:schemeClr val="accent1"/>
-            </a:solidFill>
-            <a:prstDash val="solid"/>
-            <a:tailEnd type="triangle"/>
-          </a:ln>
-        </p:spPr>
-      </p:sp>
-      <p:sp>
-        <p:nvSpPr>
-          <p:cNvPr id="17" name="job 05"/>
-          <p:cNvSpPr/>
-          <p:nvPr/>
-        </p:nvSpPr>
-        <p:spPr>
-          <a:xfrm>
-            <a:off x="9582912" y="1417320"/>
-            <a:ext cx="2011680" cy="1051560"/>
-          </a:xfrm>
-          <a:prstGeom prst="roundRect">
-            <a:avLst>
-              <a:gd name="adj" fmla="val 8696"/>
-            </a:avLst>
-          </a:prstGeom>
-          <a:solidFill>
-            <a:schemeClr val="bg2"/>
-          </a:solidFill>
-          <a:ln w="12700">
-            <a:solidFill>
-              <a:schemeClr val="accent3"/>
-            </a:solidFill>
-            <a:prstDash val="solid"/>
-          </a:ln>
-        </p:spPr>
-      </p:sp>
-      <p:sp>
-        <p:nvSpPr>
-          <p:cNvPr id="18" name="Text 16"/>
-          <p:cNvSpPr txBox="1"/>
-          <p:nvPr/>
-        </p:nvSpPr>
-        <p:spPr>
-          <a:xfrm>
-            <a:off x="9720072" y="1417320"/>
-            <a:ext cx="1737360" cy="1051560"/>
+          <p:cNvPr id="17" name="Text 15"/>
+          <p:cNvSpPr txBox="1"/>
+          <p:nvPr/>
+        </p:nvSpPr>
+        <p:spPr>
+          <a:xfrm>
+            <a:off x="548640" y="2651760"/>
+            <a:ext cx="11091672" cy="411480"/>
           </a:xfrm>
           <a:prstGeom prst="rect">
             <a:avLst/>
@@ -10380,21 +9853,43 @@
                 <a:ea typeface="Courier New" pitchFamily="34" charset="-122"/>
                 <a:cs typeface="Courier New" pitchFamily="34" charset="-120"/>
               </a:rPr>
-              <a:t>05  </a:t>
-            </a:r>
-            <a:pPr indent="0" marL="0">
-              <a:buNone/>
-            </a:pPr>
-            <a:r>
-              <a:rPr lang="en-US" sz="1500" b="1" dirty="0">
-                <a:solidFill>
-                  <a:schemeClr val="tx1"/>
-                </a:solidFill>
-              </a:rPr>
-              <a:t>Deploy</a:t>
+              <a:t>Tag = ${{ github.sha }}   </a:t>
+            </a:r>
+            <a:pPr indent="0" marL="0">
+              <a:buNone/>
+            </a:pPr>
+            <a:r>
+              <a:rPr lang="en-US" sz="1500" dirty="0">
+                <a:solidFill>
+                  <a:schemeClr val="tx2"/>
+                </a:solidFill>
+              </a:rPr>
+              <a:t>Deploy sets the Helm image tag to the commit SHA, so every pod traces back to one commit.</a:t>
             </a:r>
             <a:endParaRPr lang="en-US" sz="1300" dirty="0"/>
           </a:p>
+        </p:txBody>
+      </p:sp>
+      <p:sp>
+        <p:nvSpPr>
+          <p:cNvPr id="18" name="Text 16"/>
+          <p:cNvSpPr txBox="1"/>
+          <p:nvPr/>
+        </p:nvSpPr>
+        <p:spPr>
+          <a:xfrm>
+            <a:off x="548640" y="3182112"/>
+            <a:ext cx="5486400" cy="256032"/>
+          </a:xfrm>
+          <a:prstGeom prst="rect">
+            <a:avLst/>
+          </a:prstGeom>
+          <a:noFill/>
+          <a:ln/>
+        </p:spPr>
+        <p:txBody>
+          <a:bodyPr wrap="square" lIns="0" tIns="0" rIns="0" bIns="0" rtlCol="0" anchor="ctr"/>
+          <a:lstStyle/>
           <a:p>
             <a:pPr indent="0" marL="0">
               <a:buNone/>
@@ -10408,95 +9903,6 @@
                 <a:ea typeface="Courier New" pitchFamily="34" charset="-122"/>
                 <a:cs typeface="Courier New" pitchFamily="34" charset="-120"/>
               </a:rPr>
-              <a:t>helm upgrade, rollout</a:t>
-            </a:r>
-            <a:endParaRPr lang="en-US" sz="1300" dirty="0"/>
-          </a:p>
-        </p:txBody>
-      </p:sp>
-      <p:sp>
-        <p:nvSpPr>
-          <p:cNvPr id="19" name="Text 17"/>
-          <p:cNvSpPr txBox="1"/>
-          <p:nvPr/>
-        </p:nvSpPr>
-        <p:spPr>
-          <a:xfrm>
-            <a:off x="548640" y="2651760"/>
-            <a:ext cx="11091672" cy="411480"/>
-          </a:xfrm>
-          <a:prstGeom prst="rect">
-            <a:avLst/>
-          </a:prstGeom>
-          <a:noFill/>
-          <a:ln/>
-        </p:spPr>
-        <p:txBody>
-          <a:bodyPr wrap="square" lIns="0" tIns="0" rIns="0" bIns="0" rtlCol="0" anchor="ctr"/>
-          <a:lstStyle/>
-          <a:p>
-            <a:pPr indent="0" marL="0">
-              <a:buNone/>
-            </a:pPr>
-            <a:r>
-              <a:rPr lang="en-US" sz="1300" b="1" dirty="0">
-                <a:solidFill>
-                  <a:schemeClr val="accent1"/>
-                </a:solidFill>
-                <a:latin typeface="Courier New" pitchFamily="34" charset="0"/>
-                <a:ea typeface="Courier New" pitchFamily="34" charset="-122"/>
-                <a:cs typeface="Courier New" pitchFamily="34" charset="-120"/>
-              </a:rPr>
-              <a:t>Tag = ${{ github.sha }}   </a:t>
-            </a:r>
-            <a:pPr indent="0" marL="0">
-              <a:buNone/>
-            </a:pPr>
-            <a:r>
-              <a:rPr lang="en-US" sz="1500" dirty="0">
-                <a:solidFill>
-                  <a:schemeClr val="tx2"/>
-                </a:solidFill>
-              </a:rPr>
-              <a:t>Deploy sets the Helm image tag to the commit SHA, so every pod traces back to one commit.</a:t>
-            </a:r>
-            <a:endParaRPr lang="en-US" sz="1300" dirty="0"/>
-          </a:p>
-        </p:txBody>
-      </p:sp>
-      <p:sp>
-        <p:nvSpPr>
-          <p:cNvPr id="20" name="Text 18"/>
-          <p:cNvSpPr txBox="1"/>
-          <p:nvPr/>
-        </p:nvSpPr>
-        <p:spPr>
-          <a:xfrm>
-            <a:off x="548640" y="3182112"/>
-            <a:ext cx="5486400" cy="256032"/>
-          </a:xfrm>
-          <a:prstGeom prst="rect">
-            <a:avLst/>
-          </a:prstGeom>
-          <a:noFill/>
-          <a:ln/>
-        </p:spPr>
-        <p:txBody>
-          <a:bodyPr wrap="square" lIns="0" tIns="0" rIns="0" bIns="0" rtlCol="0" anchor="ctr"/>
-          <a:lstStyle/>
-          <a:p>
-            <a:pPr indent="0" marL="0">
-              <a:buNone/>
-            </a:pPr>
-            <a:r>
-              <a:rPr lang="en-US" sz="1100" dirty="0">
-                <a:solidFill>
-                  <a:schemeClr val="tx2"/>
-                </a:solidFill>
-                <a:latin typeface="Courier New" pitchFamily="34" charset="0"/>
-                <a:ea typeface="Courier New" pitchFamily="34" charset="-122"/>
-                <a:cs typeface="Courier New" pitchFamily="34" charset="-120"/>
-              </a:rPr>
               <a:t>github actions: green runs on main</a:t>
             </a:r>
             <a:endParaRPr lang="en-US" sz="1100" dirty="0"/>
@@ -10505,7 +9911,7 @@
       </p:sp>
       <p:sp>
         <p:nvSpPr>
-          <p:cNvPr id="21" name="frame actions.jpg"/>
+          <p:cNvPr id="19" name="frame actions.jpg"/>
           <p:cNvSpPr/>
           <p:nvPr/>
         </p:nvSpPr>
@@ -10530,7 +9936,7 @@
       </p:sp>
       <p:pic>
         <p:nvPicPr>
-          <p:cNvPr id="22" name="Image 0" descr="actions.jpg">    </p:cNvPr>
+          <p:cNvPr id="20" name="Image 0" descr="actions.jpg">    </p:cNvPr>
           <p:cNvPicPr>
             <a:picLocks noChangeAspect="1"/>
           </p:cNvPicPr>
@@ -10554,7 +9960,7 @@
       </p:pic>
       <p:sp>
         <p:nvSpPr>
-          <p:cNvPr id="23" name="Text 20"/>
+          <p:cNvPr id="21" name="Text 18"/>
           <p:cNvSpPr txBox="1"/>
           <p:nvPr/>
         </p:nvSpPr>
@@ -10593,7 +9999,7 @@
       </p:sp>
       <p:sp>
         <p:nvSpPr>
-          <p:cNvPr id="24" name="frame ghcr2.jpg"/>
+          <p:cNvPr id="22" name="frame ghcr2.jpg"/>
           <p:cNvSpPr/>
           <p:nvPr/>
         </p:nvSpPr>
@@ -10618,7 +10024,7 @@
       </p:sp>
       <p:pic>
         <p:nvPicPr>
-          <p:cNvPr id="25" name="Image 1" descr="ghcr2.jpg">    </p:cNvPr>
+          <p:cNvPr id="23" name="Image 1" descr="ghcr2.jpg">    </p:cNvPr>
           <p:cNvPicPr>
             <a:picLocks noChangeAspect="1"/>
           </p:cNvPicPr>
@@ -10750,18 +10156,106 @@
       </p:sp>
       <p:sp>
         <p:nvSpPr>
-          <p:cNvPr id="3" name="module chip"/>
+          <p:cNvPr id="3" name="Text 1"/>
+          <p:cNvSpPr txBox="1"/>
+          <p:nvPr/>
+        </p:nvSpPr>
+        <p:spPr>
+          <a:xfrm>
+            <a:off x="548640" y="1234440"/>
+            <a:ext cx="5486400" cy="256032"/>
+          </a:xfrm>
+          <a:prstGeom prst="rect">
+            <a:avLst/>
+          </a:prstGeom>
+          <a:noFill/>
+          <a:ln/>
+        </p:spPr>
+        <p:txBody>
+          <a:bodyPr wrap="square" lIns="0" tIns="0" rIns="0" bIns="0" rtlCol="0" anchor="ctr"/>
+          <a:lstStyle/>
+          <a:p>
+            <a:pPr indent="0" marL="0">
+              <a:buNone/>
+            </a:pPr>
+            <a:r>
+              <a:rPr lang="en-US" sz="1100" dirty="0">
+                <a:solidFill>
+                  <a:schemeClr val="tx2"/>
+                </a:solidFill>
+                <a:latin typeface="Courier New" pitchFamily="34" charset="0"/>
+                <a:ea typeface="Courier New" pitchFamily="34" charset="-122"/>
+                <a:cs typeface="Courier New" pitchFamily="34" charset="-120"/>
+              </a:rPr>
+              <a:t>job: Docker Build &amp; Vulnerability Scan Gate</a:t>
+            </a:r>
+            <a:endParaRPr lang="en-US" sz="1100" dirty="0"/>
+          </a:p>
+        </p:txBody>
+      </p:sp>
+      <p:sp>
+        <p:nvSpPr>
+          <p:cNvPr id="4" name="frame trivy.jpg"/>
           <p:cNvSpPr/>
           <p:nvPr/>
         </p:nvSpPr>
         <p:spPr>
           <a:xfrm>
-            <a:off x="10012680" y="548640"/>
-            <a:ext cx="1627632" cy="411480"/>
+            <a:off x="521208" y="1527048"/>
+            <a:ext cx="6458683" cy="4672584"/>
+          </a:xfrm>
+          <a:prstGeom prst="rect">
+            <a:avLst/>
+          </a:prstGeom>
+          <a:solidFill>
+            <a:schemeClr val="accent3"/>
+          </a:solidFill>
+          <a:ln w="9525">
+            <a:solidFill>
+              <a:schemeClr val="accent3"/>
+            </a:solidFill>
+            <a:prstDash val="solid"/>
+          </a:ln>
+        </p:spPr>
+      </p:sp>
+      <p:pic>
+        <p:nvPicPr>
+          <p:cNvPr id="5" name="Image 0" descr="trivy.jpg">    </p:cNvPr>
+          <p:cNvPicPr>
+            <a:picLocks noChangeAspect="1"/>
+          </p:cNvPicPr>
+          <p:nvPr/>
+        </p:nvPicPr>
+        <p:blipFill>
+          <a:blip r:embed="rId1"/>
+          <a:stretch>
+            <a:fillRect/>
+          </a:stretch>
+        </p:blipFill>
+        <p:spPr>
+          <a:xfrm>
+            <a:off x="548640" y="1554480"/>
+            <a:ext cx="6403819" cy="4617720"/>
+          </a:xfrm>
+          <a:prstGeom prst="rect">
+            <a:avLst/>
+          </a:prstGeom>
+        </p:spPr>
+      </p:pic>
+      <p:sp>
+        <p:nvSpPr>
+          <p:cNvPr id="6" name="trivy config"/>
+          <p:cNvSpPr/>
+          <p:nvPr/>
+        </p:nvSpPr>
+        <p:spPr>
+          <a:xfrm>
+            <a:off x="7269480" y="1554480"/>
+            <a:ext cx="4370832" cy="1417320"/>
           </a:xfrm>
           <a:prstGeom prst="roundRect">
             <a:avLst>
-              <a:gd name="adj" fmla="val 17778"/>
+              <a:gd name="adj" fmla="val 6452"/>
             </a:avLst>
           </a:prstGeom>
           <a:solidFill>
@@ -10777,14 +10271,14 @@
       </p:sp>
       <p:sp>
         <p:nvSpPr>
-          <p:cNvPr id="4" name="Text 2"/>
-          <p:cNvSpPr txBox="1"/>
-          <p:nvPr/>
-        </p:nvSpPr>
-        <p:spPr>
-          <a:xfrm>
-            <a:off x="10012680" y="548640"/>
-            <a:ext cx="1627632" cy="411480"/>
+          <p:cNvPr id="7" name="Text 4"/>
+          <p:cNvSpPr txBox="1"/>
+          <p:nvPr/>
+        </p:nvSpPr>
+        <p:spPr>
+          <a:xfrm>
+            <a:off x="7498080" y="1554480"/>
+            <a:ext cx="3913632" cy="1417320"/>
           </a:xfrm>
           <a:prstGeom prst="rect">
             <a:avLst/>
@@ -10796,159 +10290,39 @@
           <a:bodyPr wrap="square" lIns="0" tIns="0" rIns="0" bIns="0" rtlCol="0" anchor="ctr"/>
           <a:lstStyle/>
           <a:p>
-            <a:pPr algn="ctr" indent="0" marL="0">
-              <a:buNone/>
-            </a:pPr>
-            <a:r>
-              <a:rPr lang="en-US" sz="1200" b="1" dirty="0">
-                <a:solidFill>
-                  <a:schemeClr val="accent1"/>
+            <a:pPr indent="0" marL="0">
+              <a:buNone/>
+            </a:pPr>
+            <a:r>
+              <a:rPr lang="en-US" sz="1300" dirty="0">
+                <a:solidFill>
+                  <a:schemeClr val="tx1"/>
                 </a:solidFill>
                 <a:latin typeface="Courier New" pitchFamily="34" charset="0"/>
                 <a:ea typeface="Courier New" pitchFamily="34" charset="-122"/>
                 <a:cs typeface="Courier New" pitchFamily="34" charset="-120"/>
               </a:rPr>
-              <a:t>M6 · 5 pts</a:t>
-            </a:r>
-            <a:endParaRPr lang="en-US" sz="1200" dirty="0"/>
-          </a:p>
-        </p:txBody>
-      </p:sp>
-      <p:sp>
-        <p:nvSpPr>
-          <p:cNvPr id="5" name="Text 3"/>
-          <p:cNvSpPr txBox="1"/>
-          <p:nvPr/>
-        </p:nvSpPr>
-        <p:spPr>
-          <a:xfrm>
-            <a:off x="548640" y="1234440"/>
-            <a:ext cx="5486400" cy="256032"/>
-          </a:xfrm>
-          <a:prstGeom prst="rect">
-            <a:avLst/>
-          </a:prstGeom>
-          <a:noFill/>
-          <a:ln/>
-        </p:spPr>
-        <p:txBody>
-          <a:bodyPr wrap="square" lIns="0" tIns="0" rIns="0" bIns="0" rtlCol="0" anchor="ctr"/>
-          <a:lstStyle/>
-          <a:p>
-            <a:pPr indent="0" marL="0">
-              <a:buNone/>
-            </a:pPr>
-            <a:r>
-              <a:rPr lang="en-US" sz="1100" dirty="0">
-                <a:solidFill>
-                  <a:schemeClr val="tx2"/>
+              <a:t>severity: 'CRITICAL,HIGH'</a:t>
+            </a:r>
+            <a:endParaRPr lang="en-US" sz="1300" dirty="0"/>
+          </a:p>
+          <a:p>
+            <a:pPr indent="0" marL="0">
+              <a:buNone/>
+            </a:pPr>
+            <a:r>
+              <a:rPr lang="en-US" sz="1300" dirty="0">
+                <a:solidFill>
+                  <a:schemeClr val="tx1"/>
                 </a:solidFill>
                 <a:latin typeface="Courier New" pitchFamily="34" charset="0"/>
                 <a:ea typeface="Courier New" pitchFamily="34" charset="-122"/>
                 <a:cs typeface="Courier New" pitchFamily="34" charset="-120"/>
               </a:rPr>
-              <a:t>job: Docker Build &amp; Vulnerability Scan Gate</a:t>
-            </a:r>
-            <a:endParaRPr lang="en-US" sz="1100" dirty="0"/>
-          </a:p>
-        </p:txBody>
-      </p:sp>
-      <p:sp>
-        <p:nvSpPr>
-          <p:cNvPr id="6" name="frame trivy.jpg"/>
-          <p:cNvSpPr/>
-          <p:nvPr/>
-        </p:nvSpPr>
-        <p:spPr>
-          <a:xfrm>
-            <a:off x="521208" y="1527048"/>
-            <a:ext cx="6458683" cy="4672584"/>
-          </a:xfrm>
-          <a:prstGeom prst="rect">
-            <a:avLst/>
-          </a:prstGeom>
-          <a:solidFill>
-            <a:schemeClr val="accent3"/>
-          </a:solidFill>
-          <a:ln w="9525">
-            <a:solidFill>
-              <a:schemeClr val="accent3"/>
-            </a:solidFill>
-            <a:prstDash val="solid"/>
-          </a:ln>
-        </p:spPr>
-      </p:sp>
-      <p:pic>
-        <p:nvPicPr>
-          <p:cNvPr id="7" name="Image 0" descr="trivy.jpg">    </p:cNvPr>
-          <p:cNvPicPr>
-            <a:picLocks noChangeAspect="1"/>
-          </p:cNvPicPr>
-          <p:nvPr/>
-        </p:nvPicPr>
-        <p:blipFill>
-          <a:blip r:embed="rId1"/>
-          <a:stretch>
-            <a:fillRect/>
-          </a:stretch>
-        </p:blipFill>
-        <p:spPr>
-          <a:xfrm>
-            <a:off x="548640" y="1554480"/>
-            <a:ext cx="6403819" cy="4617720"/>
-          </a:xfrm>
-          <a:prstGeom prst="rect">
-            <a:avLst/>
-          </a:prstGeom>
-        </p:spPr>
-      </p:pic>
-      <p:sp>
-        <p:nvSpPr>
-          <p:cNvPr id="8" name="trivy config"/>
-          <p:cNvSpPr/>
-          <p:nvPr/>
-        </p:nvSpPr>
-        <p:spPr>
-          <a:xfrm>
-            <a:off x="7269480" y="1554480"/>
-            <a:ext cx="4370832" cy="1417320"/>
-          </a:xfrm>
-          <a:prstGeom prst="roundRect">
-            <a:avLst>
-              <a:gd name="adj" fmla="val 6452"/>
-            </a:avLst>
-          </a:prstGeom>
-          <a:solidFill>
-            <a:schemeClr val="bg2"/>
-          </a:solidFill>
-          <a:ln w="12700">
-            <a:solidFill>
-              <a:schemeClr val="accent3"/>
-            </a:solidFill>
-            <a:prstDash val="solid"/>
-          </a:ln>
-        </p:spPr>
-      </p:sp>
-      <p:sp>
-        <p:nvSpPr>
-          <p:cNvPr id="9" name="Text 6"/>
-          <p:cNvSpPr txBox="1"/>
-          <p:nvPr/>
-        </p:nvSpPr>
-        <p:spPr>
-          <a:xfrm>
-            <a:off x="7498080" y="1554480"/>
-            <a:ext cx="3913632" cy="1417320"/>
-          </a:xfrm>
-          <a:prstGeom prst="rect">
-            <a:avLst/>
-          </a:prstGeom>
-          <a:noFill/>
-          <a:ln/>
-        </p:spPr>
-        <p:txBody>
-          <a:bodyPr wrap="square" lIns="0" tIns="0" rIns="0" bIns="0" rtlCol="0" anchor="ctr"/>
-          <a:lstStyle/>
+              <a:t>exit-code: '1'</a:t>
+            </a:r>
+            <a:endParaRPr lang="en-US" sz="1300" dirty="0"/>
+          </a:p>
           <a:p>
             <a:pPr indent="0" marL="0">
               <a:buNone/>
@@ -10962,7 +10336,7 @@
                 <a:ea typeface="Courier New" pitchFamily="34" charset="-122"/>
                 <a:cs typeface="Courier New" pitchFamily="34" charset="-120"/>
               </a:rPr>
-              <a:t>severity: 'CRITICAL,HIGH'</a:t>
+              <a:t>ignore-unfixed: true</a:t>
             </a:r>
             <a:endParaRPr lang="en-US" sz="1300" dirty="0"/>
           </a:p>
@@ -10979,49 +10353,15 @@
                 <a:ea typeface="Courier New" pitchFamily="34" charset="-122"/>
                 <a:cs typeface="Courier New" pitchFamily="34" charset="-120"/>
               </a:rPr>
-              <a:t>exit-code: '1'</a:t>
+              <a:t>vuln-type: 'os,library'</a:t>
             </a:r>
             <a:endParaRPr lang="en-US" sz="1300" dirty="0"/>
           </a:p>
-          <a:p>
-            <a:pPr indent="0" marL="0">
-              <a:buNone/>
-            </a:pPr>
-            <a:r>
-              <a:rPr lang="en-US" sz="1300" dirty="0">
-                <a:solidFill>
-                  <a:schemeClr val="tx1"/>
-                </a:solidFill>
-                <a:latin typeface="Courier New" pitchFamily="34" charset="0"/>
-                <a:ea typeface="Courier New" pitchFamily="34" charset="-122"/>
-                <a:cs typeface="Courier New" pitchFamily="34" charset="-120"/>
-              </a:rPr>
-              <a:t>ignore-unfixed: true</a:t>
-            </a:r>
-            <a:endParaRPr lang="en-US" sz="1300" dirty="0"/>
-          </a:p>
-          <a:p>
-            <a:pPr indent="0" marL="0">
-              <a:buNone/>
-            </a:pPr>
-            <a:r>
-              <a:rPr lang="en-US" sz="1300" dirty="0">
-                <a:solidFill>
-                  <a:schemeClr val="tx1"/>
-                </a:solidFill>
-                <a:latin typeface="Courier New" pitchFamily="34" charset="0"/>
-                <a:ea typeface="Courier New" pitchFamily="34" charset="-122"/>
-                <a:cs typeface="Courier New" pitchFamily="34" charset="-120"/>
-              </a:rPr>
-              <a:t>vuln-type: 'os,library'</a:t>
-            </a:r>
-            <a:endParaRPr lang="en-US" sz="1300" dirty="0"/>
-          </a:p>
-        </p:txBody>
-      </p:sp>
-      <p:sp>
-        <p:nvSpPr>
-          <p:cNvPr id="10" name="Text 7"/>
+        </p:txBody>
+      </p:sp>
+      <p:sp>
+        <p:nvSpPr>
+          <p:cNvPr id="8" name="Text 5"/>
           <p:cNvSpPr txBox="1"/>
           <p:nvPr/>
         </p:nvSpPr>
@@ -11060,7 +10400,7 @@
       </p:sp>
       <p:sp>
         <p:nvSpPr>
-          <p:cNvPr id="11" name="Text 8"/>
+          <p:cNvPr id="9" name="Text 6"/>
           <p:cNvSpPr txBox="1"/>
           <p:nvPr/>
         </p:nvSpPr>
@@ -11096,7 +10436,7 @@
       </p:sp>
       <p:sp>
         <p:nvSpPr>
-          <p:cNvPr id="12" name="tool gitleaks"/>
+          <p:cNvPr id="10" name="tool gitleaks"/>
           <p:cNvSpPr/>
           <p:nvPr/>
         </p:nvSpPr>
@@ -11123,7 +10463,7 @@
       </p:sp>
       <p:sp>
         <p:nvSpPr>
-          <p:cNvPr id="13" name="Text 10"/>
+          <p:cNvPr id="11" name="Text 8"/>
           <p:cNvSpPr txBox="1"/>
           <p:nvPr/>
         </p:nvSpPr>
@@ -11162,7 +10502,7 @@
       </p:sp>
       <p:sp>
         <p:nvSpPr>
-          <p:cNvPr id="14" name="tool bandit"/>
+          <p:cNvPr id="12" name="tool bandit"/>
           <p:cNvSpPr/>
           <p:nvPr/>
         </p:nvSpPr>
@@ -11189,7 +10529,7 @@
       </p:sp>
       <p:sp>
         <p:nvSpPr>
-          <p:cNvPr id="15" name="Text 12"/>
+          <p:cNvPr id="13" name="Text 10"/>
           <p:cNvSpPr txBox="1"/>
           <p:nvPr/>
         </p:nvSpPr>
@@ -11228,7 +10568,7 @@
       </p:sp>
       <p:sp>
         <p:nvSpPr>
-          <p:cNvPr id="16" name="tool pip-audit"/>
+          <p:cNvPr id="14" name="tool pip-audit"/>
           <p:cNvSpPr/>
           <p:nvPr/>
         </p:nvSpPr>
@@ -11255,7 +10595,7 @@
       </p:sp>
       <p:sp>
         <p:nvSpPr>
-          <p:cNvPr id="17" name="Text 14"/>
+          <p:cNvPr id="15" name="Text 12"/>
           <p:cNvSpPr txBox="1"/>
           <p:nvPr/>
         </p:nvSpPr>
@@ -11294,7 +10634,7 @@
       </p:sp>
       <p:sp>
         <p:nvSpPr>
-          <p:cNvPr id="18" name="tool npm audit"/>
+          <p:cNvPr id="16" name="tool npm audit"/>
           <p:cNvSpPr/>
           <p:nvPr/>
         </p:nvSpPr>
@@ -11321,7 +10661,7 @@
       </p:sp>
       <p:sp>
         <p:nvSpPr>
-          <p:cNvPr id="19" name="Text 16"/>
+          <p:cNvPr id="17" name="Text 14"/>
           <p:cNvSpPr txBox="1"/>
           <p:nvPr/>
         </p:nvSpPr>
@@ -11360,7 +10700,7 @@
       </p:sp>
       <p:sp>
         <p:nvSpPr>
-          <p:cNvPr id="20" name="Text 17"/>
+          <p:cNvPr id="18" name="Text 15"/>
           <p:cNvSpPr txBox="1"/>
           <p:nvPr/>
         </p:nvSpPr>
@@ -11504,18 +10844,18 @@
       </p:sp>
       <p:sp>
         <p:nvSpPr>
-          <p:cNvPr id="3" name="module chip"/>
+          <p:cNvPr id="3" name="vpc"/>
           <p:cNvSpPr/>
           <p:nvPr/>
         </p:nvSpPr>
         <p:spPr>
           <a:xfrm>
-            <a:off x="10012680" y="548640"/>
-            <a:ext cx="1627632" cy="411480"/>
+            <a:off x="548640" y="1417320"/>
+            <a:ext cx="5532120" cy="4251960"/>
           </a:xfrm>
           <a:prstGeom prst="roundRect">
             <a:avLst>
-              <a:gd name="adj" fmla="val 17778"/>
+              <a:gd name="adj" fmla="val 2151"/>
             </a:avLst>
           </a:prstGeom>
           <a:solidFill>
@@ -11537,8 +10877,8 @@
         </p:nvSpPr>
         <p:spPr>
           <a:xfrm>
-            <a:off x="10012680" y="548640"/>
-            <a:ext cx="1627632" cy="411480"/>
+            <a:off x="777240" y="1554480"/>
+            <a:ext cx="5029200" cy="256032"/>
           </a:xfrm>
           <a:prstGeom prst="rect">
             <a:avLst/>
@@ -11550,61 +10890,34 @@
           <a:bodyPr wrap="square" lIns="0" tIns="0" rIns="0" bIns="0" rtlCol="0" anchor="ctr"/>
           <a:lstStyle/>
           <a:p>
-            <a:pPr algn="ctr" indent="0" marL="0">
-              <a:buNone/>
-            </a:pPr>
-            <a:r>
-              <a:rPr lang="en-US" sz="1200" b="1" dirty="0">
-                <a:solidFill>
-                  <a:schemeClr val="accent1"/>
+            <a:pPr indent="0" marL="0">
+              <a:buNone/>
+            </a:pPr>
+            <a:r>
+              <a:rPr lang="en-US" sz="1100" dirty="0">
+                <a:solidFill>
+                  <a:schemeClr val="tx2"/>
                 </a:solidFill>
                 <a:latin typeface="Courier New" pitchFamily="34" charset="0"/>
                 <a:ea typeface="Courier New" pitchFamily="34" charset="-122"/>
                 <a:cs typeface="Courier New" pitchFamily="34" charset="-120"/>
               </a:rPr>
-              <a:t>M7 · 15 pts</a:t>
-            </a:r>
-            <a:endParaRPr lang="en-US" sz="1200" dirty="0"/>
-          </a:p>
-        </p:txBody>
-      </p:sp>
-      <p:sp>
-        <p:nvSpPr>
-          <p:cNvPr id="5" name="vpc"/>
-          <p:cNvSpPr/>
-          <p:nvPr/>
-        </p:nvSpPr>
-        <p:spPr>
-          <a:xfrm>
-            <a:off x="548640" y="1417320"/>
-            <a:ext cx="5532120" cy="4251960"/>
-          </a:xfrm>
-          <a:prstGeom prst="roundRect">
-            <a:avLst>
-              <a:gd name="adj" fmla="val 2151"/>
-            </a:avLst>
-          </a:prstGeom>
-          <a:solidFill>
-            <a:schemeClr val="bg2"/>
-          </a:solidFill>
-          <a:ln w="12700">
-            <a:solidFill>
-              <a:schemeClr val="accent3"/>
-            </a:solidFill>
-            <a:prstDash val="solid"/>
-          </a:ln>
-        </p:spPr>
-      </p:sp>
-      <p:sp>
-        <p:nvSpPr>
-          <p:cNvPr id="6" name="Text 4"/>
-          <p:cNvSpPr txBox="1"/>
-          <p:nvPr/>
-        </p:nvSpPr>
-        <p:spPr>
-          <a:xfrm>
-            <a:off x="777240" y="1554480"/>
-            <a:ext cx="5029200" cy="256032"/>
+              <a:t>vpc 10.20.0.0/16  /  ap-south-1</a:t>
+            </a:r>
+            <a:endParaRPr lang="en-US" sz="1100" dirty="0"/>
+          </a:p>
+        </p:txBody>
+      </p:sp>
+      <p:sp>
+        <p:nvSpPr>
+          <p:cNvPr id="5" name="Text 3"/>
+          <p:cNvSpPr txBox="1"/>
+          <p:nvPr/>
+        </p:nvSpPr>
+        <p:spPr>
+          <a:xfrm>
+            <a:off x="777240" y="1920240"/>
+            <a:ext cx="2377440" cy="256032"/>
           </a:xfrm>
           <a:prstGeom prst="rect">
             <a:avLst/>
@@ -11620,15 +10933,15 @@
               <a:buNone/>
             </a:pPr>
             <a:r>
-              <a:rPr lang="en-US" sz="1100" dirty="0">
-                <a:solidFill>
-                  <a:schemeClr val="tx2"/>
+              <a:rPr lang="en-US" sz="1100" b="1" dirty="0">
+                <a:solidFill>
+                  <a:schemeClr val="accent1"/>
                 </a:solidFill>
                 <a:latin typeface="Courier New" pitchFamily="34" charset="0"/>
                 <a:ea typeface="Courier New" pitchFamily="34" charset="-122"/>
                 <a:cs typeface="Courier New" pitchFamily="34" charset="-120"/>
               </a:rPr>
-              <a:t>vpc 10.20.0.0/16  /  ap-south-1</a:t>
+              <a:t>ap-south-1a</a:t>
             </a:r>
             <a:endParaRPr lang="en-US" sz="1100" dirty="0"/>
           </a:p>
@@ -11636,46 +10949,7 @@
       </p:sp>
       <p:sp>
         <p:nvSpPr>
-          <p:cNvPr id="7" name="Text 5"/>
-          <p:cNvSpPr txBox="1"/>
-          <p:nvPr/>
-        </p:nvSpPr>
-        <p:spPr>
-          <a:xfrm>
-            <a:off x="777240" y="1920240"/>
-            <a:ext cx="2377440" cy="256032"/>
-          </a:xfrm>
-          <a:prstGeom prst="rect">
-            <a:avLst/>
-          </a:prstGeom>
-          <a:noFill/>
-          <a:ln/>
-        </p:spPr>
-        <p:txBody>
-          <a:bodyPr wrap="square" lIns="0" tIns="0" rIns="0" bIns="0" rtlCol="0" anchor="ctr"/>
-          <a:lstStyle/>
-          <a:p>
-            <a:pPr indent="0" marL="0">
-              <a:buNone/>
-            </a:pPr>
-            <a:r>
-              <a:rPr lang="en-US" sz="1100" b="1" dirty="0">
-                <a:solidFill>
-                  <a:schemeClr val="accent1"/>
-                </a:solidFill>
-                <a:latin typeface="Courier New" pitchFamily="34" charset="0"/>
-                <a:ea typeface="Courier New" pitchFamily="34" charset="-122"/>
-                <a:cs typeface="Courier New" pitchFamily="34" charset="-120"/>
-              </a:rPr>
-              <a:t>ap-south-1a</a:t>
-            </a:r>
-            <a:endParaRPr lang="en-US" sz="1100" dirty="0"/>
-          </a:p>
-        </p:txBody>
-      </p:sp>
-      <p:sp>
-        <p:nvSpPr>
-          <p:cNvPr id="8" name="node public subnet"/>
+          <p:cNvPr id="6" name="node public subnet"/>
           <p:cNvSpPr/>
           <p:nvPr/>
         </p:nvSpPr>
@@ -11702,7 +10976,7 @@
       </p:sp>
       <p:sp>
         <p:nvSpPr>
-          <p:cNvPr id="9" name="Text 7"/>
+          <p:cNvPr id="7" name="Text 5"/>
           <p:cNvSpPr txBox="1"/>
           <p:nvPr/>
         </p:nvSpPr>
@@ -11755,7 +11029,7 @@
       </p:sp>
       <p:sp>
         <p:nvSpPr>
-          <p:cNvPr id="10" name="node private subnet"/>
+          <p:cNvPr id="8" name="node private subnet"/>
           <p:cNvSpPr/>
           <p:nvPr/>
         </p:nvSpPr>
@@ -11782,7 +11056,7 @@
       </p:sp>
       <p:sp>
         <p:nvSpPr>
-          <p:cNvPr id="11" name="Text 9"/>
+          <p:cNvPr id="9" name="Text 7"/>
           <p:cNvSpPr txBox="1"/>
           <p:nvPr/>
         </p:nvSpPr>
@@ -11835,7 +11109,7 @@
       </p:sp>
       <p:sp>
         <p:nvSpPr>
-          <p:cNvPr id="12" name="Text 10"/>
+          <p:cNvPr id="10" name="Text 8"/>
           <p:cNvSpPr txBox="1"/>
           <p:nvPr/>
         </p:nvSpPr>
@@ -11874,7 +11148,7 @@
       </p:sp>
       <p:sp>
         <p:nvSpPr>
-          <p:cNvPr id="13" name="node public subnet"/>
+          <p:cNvPr id="11" name="node public subnet"/>
           <p:cNvSpPr/>
           <p:nvPr/>
         </p:nvSpPr>
@@ -11901,7 +11175,7 @@
       </p:sp>
       <p:sp>
         <p:nvSpPr>
-          <p:cNvPr id="14" name="Text 12"/>
+          <p:cNvPr id="12" name="Text 10"/>
           <p:cNvSpPr txBox="1"/>
           <p:nvPr/>
         </p:nvSpPr>
@@ -11954,7 +11228,7 @@
       </p:sp>
       <p:sp>
         <p:nvSpPr>
-          <p:cNvPr id="15" name="node private subnet"/>
+          <p:cNvPr id="13" name="node private subnet"/>
           <p:cNvSpPr/>
           <p:nvPr/>
         </p:nvSpPr>
@@ -11981,7 +11255,7 @@
       </p:sp>
       <p:sp>
         <p:nvSpPr>
-          <p:cNvPr id="16" name="Text 14"/>
+          <p:cNvPr id="14" name="Text 12"/>
           <p:cNvSpPr txBox="1"/>
           <p:nvPr/>
         </p:nvSpPr>
@@ -12034,7 +11308,7 @@
       </p:sp>
       <p:sp>
         <p:nvSpPr>
-          <p:cNvPr id="17" name="node EKS 1.31  ·  managed node group"/>
+          <p:cNvPr id="15" name="node EKS 1.31  ·  managed node group"/>
           <p:cNvSpPr/>
           <p:nvPr/>
         </p:nvSpPr>
@@ -12061,7 +11335,7 @@
       </p:sp>
       <p:sp>
         <p:nvSpPr>
-          <p:cNvPr id="18" name="Text 16"/>
+          <p:cNvPr id="16" name="Text 14"/>
           <p:cNvSpPr txBox="1"/>
           <p:nvPr/>
         </p:nvSpPr>
@@ -12131,7 +11405,7 @@
       </p:sp>
       <p:sp>
         <p:nvSpPr>
-          <p:cNvPr id="19" name="Text 17"/>
+          <p:cNvPr id="17" name="Text 15"/>
           <p:cNvSpPr txBox="1"/>
           <p:nvPr/>
         </p:nvSpPr>
@@ -12167,7 +11441,7 @@
       </p:sp>
       <p:sp>
         <p:nvSpPr>
-          <p:cNvPr id="20" name="Text 18"/>
+          <p:cNvPr id="18" name="Text 16"/>
           <p:cNvSpPr txBox="1"/>
           <p:nvPr/>
         </p:nvSpPr>
@@ -12206,7 +11480,7 @@
       </p:sp>
       <p:sp>
         <p:nvSpPr>
-          <p:cNvPr id="21" name="frame plan.jpg"/>
+          <p:cNvPr id="19" name="frame plan.jpg"/>
           <p:cNvSpPr/>
           <p:nvPr/>
         </p:nvSpPr>
@@ -12231,7 +11505,7 @@
       </p:sp>
       <p:pic>
         <p:nvPicPr>
-          <p:cNvPr id="22" name="Image 0" descr="plan.jpg">    </p:cNvPr>
+          <p:cNvPr id="20" name="Image 0" descr="plan.jpg">    </p:cNvPr>
           <p:cNvPicPr>
             <a:picLocks noChangeAspect="1"/>
           </p:cNvPicPr>
@@ -12255,7 +11529,7 @@
       </p:pic>
       <p:sp>
         <p:nvSpPr>
-          <p:cNvPr id="23" name="Text 20"/>
+          <p:cNvPr id="21" name="Text 18"/>
           <p:cNvSpPr txBox="1"/>
           <p:nvPr/>
         </p:nvSpPr>
@@ -12294,7 +11568,7 @@
       </p:sp>
       <p:sp>
         <p:nvSpPr>
-          <p:cNvPr id="24" name="frame apply.jpg"/>
+          <p:cNvPr id="22" name="frame apply.jpg"/>
           <p:cNvSpPr/>
           <p:nvPr/>
         </p:nvSpPr>
@@ -12319,7 +11593,7 @@
       </p:sp>
       <p:pic>
         <p:nvPicPr>
-          <p:cNvPr id="25" name="Image 1" descr="apply.jpg">    </p:cNvPr>
+          <p:cNvPr id="23" name="Image 1" descr="apply.jpg">    </p:cNvPr>
           <p:cNvPicPr>
             <a:picLocks noChangeAspect="1"/>
           </p:cNvPicPr>
@@ -12343,7 +11617,7 @@
       </p:pic>
       <p:sp>
         <p:nvSpPr>
-          <p:cNvPr id="26" name="Text 22"/>
+          <p:cNvPr id="24" name="Text 20"/>
           <p:cNvSpPr txBox="1"/>
           <p:nvPr/>
         </p:nvSpPr>
@@ -12501,41 +11775,14 @@
       </p:sp>
       <p:sp>
         <p:nvSpPr>
-          <p:cNvPr id="3" name="module chip"/>
-          <p:cNvSpPr/>
-          <p:nvPr/>
-        </p:nvSpPr>
-        <p:spPr>
-          <a:xfrm>
-            <a:off x="10012680" y="548640"/>
-            <a:ext cx="1627632" cy="411480"/>
-          </a:xfrm>
-          <a:prstGeom prst="roundRect">
-            <a:avLst>
-              <a:gd name="adj" fmla="val 17778"/>
-            </a:avLst>
-          </a:prstGeom>
-          <a:solidFill>
-            <a:schemeClr val="bg2"/>
-          </a:solidFill>
-          <a:ln w="12700">
-            <a:solidFill>
-              <a:schemeClr val="accent3"/>
-            </a:solidFill>
-            <a:prstDash val="solid"/>
-          </a:ln>
-        </p:spPr>
-      </p:sp>
-      <p:sp>
-        <p:nvSpPr>
-          <p:cNvPr id="4" name="Text 2"/>
-          <p:cNvSpPr txBox="1"/>
-          <p:nvPr/>
-        </p:nvSpPr>
-        <p:spPr>
-          <a:xfrm>
-            <a:off x="10012680" y="548640"/>
-            <a:ext cx="1627632" cy="411480"/>
+          <p:cNvPr id="3" name="Text 1"/>
+          <p:cNvSpPr txBox="1"/>
+          <p:nvPr/>
+        </p:nvSpPr>
+        <p:spPr>
+          <a:xfrm>
+            <a:off x="548640" y="1234440"/>
+            <a:ext cx="7315200" cy="256032"/>
           </a:xfrm>
           <a:prstGeom prst="rect">
             <a:avLst/>
@@ -12547,57 +11794,18 @@
           <a:bodyPr wrap="square" lIns="0" tIns="0" rIns="0" bIns="0" rtlCol="0" anchor="ctr"/>
           <a:lstStyle/>
           <a:p>
-            <a:pPr algn="ctr" indent="0" marL="0">
-              <a:buNone/>
-            </a:pPr>
-            <a:r>
-              <a:rPr lang="en-US" sz="1200" b="1" dirty="0">
-                <a:solidFill>
-                  <a:schemeClr val="accent1"/>
+            <a:pPr indent="0" marL="0">
+              <a:buNone/>
+            </a:pPr>
+            <a:r>
+              <a:rPr lang="en-US" sz="1100" dirty="0">
+                <a:solidFill>
+                  <a:schemeClr val="tx2"/>
                 </a:solidFill>
                 <a:latin typeface="Courier New" pitchFamily="34" charset="0"/>
                 <a:ea typeface="Courier New" pitchFamily="34" charset="-122"/>
                 <a:cs typeface="Courier New" pitchFamily="34" charset="-120"/>
               </a:rPr>
-              <a:t>M7 · 15 pts</a:t>
-            </a:r>
-            <a:endParaRPr lang="en-US" sz="1200" dirty="0"/>
-          </a:p>
-        </p:txBody>
-      </p:sp>
-      <p:sp>
-        <p:nvSpPr>
-          <p:cNvPr id="5" name="Text 3"/>
-          <p:cNvSpPr txBox="1"/>
-          <p:nvPr/>
-        </p:nvSpPr>
-        <p:spPr>
-          <a:xfrm>
-            <a:off x="548640" y="1234440"/>
-            <a:ext cx="7315200" cy="256032"/>
-          </a:xfrm>
-          <a:prstGeom prst="rect">
-            <a:avLst/>
-          </a:prstGeom>
-          <a:noFill/>
-          <a:ln/>
-        </p:spPr>
-        <p:txBody>
-          <a:bodyPr wrap="square" lIns="0" tIns="0" rIns="0" bIns="0" rtlCol="0" anchor="ctr"/>
-          <a:lstStyle/>
-          <a:p>
-            <a:pPr indent="0" marL="0">
-              <a:buNone/>
-            </a:pPr>
-            <a:r>
-              <a:rPr lang="en-US" sz="1100" dirty="0">
-                <a:solidFill>
-                  <a:schemeClr val="tx2"/>
-                </a:solidFill>
-                <a:latin typeface="Courier New" pitchFamily="34" charset="0"/>
-                <a:ea typeface="Courier New" pitchFamily="34" charset="-122"/>
-                <a:cs typeface="Courier New" pitchFamily="34" charset="-120"/>
-              </a:rPr>
               <a:t>aws console: EKS clusters, Asia Pacific (Mumbai)</a:t>
             </a:r>
             <a:endParaRPr lang="en-US" sz="1100" dirty="0"/>
@@ -12606,7 +11814,7 @@
       </p:sp>
       <p:sp>
         <p:nvSpPr>
-          <p:cNvPr id="6" name="frame eks.jpg"/>
+          <p:cNvPr id="4" name="frame eks.jpg"/>
           <p:cNvSpPr/>
           <p:nvPr/>
         </p:nvSpPr>
@@ -12631,7 +11839,7 @@
       </p:sp>
       <p:pic>
         <p:nvPicPr>
-          <p:cNvPr id="7" name="Image 0" descr="eks.jpg">    </p:cNvPr>
+          <p:cNvPr id="5" name="Image 0" descr="eks.jpg">    </p:cNvPr>
           <p:cNvPicPr>
             <a:picLocks noChangeAspect="1"/>
           </p:cNvPicPr>
@@ -12655,7 +11863,7 @@
       </p:pic>
       <p:sp>
         <p:nvSpPr>
-          <p:cNvPr id="8" name="Text 5"/>
+          <p:cNvPr id="6" name="Text 3"/>
           <p:cNvSpPr txBox="1"/>
           <p:nvPr/>
         </p:nvSpPr>
@@ -12694,7 +11902,7 @@
       </p:sp>
       <p:sp>
         <p:nvSpPr>
-          <p:cNvPr id="9" name="frame destroy.jpg"/>
+          <p:cNvPr id="7" name="frame destroy.jpg"/>
           <p:cNvSpPr/>
           <p:nvPr/>
         </p:nvSpPr>
@@ -12719,7 +11927,7 @@
       </p:sp>
       <p:pic>
         <p:nvPicPr>
-          <p:cNvPr id="10" name="Image 1" descr="destroy.jpg">    </p:cNvPr>
+          <p:cNvPr id="8" name="Image 1" descr="destroy.jpg">    </p:cNvPr>
           <p:cNvPicPr>
             <a:picLocks noChangeAspect="1"/>
           </p:cNvPicPr>
@@ -12743,7 +11951,7 @@
       </p:pic>
       <p:sp>
         <p:nvSpPr>
-          <p:cNvPr id="11" name="Text 7"/>
+          <p:cNvPr id="9" name="Text 5"/>
           <p:cNvSpPr txBox="1"/>
           <p:nvPr/>
         </p:nvSpPr>
@@ -12793,7 +12001,7 @@
       </p:sp>
       <p:sp>
         <p:nvSpPr>
-          <p:cNvPr id="12" name="Text 8"/>
+          <p:cNvPr id="10" name="Text 6"/>
           <p:cNvSpPr txBox="1"/>
           <p:nvPr/>
         </p:nvSpPr>
@@ -12832,7 +12040,7 @@
       </p:sp>
       <p:sp>
         <p:nvSpPr>
-          <p:cNvPr id="13" name="frame destroyed.jpg"/>
+          <p:cNvPr id="11" name="frame destroyed.jpg"/>
           <p:cNvSpPr/>
           <p:nvPr/>
         </p:nvSpPr>
@@ -12857,7 +12065,7 @@
       </p:sp>
       <p:pic>
         <p:nvPicPr>
-          <p:cNvPr id="14" name="Image 2" descr="destroyed.jpg">    </p:cNvPr>
+          <p:cNvPr id="12" name="Image 2" descr="destroyed.jpg">    </p:cNvPr>
           <p:cNvPicPr>
             <a:picLocks noChangeAspect="1"/>
           </p:cNvPicPr>
@@ -12881,7 +12089,7 @@
       </p:pic>
       <p:sp>
         <p:nvSpPr>
-          <p:cNvPr id="15" name="Text 10"/>
+          <p:cNvPr id="13" name="Text 8"/>
           <p:cNvSpPr txBox="1"/>
           <p:nvPr/>
         </p:nvSpPr>

--- a/ExpensePilot_DevOps_Capstone.pptx
+++ b/ExpensePilot_DevOps_Capstone.pptx
@@ -119,30 +119,30 @@
   <p:extLst>
     <p:ext uri="{521415D9-36F7-43E2-AB2F-B90AF26B5E84}">
       <p14:sectionLst xmlns:p14="http://schemas.microsoft.com/office/powerpoint/2010/main">
-        <p14:section name="Intro" id="{79c61ff4-c89a-a9ad-6e41-bf2d2ec19946}">
+        <p14:section name="Intro" id="{8edd75cf-1314-1db3-5d1f-7df6f16af89f}">
           <p14:sldIdLst>
             <p14:sldId id="256"/>
           </p14:sldIdLst>
         </p14:section>
-        <p14:section name="Architecture" id="{d24cee12-5d26-ee17-61c6-57e82e8cc580}">
+        <p14:section name="Architecture" id="{cdf2f512-afbd-0c35-a906-643d6b3c4e59}">
           <p14:sldIdLst>
             <p14:sldId id="257"/>
           </p14:sldIdLst>
         </p14:section>
-        <p14:section name="Build" id="{a6c1132c-a7d2-67b8-c47b-7dfd2feba772}">
+        <p14:section name="Build" id="{643181c9-1bdf-7ecf-1b4d-81ae1c4af883}">
           <p14:sldIdLst>
             <p14:sldId id="258"/>
             <p14:sldId id="259"/>
           </p14:sldIdLst>
         </p14:section>
-        <p14:section name="Ship" id="{8360f964-ac5e-014a-a1a9-dfbd4c589e08}">
+        <p14:section name="Ship" id="{4ae10103-f3e8-3997-0ff6-2cf20b13a501}">
           <p14:sldIdLst>
             <p14:sldId id="260"/>
             <p14:sldId id="261"/>
             <p14:sldId id="262"/>
           </p14:sldIdLst>
         </p14:section>
-        <p14:section name="Run" id="{b642f794-5980-18a0-bcce-0f6c9ca93f7d}">
+        <p14:section name="Run" id="{66de9d24-0710-ce06-495d-f0f2f7b5164f}">
           <p14:sldIdLst>
             <p14:sldId id="263"/>
             <p14:sldId id="264"/>
@@ -150,12 +150,12 @@
             <p14:sldId id="266"/>
           </p14:sldIdLst>
         </p14:section>
-        <p14:section name="Extras" id="{f915dbd5-e8c4-1a68-550d-e220a7f5de40}">
+        <p14:section name="Extras" id="{a1e829b8-b5f9-f135-421e-8d0630b16b9b}">
           <p14:sldIdLst>
             <p14:sldId id="267"/>
           </p14:sldIdLst>
         </p14:section>
-        <p14:section name="Demo" id="{69d39b2d-a93f-9c9c-2d7b-d5be1fe4e5fc}">
+        <p14:section name="Demo" id="{0257b11f-96a2-718a-b6b6-cd44f079937f}">
           <p14:sldIdLst>
             <p14:sldId id="268"/>
           </p14:sldIdLst>
@@ -916,7 +916,7 @@
           <a:p>
             <a:r>
               <a:rPr lang="en-US" dirty="0"/>
-              <a:t>For the demo I'll change the heading on the dashboard, commit and push. We watch the Actions run go green and the new SHA tag appear in GHCR. Then I roll it out with helm upgrade using that tag, and kubectl rollout status shows the new pods replacing the old ones. Refreshing expensepilot.local shows the change. The README in the repo has all of these steps and screenshots. Thank you.</a:t>
+              <a:t>For the demo I'll change the heading on the dashboard, commit and push. We watch the Actions run go green and the new SHA tag appear in GHCR. Then I roll it out with helm upgrade using that tag, and kubectl rollout status shows the new pods replacing the old ones. Refreshing expensepilot.local shows the change. If anything goes wrong live, the same flow is in the recorded Loom walkthrough linked on this slide. The README in the repo has all of these steps and screenshots. Thank you.</a:t>
             </a:r>
             <a:endParaRPr lang="en-US" dirty="0"/>
           </a:p>
@@ -1620,7 +1620,7 @@
           <a:p>
             <a:r>
               <a:rPr lang="en-US" dirty="0"/>
-              <a:t>This is the cluster Terraform created, showing Active on Kubernetes 1.31 in the Mumbai region in the AWS console. Once I had the evidence I ran terraform destroy. It planned 56 resources to destroy, the same 56 that apply created, including the VPC and the EKS cluster, and after confirming with yes it finished with Destroy complete, 56 destroyed. The VPC is the last thing removed. There are no running costs left on the account.</a:t>
+              <a:t>In the AWS console, the cluster Terraform created is Active on Kubernetes 1.31 in Mumbai, and expensepilot-vpc shows up with the 10.20.0.0/16 CIDR from the Terraform code. Once I had the evidence I ran terraform destroy. It planned 56 resources to destroy, the same 56 that apply created, including the VPC and the EKS cluster, and after confirming with yes it finished with Destroy complete, 56 destroyed. The VPC is the last thing removed. There are no running costs left on the account.</a:t>
             </a:r>
             <a:endParaRPr lang="en-US" dirty="0"/>
           </a:p>
@@ -5549,8 +5549,8 @@
         </p:nvSpPr>
         <p:spPr>
           <a:xfrm>
-            <a:off x="6035040" y="5623560"/>
-            <a:ext cx="5605272" cy="502920"/>
+            <a:off x="6035040" y="5193792"/>
+            <a:ext cx="5605272" cy="365760"/>
           </a:xfrm>
           <a:prstGeom prst="rect">
             <a:avLst/>
@@ -5566,21 +5566,18 @@
               <a:buNone/>
             </a:pPr>
             <a:r>
-              <a:rPr lang="en-US" sz="2000" b="1" dirty="0">
-                <a:solidFill>
-                  <a:schemeClr val="tx1"/>
-                </a:solidFill>
-                <a:latin typeface="Arial" pitchFamily="34" charset="0"/>
-                <a:ea typeface="Arial" pitchFamily="34" charset="-122"/>
-                <a:cs typeface="Arial" pitchFamily="34" charset="-120"/>
-              </a:rPr>
-              <a:t>Thanks!  </a:t>
-            </a:r>
-            <a:pPr indent="0" marL="0">
-              <a:buNone/>
-            </a:pPr>
-            <a:r>
-              <a:rPr lang="en-US" sz="1200" u="sng" dirty="0">
+              <a:rPr lang="en-US" sz="1400" b="1" dirty="0">
+                <a:solidFill>
+                  <a:schemeClr val="accent1"/>
+                </a:solidFill>
+              </a:rPr>
+              <a:t>Recorded walkthrough:  </a:t>
+            </a:r>
+            <a:pPr indent="0" marL="0">
+              <a:buNone/>
+            </a:pPr>
+            <a:r>
+              <a:rPr lang="en-US" sz="1300" u="sng" dirty="0">
                 <a:solidFill>
                   <a:schemeClr val="accent4"/>
                 </a:solidFill>
@@ -5588,6 +5585,66 @@
                 <a:ea typeface="Courier New" pitchFamily="34" charset="-122"/>
                 <a:cs typeface="Courier New" pitchFamily="34" charset="-120"/>
                 <a:hlinkClick r:id="rId2" invalidUrl="" action="" tgtFrame="" tooltip="" history="1" highlightClick="0" endSnd="0">
+                  <a:extLst>
+                    <a:ext uri="{A12FA001-AC4F-418D-AE19-62706E023703}">
+                      <ahyp:hlinkClr xmlns:ahyp="http://schemas.microsoft.com/office/drawing/2018/hyperlinkcolor" val="tx"/>
+                    </a:ext>
+                  </a:extLst>
+                </a:hlinkClick>
+              </a:rPr>
+              <a:t>watch the demo on Loom</a:t>
+            </a:r>
+            <a:endParaRPr lang="en-US" sz="1400" dirty="0"/>
+          </a:p>
+        </p:txBody>
+      </p:sp>
+      <p:sp>
+        <p:nvSpPr>
+          <p:cNvPr id="19" name="Text 16"/>
+          <p:cNvSpPr txBox="1"/>
+          <p:nvPr/>
+        </p:nvSpPr>
+        <p:spPr>
+          <a:xfrm>
+            <a:off x="6035040" y="5623560"/>
+            <a:ext cx="5605272" cy="502920"/>
+          </a:xfrm>
+          <a:prstGeom prst="rect">
+            <a:avLst/>
+          </a:prstGeom>
+          <a:noFill/>
+          <a:ln/>
+        </p:spPr>
+        <p:txBody>
+          <a:bodyPr wrap="square" lIns="0" tIns="0" rIns="0" bIns="0" rtlCol="0" anchor="ctr"/>
+          <a:lstStyle/>
+          <a:p>
+            <a:pPr indent="0" marL="0">
+              <a:buNone/>
+            </a:pPr>
+            <a:r>
+              <a:rPr lang="en-US" sz="2000" b="1" dirty="0">
+                <a:solidFill>
+                  <a:schemeClr val="tx1"/>
+                </a:solidFill>
+                <a:latin typeface="Arial" pitchFamily="34" charset="0"/>
+                <a:ea typeface="Arial" pitchFamily="34" charset="-122"/>
+                <a:cs typeface="Arial" pitchFamily="34" charset="-120"/>
+              </a:rPr>
+              <a:t>Thanks!  </a:t>
+            </a:r>
+            <a:pPr indent="0" marL="0">
+              <a:buNone/>
+            </a:pPr>
+            <a:r>
+              <a:rPr lang="en-US" sz="1200" u="sng" dirty="0">
+                <a:solidFill>
+                  <a:schemeClr val="accent4"/>
+                </a:solidFill>
+                <a:latin typeface="Courier New" pitchFamily="34" charset="0"/>
+                <a:ea typeface="Courier New" pitchFamily="34" charset="-122"/>
+                <a:cs typeface="Courier New" pitchFamily="34" charset="-120"/>
+                <a:hlinkClick r:id="rId3" invalidUrl="" action="" tgtFrame="" tooltip="" history="1" highlightClick="0" endSnd="0">
                   <a:extLst>
                     <a:ext uri="{A12FA001-AC4F-418D-AE19-62706E023703}">
                       <ahyp:hlinkClr xmlns:ahyp="http://schemas.microsoft.com/office/drawing/2018/hyperlinkcolor" val="tx"/>
@@ -11781,8 +11838,8 @@
         </p:nvSpPr>
         <p:spPr>
           <a:xfrm>
-            <a:off x="548640" y="1234440"/>
-            <a:ext cx="7315200" cy="256032"/>
+            <a:off x="548640" y="1280160"/>
+            <a:ext cx="5394960" cy="256032"/>
           </a:xfrm>
           <a:prstGeom prst="rect">
             <a:avLst/>
@@ -11806,7 +11863,7 @@
                 <a:ea typeface="Courier New" pitchFamily="34" charset="-122"/>
                 <a:cs typeface="Courier New" pitchFamily="34" charset="-120"/>
               </a:rPr>
-              <a:t>aws console: EKS clusters, Asia Pacific (Mumbai)</a:t>
+              <a:t>aws console: EKS cluster, ap-south-1</a:t>
             </a:r>
             <a:endParaRPr lang="en-US" sz="1100" dirty="0"/>
           </a:p>
@@ -11820,8 +11877,8 @@
         </p:nvSpPr>
         <p:spPr>
           <a:xfrm>
-            <a:off x="521208" y="1527048"/>
-            <a:ext cx="11146536" cy="2223286"/>
+            <a:off x="521208" y="1572768"/>
+            <a:ext cx="5449824" cy="1109579"/>
           </a:xfrm>
           <a:prstGeom prst="rect">
             <a:avLst/>
@@ -11853,8 +11910,8 @@
         </p:blipFill>
         <p:spPr>
           <a:xfrm>
-            <a:off x="548640" y="1554480"/>
-            <a:ext cx="11091672" cy="2168422"/>
+            <a:off x="548640" y="1600200"/>
+            <a:ext cx="5394960" cy="1054715"/>
           </a:xfrm>
           <a:prstGeom prst="rect">
             <a:avLst/>
@@ -11869,8 +11926,8 @@
         </p:nvSpPr>
         <p:spPr>
           <a:xfrm>
-            <a:off x="548640" y="3886200"/>
-            <a:ext cx="5486400" cy="256032"/>
+            <a:off x="6245352" y="1280160"/>
+            <a:ext cx="5394960" cy="256032"/>
           </a:xfrm>
           <a:prstGeom prst="rect">
             <a:avLst/>
@@ -11894,7 +11951,7 @@
                 <a:ea typeface="Courier New" pitchFamily="34" charset="-122"/>
                 <a:cs typeface="Courier New" pitchFamily="34" charset="-120"/>
               </a:rPr>
-              <a:t>$ terraform destroy</a:t>
+              <a:t>aws console: expensepilot-vpc, 10.20.0.0/16</a:t>
             </a:r>
             <a:endParaRPr lang="en-US" sz="1100" dirty="0"/>
           </a:p>
@@ -11902,14 +11959,14 @@
       </p:sp>
       <p:sp>
         <p:nvSpPr>
-          <p:cNvPr id="7" name="frame destroy.jpg"/>
+          <p:cNvPr id="7" name="frame vpc.jpg"/>
           <p:cNvSpPr/>
           <p:nvPr/>
         </p:nvSpPr>
         <p:spPr>
           <a:xfrm>
-            <a:off x="521208" y="4178808"/>
-            <a:ext cx="5815584" cy="1943100"/>
+            <a:off x="6217920" y="1572768"/>
+            <a:ext cx="5449824" cy="1166825"/>
           </a:xfrm>
           <a:prstGeom prst="rect">
             <a:avLst/>
@@ -11927,7 +11984,7 @@
       </p:sp>
       <p:pic>
         <p:nvPicPr>
-          <p:cNvPr id="8" name="Image 1" descr="destroy.jpg">    </p:cNvPr>
+          <p:cNvPr id="8" name="Image 1" descr="vpc.jpg">    </p:cNvPr>
           <p:cNvPicPr>
             <a:picLocks noChangeAspect="1"/>
           </p:cNvPicPr>
@@ -11941,8 +11998,8 @@
         </p:blipFill>
         <p:spPr>
           <a:xfrm>
-            <a:off x="548640" y="4206240"/>
-            <a:ext cx="5760720" cy="1888236"/>
+            <a:off x="6245352" y="1600200"/>
+            <a:ext cx="5394960" cy="1111961"/>
           </a:xfrm>
           <a:prstGeom prst="rect">
             <a:avLst/>
@@ -11957,58 +12014,8 @@
         </p:nvSpPr>
         <p:spPr>
           <a:xfrm>
-            <a:off x="6720840" y="3886200"/>
-            <a:ext cx="4919472" cy="868680"/>
-          </a:xfrm>
-          <a:prstGeom prst="rect">
-            <a:avLst/>
-          </a:prstGeom>
-          <a:noFill/>
-          <a:ln/>
-        </p:spPr>
-        <p:txBody>
-          <a:bodyPr wrap="square" lIns="0" tIns="0" rIns="0" bIns="0" rtlCol="0" anchor="ctr"/>
-          <a:lstStyle/>
-          <a:p>
-            <a:pPr indent="0" marL="0">
-              <a:buNone/>
-            </a:pPr>
-            <a:r>
-              <a:rPr lang="en-US" sz="5400" b="1" dirty="0">
-                <a:solidFill>
-                  <a:schemeClr val="accent5"/>
-                </a:solidFill>
-                <a:latin typeface="Arial" pitchFamily="34" charset="0"/>
-                <a:ea typeface="Arial" pitchFamily="34" charset="-122"/>
-                <a:cs typeface="Arial" pitchFamily="34" charset="-120"/>
-              </a:rPr>
-              <a:t>56</a:t>
-            </a:r>
-            <a:pPr indent="0" marL="0">
-              <a:buNone/>
-            </a:pPr>
-            <a:r>
-              <a:rPr lang="en-US" sz="1800" dirty="0">
-                <a:solidFill>
-                  <a:schemeClr val="tx2"/>
-                </a:solidFill>
-              </a:rPr>
-              <a:t>  planned, 56 destroyed</a:t>
-            </a:r>
-            <a:endParaRPr lang="en-US" sz="5400" dirty="0"/>
-          </a:p>
-        </p:txBody>
-      </p:sp>
-      <p:sp>
-        <p:nvSpPr>
-          <p:cNvPr id="10" name="Text 6"/>
-          <p:cNvSpPr txBox="1"/>
-          <p:nvPr/>
-        </p:nvSpPr>
-        <p:spPr>
-          <a:xfrm>
-            <a:off x="6720840" y="4846320"/>
-            <a:ext cx="4919472" cy="256032"/>
+            <a:off x="548640" y="3383280"/>
+            <a:ext cx="5486400" cy="256032"/>
           </a:xfrm>
           <a:prstGeom prst="rect">
             <a:avLst/>
@@ -12032,7 +12039,7 @@
                 <a:ea typeface="Courier New" pitchFamily="34" charset="-122"/>
                 <a:cs typeface="Courier New" pitchFamily="34" charset="-120"/>
               </a:rPr>
-              <a:t>destroy finished, VPC removed last</a:t>
+              <a:t>$ terraform destroy</a:t>
             </a:r>
             <a:endParaRPr lang="en-US" sz="1100" dirty="0"/>
           </a:p>
@@ -12040,14 +12047,14 @@
       </p:sp>
       <p:sp>
         <p:nvSpPr>
-          <p:cNvPr id="11" name="frame destroyed.jpg"/>
+          <p:cNvPr id="10" name="frame destroy.jpg"/>
           <p:cNvSpPr/>
           <p:nvPr/>
         </p:nvSpPr>
         <p:spPr>
           <a:xfrm>
-            <a:off x="6693408" y="5138928"/>
-            <a:ext cx="4974336" cy="645201"/>
+            <a:off x="521208" y="3675888"/>
+            <a:ext cx="6455664" cy="2152904"/>
           </a:xfrm>
           <a:prstGeom prst="rect">
             <a:avLst/>
@@ -12065,7 +12072,7 @@
       </p:sp>
       <p:pic>
         <p:nvPicPr>
-          <p:cNvPr id="12" name="Image 2" descr="destroyed.jpg">    </p:cNvPr>
+          <p:cNvPr id="11" name="Image 2" descr="destroy.jpg">    </p:cNvPr>
           <p:cNvPicPr>
             <a:picLocks noChangeAspect="1"/>
           </p:cNvPicPr>
@@ -12079,8 +12086,8 @@
         </p:blipFill>
         <p:spPr>
           <a:xfrm>
-            <a:off x="6720840" y="5166360"/>
-            <a:ext cx="4919472" cy="590337"/>
+            <a:off x="548640" y="3703320"/>
+            <a:ext cx="6400800" cy="2098040"/>
           </a:xfrm>
           <a:prstGeom prst="rect">
             <a:avLst/>
@@ -12089,14 +12096,152 @@
       </p:pic>
       <p:sp>
         <p:nvSpPr>
+          <p:cNvPr id="12" name="Text 7"/>
+          <p:cNvSpPr txBox="1"/>
+          <p:nvPr/>
+        </p:nvSpPr>
+        <p:spPr>
+          <a:xfrm>
+            <a:off x="7315200" y="3383280"/>
+            <a:ext cx="4325112" cy="868680"/>
+          </a:xfrm>
+          <a:prstGeom prst="rect">
+            <a:avLst/>
+          </a:prstGeom>
+          <a:noFill/>
+          <a:ln/>
+        </p:spPr>
+        <p:txBody>
+          <a:bodyPr wrap="square" lIns="0" tIns="0" rIns="0" bIns="0" rtlCol="0" anchor="ctr"/>
+          <a:lstStyle/>
+          <a:p>
+            <a:pPr indent="0" marL="0">
+              <a:buNone/>
+            </a:pPr>
+            <a:r>
+              <a:rPr lang="en-US" sz="5400" b="1" dirty="0">
+                <a:solidFill>
+                  <a:schemeClr val="accent5"/>
+                </a:solidFill>
+                <a:latin typeface="Arial" pitchFamily="34" charset="0"/>
+                <a:ea typeface="Arial" pitchFamily="34" charset="-122"/>
+                <a:cs typeface="Arial" pitchFamily="34" charset="-120"/>
+              </a:rPr>
+              <a:t>56</a:t>
+            </a:r>
+            <a:pPr indent="0" marL="0">
+              <a:buNone/>
+            </a:pPr>
+            <a:r>
+              <a:rPr lang="en-US" sz="1800" dirty="0">
+                <a:solidFill>
+                  <a:schemeClr val="tx2"/>
+                </a:solidFill>
+              </a:rPr>
+              <a:t>  destroyed</a:t>
+            </a:r>
+            <a:endParaRPr lang="en-US" sz="5400" dirty="0"/>
+          </a:p>
+        </p:txBody>
+      </p:sp>
+      <p:sp>
+        <p:nvSpPr>
           <p:cNvPr id="13" name="Text 8"/>
           <p:cNvSpPr txBox="1"/>
           <p:nvPr/>
         </p:nvSpPr>
         <p:spPr>
           <a:xfrm>
-            <a:off x="6720840" y="5897880"/>
-            <a:ext cx="4919472" cy="320040"/>
+            <a:off x="7315200" y="4434840"/>
+            <a:ext cx="4325112" cy="256032"/>
+          </a:xfrm>
+          <a:prstGeom prst="rect">
+            <a:avLst/>
+          </a:prstGeom>
+          <a:noFill/>
+          <a:ln/>
+        </p:spPr>
+        <p:txBody>
+          <a:bodyPr wrap="square" lIns="0" tIns="0" rIns="0" bIns="0" rtlCol="0" anchor="ctr"/>
+          <a:lstStyle/>
+          <a:p>
+            <a:pPr indent="0" marL="0">
+              <a:buNone/>
+            </a:pPr>
+            <a:r>
+              <a:rPr lang="en-US" sz="1100" dirty="0">
+                <a:solidFill>
+                  <a:schemeClr val="tx2"/>
+                </a:solidFill>
+                <a:latin typeface="Courier New" pitchFamily="34" charset="0"/>
+                <a:ea typeface="Courier New" pitchFamily="34" charset="-122"/>
+                <a:cs typeface="Courier New" pitchFamily="34" charset="-120"/>
+              </a:rPr>
+              <a:t>destroy complete, VPC removed last</a:t>
+            </a:r>
+            <a:endParaRPr lang="en-US" sz="1100" dirty="0"/>
+          </a:p>
+        </p:txBody>
+      </p:sp>
+      <p:sp>
+        <p:nvSpPr>
+          <p:cNvPr id="14" name="frame destroyed.jpg"/>
+          <p:cNvSpPr/>
+          <p:nvPr/>
+        </p:nvSpPr>
+        <p:spPr>
+          <a:xfrm>
+            <a:off x="7287768" y="4727448"/>
+            <a:ext cx="4379976" cy="573877"/>
+          </a:xfrm>
+          <a:prstGeom prst="rect">
+            <a:avLst/>
+          </a:prstGeom>
+          <a:solidFill>
+            <a:schemeClr val="accent3"/>
+          </a:solidFill>
+          <a:ln w="9525">
+            <a:solidFill>
+              <a:schemeClr val="accent3"/>
+            </a:solidFill>
+            <a:prstDash val="solid"/>
+          </a:ln>
+        </p:spPr>
+      </p:sp>
+      <p:pic>
+        <p:nvPicPr>
+          <p:cNvPr id="15" name="Image 3" descr="destroyed.jpg">    </p:cNvPr>
+          <p:cNvPicPr>
+            <a:picLocks noChangeAspect="1"/>
+          </p:cNvPicPr>
+          <p:nvPr/>
+        </p:nvPicPr>
+        <p:blipFill>
+          <a:blip r:embed="rId4"/>
+          <a:stretch>
+            <a:fillRect/>
+          </a:stretch>
+        </p:blipFill>
+        <p:spPr>
+          <a:xfrm>
+            <a:off x="7315200" y="4754880"/>
+            <a:ext cx="4325112" cy="519013"/>
+          </a:xfrm>
+          <a:prstGeom prst="rect">
+            <a:avLst/>
+          </a:prstGeom>
+        </p:spPr>
+      </p:pic>
+      <p:sp>
+        <p:nvSpPr>
+          <p:cNvPr id="16" name="Text 10"/>
+          <p:cNvSpPr txBox="1"/>
+          <p:nvPr/>
+        </p:nvSpPr>
+        <p:spPr>
+          <a:xfrm>
+            <a:off x="7315200" y="5486400"/>
+            <a:ext cx="4325112" cy="640080"/>
           </a:xfrm>
           <a:prstGeom prst="rect">
             <a:avLst/>
